--- a/output/wordlabs-dark-3day.pptx
+++ b/output/wordlabs-dark-3day.pptx
@@ -5622,7 +5622,7 @@
                 <a:ea typeface="Trebuchet MS" pitchFamily="34" charset="-122"/>
                 <a:cs typeface="Trebuchet MS" pitchFamily="34" charset="-120"/>
               </a:rPr>
-              <a:t>1</a:t>
+              <a:t>0</a:t>
             </a:r>
             <a:pPr algn="ctr" indent="0" marL="0">
               <a:buNone/>
@@ -6071,7 +6071,7 @@
                 <a:ea typeface="Calibri" pitchFamily="34" charset="-122"/>
                 <a:cs typeface="Calibri" pitchFamily="34" charset="-120"/>
               </a:rPr>
-              <a:t> outside made it hard to see, so she waited for the sky to </a:t>
+              <a:t> crept in as the sky began to </a:t>
             </a:r>
             <a:pPr algn="l" indent="0" marL="0">
               <a:buNone/>
@@ -6102,7 +6102,7 @@
                 <a:ea typeface="Calibri" pitchFamily="34" charset="-122"/>
                 <a:cs typeface="Calibri" pitchFamily="34" charset="-120"/>
               </a:rPr>
-              <a:t> even more before stargazing.</a:t>
+              <a:t> before the storm.</a:t>
             </a:r>
             <a:endParaRPr lang="en-US" sz="1800" dirty="0"/>
           </a:p>
@@ -16337,7 +16337,7 @@
                 <a:ea typeface="Trebuchet MS" pitchFamily="34" charset="-122"/>
                 <a:cs typeface="Trebuchet MS" pitchFamily="34" charset="-120"/>
               </a:rPr>
-              <a:t>2</a:t>
+              <a:t>1</a:t>
             </a:r>
             <a:pPr algn="ctr" indent="0" marL="0">
               <a:buNone/>
@@ -16351,7 +16351,7 @@
                 <a:ea typeface="Trebuchet MS" pitchFamily="34" charset="-122"/>
                 <a:cs typeface="Trebuchet MS" pitchFamily="34" charset="-120"/>
               </a:rPr>
-              <a:t>  punctuation marks</a:t>
+              <a:t>  punctuation mark</a:t>
             </a:r>
             <a:endParaRPr lang="en-US" sz="2800" dirty="0"/>
           </a:p>
@@ -16786,7 +16786,7 @@
                 <a:ea typeface="Calibri" pitchFamily="34" charset="-122"/>
                 <a:cs typeface="Calibri" pitchFamily="34" charset="-120"/>
               </a:rPr>
-              <a:t> hallway felt eerie, but she walked </a:t>
+              <a:t> room felt eerie, but she moved </a:t>
             </a:r>
             <a:pPr algn="l" indent="0" marL="0">
               <a:buNone/>
@@ -16817,118 +16817,343 @@
                 <a:ea typeface="Calibri" pitchFamily="34" charset="-122"/>
                 <a:cs typeface="Calibri" pitchFamily="34" charset="-120"/>
               </a:rPr>
-              <a:t> through it, reminding herself that </a:t>
-            </a:r>
+              <a:t> through it and waited until after dark.</a:t>
+            </a:r>
+            <a:endParaRPr lang="en-US" sz="1800" dirty="0"/>
+          </a:p>
+        </p:txBody>
+      </p:sp>
+      <p:sp>
+        <p:nvSpPr>
+          <p:cNvPr id="13" name="Shape 11"/>
+          <p:cNvSpPr/>
+          <p:nvPr/>
+        </p:nvSpPr>
+        <p:spPr>
+          <a:xfrm>
+            <a:off x="365760" y="2852928"/>
+            <a:ext cx="8412480" cy="475488"/>
+          </a:xfrm>
+          <a:prstGeom prst="rect">
+            <a:avLst>
+              <a:gd name="adj" fmla="val 15385"/>
+            </a:avLst>
+          </a:prstGeom>
+          <a:solidFill>
+            <a:srgbClr val="CCFBF1"/>
+          </a:solidFill>
+          <a:ln w="12700">
+            <a:solidFill>
+              <a:srgbClr val="0D9488"/>
+            </a:solidFill>
+            <a:prstDash val="solid"/>
+          </a:ln>
+        </p:spPr>
+      </p:sp>
+      <p:sp>
+        <p:nvSpPr>
+          <p:cNvPr id="14" name="Text 12"/>
+          <p:cNvSpPr/>
+          <p:nvPr/>
+        </p:nvSpPr>
+        <p:spPr>
+          <a:xfrm>
+            <a:off x="502920" y="2852928"/>
+            <a:ext cx="8229600" cy="475488"/>
+          </a:xfrm>
+          <a:prstGeom prst="rect">
+            <a:avLst/>
+          </a:prstGeom>
+          <a:noFill/>
+          <a:ln/>
+        </p:spPr>
+        <p:txBody>
+          <a:bodyPr wrap="square" rtlCol="0" anchor="ctr"/>
+          <a:lstStyle/>
+          <a:p>
             <a:pPr algn="l" indent="0" marL="0">
               <a:buNone/>
             </a:pPr>
             <a:r>
-              <a:rPr lang="en-US" sz="1800" b="1" dirty="0">
-                <a:solidFill>
-                  <a:srgbClr val="0D9488"/>
-                </a:solidFill>
-                <a:highlight>
-                  <a:srgbClr val="CCFBF1"/>
-                </a:highlight>
+              <a:rPr lang="en-US" sz="1200" b="1" dirty="0">
+                <a:solidFill>
+                  <a:srgbClr val="0F766E"/>
+                </a:solidFill>
                 <a:latin typeface="Calibri" pitchFamily="34" charset="0"/>
                 <a:ea typeface="Calibri" pitchFamily="34" charset="-122"/>
                 <a:cs typeface="Calibri" pitchFamily="34" charset="-120"/>
               </a:rPr>
-              <a:t>darkness</a:t>
-            </a:r>
-            <a:pPr algn="l" indent="0" marL="0">
-              <a:buNone/>
-            </a:pPr>
-            <a:r>
-              <a:rPr lang="en-US" sz="1800" dirty="0">
-                <a:solidFill>
-                  <a:srgbClr val="0F172A"/>
+              <a:t>Now rewrite each focus word below with space between letters — leave room for your breakdown.</a:t>
+            </a:r>
+            <a:endParaRPr lang="en-US" sz="1200" dirty="0"/>
+          </a:p>
+        </p:txBody>
+      </p:sp>
+      <p:sp>
+        <p:nvSpPr>
+          <p:cNvPr id="15" name="Shape 13"/>
+          <p:cNvSpPr/>
+          <p:nvPr/>
+        </p:nvSpPr>
+        <p:spPr>
+          <a:xfrm>
+            <a:off x="411480" y="3456432"/>
+            <a:ext cx="2499360" cy="1005840"/>
+          </a:xfrm>
+          <a:prstGeom prst="rect">
+            <a:avLst>
+              <a:gd name="adj" fmla="val 7273"/>
+            </a:avLst>
+          </a:prstGeom>
+          <a:solidFill>
+            <a:srgbClr val="F8FAFC"/>
+          </a:solidFill>
+          <a:ln w="12700">
+            <a:solidFill>
+              <a:srgbClr val="E2E8F0"/>
+            </a:solidFill>
+            <a:prstDash val="solid"/>
+          </a:ln>
+        </p:spPr>
+      </p:sp>
+      <p:sp>
+        <p:nvSpPr>
+          <p:cNvPr id="16" name="Shape 14"/>
+          <p:cNvSpPr/>
+          <p:nvPr/>
+        </p:nvSpPr>
+        <p:spPr>
+          <a:xfrm>
+            <a:off x="411480" y="3977640"/>
+            <a:ext cx="2499360" cy="0"/>
+          </a:xfrm>
+          <a:prstGeom prst="line">
+            <a:avLst/>
+          </a:prstGeom>
+          <a:noFill/>
+          <a:ln w="12700">
+            <a:solidFill>
+              <a:srgbClr val="E2E8F0"/>
+            </a:solidFill>
+            <a:prstDash val="dash"/>
+          </a:ln>
+        </p:spPr>
+      </p:sp>
+      <p:sp>
+        <p:nvSpPr>
+          <p:cNvPr id="17" name="Text 15"/>
+          <p:cNvSpPr/>
+          <p:nvPr/>
+        </p:nvSpPr>
+        <p:spPr>
+          <a:xfrm>
+            <a:off x="411480" y="3456432"/>
+            <a:ext cx="2499360" cy="502920"/>
+          </a:xfrm>
+          <a:prstGeom prst="rect">
+            <a:avLst/>
+          </a:prstGeom>
+          <a:noFill/>
+          <a:ln/>
+        </p:spPr>
+        <p:txBody>
+          <a:bodyPr wrap="square" lIns="0" tIns="0" rIns="0" bIns="0" rtlCol="0" anchor="ctr"/>
+          <a:lstStyle/>
+          <a:p>
+            <a:pPr algn="ctr" indent="0" marL="0">
+              <a:buNone/>
+            </a:pPr>
+            <a:r>
+              <a:rPr lang="en-US" sz="1400" b="1" dirty="0">
+                <a:solidFill>
+                  <a:srgbClr val="0D9488"/>
+                </a:solidFill>
+                <a:latin typeface="Trebuchet MS" pitchFamily="34" charset="0"/>
+                <a:ea typeface="Trebuchet MS" pitchFamily="34" charset="-122"/>
+                <a:cs typeface="Trebuchet MS" pitchFamily="34" charset="-120"/>
+              </a:rPr>
+              <a:t>darkened</a:t>
+            </a:r>
+            <a:endParaRPr lang="en-US" sz="1400" dirty="0"/>
+          </a:p>
+        </p:txBody>
+      </p:sp>
+      <p:sp>
+        <p:nvSpPr>
+          <p:cNvPr id="18" name="Text 16"/>
+          <p:cNvSpPr/>
+          <p:nvPr/>
+        </p:nvSpPr>
+        <p:spPr>
+          <a:xfrm>
+            <a:off x="411480" y="4005072"/>
+            <a:ext cx="2499360" cy="457200"/>
+          </a:xfrm>
+          <a:prstGeom prst="rect">
+            <a:avLst/>
+          </a:prstGeom>
+          <a:noFill/>
+          <a:ln/>
+        </p:spPr>
+        <p:txBody>
+          <a:bodyPr wrap="square" lIns="0" tIns="0" rIns="0" bIns="0" rtlCol="0" anchor="ctr"/>
+          <a:lstStyle/>
+          <a:p>
+            <a:pPr algn="ctr" indent="0" marL="0">
+              <a:buNone/>
+            </a:pPr>
+            <a:r>
+              <a:rPr lang="en-US" sz="900" i="1" dirty="0">
+                <a:solidFill>
+                  <a:srgbClr val="475569"/>
                 </a:solidFill>
                 <a:latin typeface="Calibri" pitchFamily="34" charset="0"/>
                 <a:ea typeface="Calibri" pitchFamily="34" charset="-122"/>
                 <a:cs typeface="Calibri" pitchFamily="34" charset="-120"/>
               </a:rPr>
-              <a:t> was nothing to fear.</a:t>
-            </a:r>
-            <a:endParaRPr lang="en-US" sz="1800" dirty="0"/>
-          </a:p>
-        </p:txBody>
-      </p:sp>
-      <p:sp>
-        <p:nvSpPr>
-          <p:cNvPr id="13" name="Shape 11"/>
-          <p:cNvSpPr/>
-          <p:nvPr/>
-        </p:nvSpPr>
-        <p:spPr>
-          <a:xfrm>
-            <a:off x="365760" y="2852928"/>
-            <a:ext cx="8412480" cy="475488"/>
+              <a:t>write your breakdown below</a:t>
+            </a:r>
+            <a:endParaRPr lang="en-US" sz="900" dirty="0"/>
+          </a:p>
+        </p:txBody>
+      </p:sp>
+      <p:sp>
+        <p:nvSpPr>
+          <p:cNvPr id="19" name="Shape 17"/>
+          <p:cNvSpPr/>
+          <p:nvPr/>
+        </p:nvSpPr>
+        <p:spPr>
+          <a:xfrm>
+            <a:off x="3185160" y="3456432"/>
+            <a:ext cx="2499360" cy="1005840"/>
           </a:xfrm>
           <a:prstGeom prst="rect">
             <a:avLst>
-              <a:gd name="adj" fmla="val 15385"/>
+              <a:gd name="adj" fmla="val 7273"/>
             </a:avLst>
           </a:prstGeom>
           <a:solidFill>
-            <a:srgbClr val="CCFBF1"/>
-          </a:solidFill>
-          <a:ln w="12700">
-            <a:solidFill>
-              <a:srgbClr val="0D9488"/>
-            </a:solidFill>
-            <a:prstDash val="solid"/>
-          </a:ln>
-        </p:spPr>
-      </p:sp>
-      <p:sp>
-        <p:nvSpPr>
-          <p:cNvPr id="14" name="Text 12"/>
-          <p:cNvSpPr/>
-          <p:nvPr/>
-        </p:nvSpPr>
-        <p:spPr>
-          <a:xfrm>
-            <a:off x="502920" y="2852928"/>
-            <a:ext cx="8229600" cy="475488"/>
-          </a:xfrm>
-          <a:prstGeom prst="rect">
-            <a:avLst/>
-          </a:prstGeom>
-          <a:noFill/>
-          <a:ln/>
-        </p:spPr>
-        <p:txBody>
-          <a:bodyPr wrap="square" rtlCol="0" anchor="ctr"/>
-          <a:lstStyle/>
-          <a:p>
-            <a:pPr algn="l" indent="0" marL="0">
-              <a:buNone/>
-            </a:pPr>
-            <a:r>
-              <a:rPr lang="en-US" sz="1200" b="1" dirty="0">
-                <a:solidFill>
-                  <a:srgbClr val="0F766E"/>
+            <a:srgbClr val="F8FAFC"/>
+          </a:solidFill>
+          <a:ln w="12700">
+            <a:solidFill>
+              <a:srgbClr val="E2E8F0"/>
+            </a:solidFill>
+            <a:prstDash val="solid"/>
+          </a:ln>
+        </p:spPr>
+      </p:sp>
+      <p:sp>
+        <p:nvSpPr>
+          <p:cNvPr id="20" name="Shape 18"/>
+          <p:cNvSpPr/>
+          <p:nvPr/>
+        </p:nvSpPr>
+        <p:spPr>
+          <a:xfrm>
+            <a:off x="3185160" y="3977640"/>
+            <a:ext cx="2499360" cy="0"/>
+          </a:xfrm>
+          <a:prstGeom prst="line">
+            <a:avLst/>
+          </a:prstGeom>
+          <a:noFill/>
+          <a:ln w="12700">
+            <a:solidFill>
+              <a:srgbClr val="E2E8F0"/>
+            </a:solidFill>
+            <a:prstDash val="dash"/>
+          </a:ln>
+        </p:spPr>
+      </p:sp>
+      <p:sp>
+        <p:nvSpPr>
+          <p:cNvPr id="21" name="Text 19"/>
+          <p:cNvSpPr/>
+          <p:nvPr/>
+        </p:nvSpPr>
+        <p:spPr>
+          <a:xfrm>
+            <a:off x="3185160" y="3456432"/>
+            <a:ext cx="2499360" cy="502920"/>
+          </a:xfrm>
+          <a:prstGeom prst="rect">
+            <a:avLst/>
+          </a:prstGeom>
+          <a:noFill/>
+          <a:ln/>
+        </p:spPr>
+        <p:txBody>
+          <a:bodyPr wrap="square" lIns="0" tIns="0" rIns="0" bIns="0" rtlCol="0" anchor="ctr"/>
+          <a:lstStyle/>
+          <a:p>
+            <a:pPr algn="ctr" indent="0" marL="0">
+              <a:buNone/>
+            </a:pPr>
+            <a:r>
+              <a:rPr lang="en-US" sz="1400" b="1" dirty="0">
+                <a:solidFill>
+                  <a:srgbClr val="0D9488"/>
+                </a:solidFill>
+                <a:latin typeface="Trebuchet MS" pitchFamily="34" charset="0"/>
+                <a:ea typeface="Trebuchet MS" pitchFamily="34" charset="-122"/>
+                <a:cs typeface="Trebuchet MS" pitchFamily="34" charset="-120"/>
+              </a:rPr>
+              <a:t>darkly</a:t>
+            </a:r>
+            <a:endParaRPr lang="en-US" sz="1400" dirty="0"/>
+          </a:p>
+        </p:txBody>
+      </p:sp>
+      <p:sp>
+        <p:nvSpPr>
+          <p:cNvPr id="22" name="Text 20"/>
+          <p:cNvSpPr/>
+          <p:nvPr/>
+        </p:nvSpPr>
+        <p:spPr>
+          <a:xfrm>
+            <a:off x="3185160" y="4005072"/>
+            <a:ext cx="2499360" cy="457200"/>
+          </a:xfrm>
+          <a:prstGeom prst="rect">
+            <a:avLst/>
+          </a:prstGeom>
+          <a:noFill/>
+          <a:ln/>
+        </p:spPr>
+        <p:txBody>
+          <a:bodyPr wrap="square" lIns="0" tIns="0" rIns="0" bIns="0" rtlCol="0" anchor="ctr"/>
+          <a:lstStyle/>
+          <a:p>
+            <a:pPr algn="ctr" indent="0" marL="0">
+              <a:buNone/>
+            </a:pPr>
+            <a:r>
+              <a:rPr lang="en-US" sz="900" i="1" dirty="0">
+                <a:solidFill>
+                  <a:srgbClr val="475569"/>
                 </a:solidFill>
                 <a:latin typeface="Calibri" pitchFamily="34" charset="0"/>
                 <a:ea typeface="Calibri" pitchFamily="34" charset="-122"/>
                 <a:cs typeface="Calibri" pitchFamily="34" charset="-120"/>
               </a:rPr>
-              <a:t>Now rewrite each focus word below with space between letters — leave room for your breakdown.</a:t>
-            </a:r>
-            <a:endParaRPr lang="en-US" sz="1200" dirty="0"/>
-          </a:p>
-        </p:txBody>
-      </p:sp>
-      <p:sp>
-        <p:nvSpPr>
-          <p:cNvPr id="15" name="Shape 13"/>
-          <p:cNvSpPr/>
-          <p:nvPr/>
-        </p:nvSpPr>
-        <p:spPr>
-          <a:xfrm>
-            <a:off x="411480" y="3456432"/>
+              <a:t>write your breakdown below</a:t>
+            </a:r>
+            <a:endParaRPr lang="en-US" sz="900" dirty="0"/>
+          </a:p>
+        </p:txBody>
+      </p:sp>
+      <p:sp>
+        <p:nvSpPr>
+          <p:cNvPr id="23" name="Shape 21"/>
+          <p:cNvSpPr/>
+          <p:nvPr/>
+        </p:nvSpPr>
+        <p:spPr>
+          <a:xfrm>
+            <a:off x="5958840" y="3456432"/>
             <a:ext cx="2499360" cy="1005840"/>
           </a:xfrm>
           <a:prstGeom prst="rect">
@@ -16949,13 +17174,13 @@
       </p:sp>
       <p:sp>
         <p:nvSpPr>
-          <p:cNvPr id="16" name="Shape 14"/>
-          <p:cNvSpPr/>
-          <p:nvPr/>
-        </p:nvSpPr>
-        <p:spPr>
-          <a:xfrm>
-            <a:off x="411480" y="3977640"/>
+          <p:cNvPr id="24" name="Shape 22"/>
+          <p:cNvSpPr/>
+          <p:nvPr/>
+        </p:nvSpPr>
+        <p:spPr>
+          <a:xfrm>
+            <a:off x="5958840" y="3977640"/>
             <a:ext cx="2499360" cy="0"/>
           </a:xfrm>
           <a:prstGeom prst="line">
@@ -16972,13 +17197,13 @@
       </p:sp>
       <p:sp>
         <p:nvSpPr>
-          <p:cNvPr id="17" name="Text 15"/>
-          <p:cNvSpPr/>
-          <p:nvPr/>
-        </p:nvSpPr>
-        <p:spPr>
-          <a:xfrm>
-            <a:off x="411480" y="3456432"/>
+          <p:cNvPr id="25" name="Text 23"/>
+          <p:cNvSpPr/>
+          <p:nvPr/>
+        </p:nvSpPr>
+        <p:spPr>
+          <a:xfrm>
+            <a:off x="5958840" y="3456432"/>
             <a:ext cx="2499360" cy="502920"/>
           </a:xfrm>
           <a:prstGeom prst="rect">
@@ -17003,263 +17228,7 @@
                 <a:ea typeface="Trebuchet MS" pitchFamily="34" charset="-122"/>
                 <a:cs typeface="Trebuchet MS" pitchFamily="34" charset="-120"/>
               </a:rPr>
-              <a:t>darkened</a:t>
-            </a:r>
-            <a:endParaRPr lang="en-US" sz="1400" dirty="0"/>
-          </a:p>
-        </p:txBody>
-      </p:sp>
-      <p:sp>
-        <p:nvSpPr>
-          <p:cNvPr id="18" name="Text 16"/>
-          <p:cNvSpPr/>
-          <p:nvPr/>
-        </p:nvSpPr>
-        <p:spPr>
-          <a:xfrm>
-            <a:off x="411480" y="4005072"/>
-            <a:ext cx="2499360" cy="457200"/>
-          </a:xfrm>
-          <a:prstGeom prst="rect">
-            <a:avLst/>
-          </a:prstGeom>
-          <a:noFill/>
-          <a:ln/>
-        </p:spPr>
-        <p:txBody>
-          <a:bodyPr wrap="square" lIns="0" tIns="0" rIns="0" bIns="0" rtlCol="0" anchor="ctr"/>
-          <a:lstStyle/>
-          <a:p>
-            <a:pPr algn="ctr" indent="0" marL="0">
-              <a:buNone/>
-            </a:pPr>
-            <a:r>
-              <a:rPr lang="en-US" sz="900" i="1" dirty="0">
-                <a:solidFill>
-                  <a:srgbClr val="475569"/>
-                </a:solidFill>
-                <a:latin typeface="Calibri" pitchFamily="34" charset="0"/>
-                <a:ea typeface="Calibri" pitchFamily="34" charset="-122"/>
-                <a:cs typeface="Calibri" pitchFamily="34" charset="-120"/>
-              </a:rPr>
-              <a:t>write your breakdown below</a:t>
-            </a:r>
-            <a:endParaRPr lang="en-US" sz="900" dirty="0"/>
-          </a:p>
-        </p:txBody>
-      </p:sp>
-      <p:sp>
-        <p:nvSpPr>
-          <p:cNvPr id="19" name="Shape 17"/>
-          <p:cNvSpPr/>
-          <p:nvPr/>
-        </p:nvSpPr>
-        <p:spPr>
-          <a:xfrm>
-            <a:off x="3185160" y="3456432"/>
-            <a:ext cx="2499360" cy="1005840"/>
-          </a:xfrm>
-          <a:prstGeom prst="rect">
-            <a:avLst>
-              <a:gd name="adj" fmla="val 7273"/>
-            </a:avLst>
-          </a:prstGeom>
-          <a:solidFill>
-            <a:srgbClr val="F8FAFC"/>
-          </a:solidFill>
-          <a:ln w="12700">
-            <a:solidFill>
-              <a:srgbClr val="E2E8F0"/>
-            </a:solidFill>
-            <a:prstDash val="solid"/>
-          </a:ln>
-        </p:spPr>
-      </p:sp>
-      <p:sp>
-        <p:nvSpPr>
-          <p:cNvPr id="20" name="Shape 18"/>
-          <p:cNvSpPr/>
-          <p:nvPr/>
-        </p:nvSpPr>
-        <p:spPr>
-          <a:xfrm>
-            <a:off x="3185160" y="3977640"/>
-            <a:ext cx="2499360" cy="0"/>
-          </a:xfrm>
-          <a:prstGeom prst="line">
-            <a:avLst/>
-          </a:prstGeom>
-          <a:noFill/>
-          <a:ln w="12700">
-            <a:solidFill>
-              <a:srgbClr val="E2E8F0"/>
-            </a:solidFill>
-            <a:prstDash val="dash"/>
-          </a:ln>
-        </p:spPr>
-      </p:sp>
-      <p:sp>
-        <p:nvSpPr>
-          <p:cNvPr id="21" name="Text 19"/>
-          <p:cNvSpPr/>
-          <p:nvPr/>
-        </p:nvSpPr>
-        <p:spPr>
-          <a:xfrm>
-            <a:off x="3185160" y="3456432"/>
-            <a:ext cx="2499360" cy="502920"/>
-          </a:xfrm>
-          <a:prstGeom prst="rect">
-            <a:avLst/>
-          </a:prstGeom>
-          <a:noFill/>
-          <a:ln/>
-        </p:spPr>
-        <p:txBody>
-          <a:bodyPr wrap="square" lIns="0" tIns="0" rIns="0" bIns="0" rtlCol="0" anchor="ctr"/>
-          <a:lstStyle/>
-          <a:p>
-            <a:pPr algn="ctr" indent="0" marL="0">
-              <a:buNone/>
-            </a:pPr>
-            <a:r>
-              <a:rPr lang="en-US" sz="1400" b="1" dirty="0">
-                <a:solidFill>
-                  <a:srgbClr val="0D9488"/>
-                </a:solidFill>
-                <a:latin typeface="Trebuchet MS" pitchFamily="34" charset="0"/>
-                <a:ea typeface="Trebuchet MS" pitchFamily="34" charset="-122"/>
-                <a:cs typeface="Trebuchet MS" pitchFamily="34" charset="-120"/>
-              </a:rPr>
-              <a:t>darkly</a:t>
-            </a:r>
-            <a:endParaRPr lang="en-US" sz="1400" dirty="0"/>
-          </a:p>
-        </p:txBody>
-      </p:sp>
-      <p:sp>
-        <p:nvSpPr>
-          <p:cNvPr id="22" name="Text 20"/>
-          <p:cNvSpPr/>
-          <p:nvPr/>
-        </p:nvSpPr>
-        <p:spPr>
-          <a:xfrm>
-            <a:off x="3185160" y="4005072"/>
-            <a:ext cx="2499360" cy="457200"/>
-          </a:xfrm>
-          <a:prstGeom prst="rect">
-            <a:avLst/>
-          </a:prstGeom>
-          <a:noFill/>
-          <a:ln/>
-        </p:spPr>
-        <p:txBody>
-          <a:bodyPr wrap="square" lIns="0" tIns="0" rIns="0" bIns="0" rtlCol="0" anchor="ctr"/>
-          <a:lstStyle/>
-          <a:p>
-            <a:pPr algn="ctr" indent="0" marL="0">
-              <a:buNone/>
-            </a:pPr>
-            <a:r>
-              <a:rPr lang="en-US" sz="900" i="1" dirty="0">
-                <a:solidFill>
-                  <a:srgbClr val="475569"/>
-                </a:solidFill>
-                <a:latin typeface="Calibri" pitchFamily="34" charset="0"/>
-                <a:ea typeface="Calibri" pitchFamily="34" charset="-122"/>
-                <a:cs typeface="Calibri" pitchFamily="34" charset="-120"/>
-              </a:rPr>
-              <a:t>write your breakdown below</a:t>
-            </a:r>
-            <a:endParaRPr lang="en-US" sz="900" dirty="0"/>
-          </a:p>
-        </p:txBody>
-      </p:sp>
-      <p:sp>
-        <p:nvSpPr>
-          <p:cNvPr id="23" name="Shape 21"/>
-          <p:cNvSpPr/>
-          <p:nvPr/>
-        </p:nvSpPr>
-        <p:spPr>
-          <a:xfrm>
-            <a:off x="5958840" y="3456432"/>
-            <a:ext cx="2499360" cy="1005840"/>
-          </a:xfrm>
-          <a:prstGeom prst="rect">
-            <a:avLst>
-              <a:gd name="adj" fmla="val 7273"/>
-            </a:avLst>
-          </a:prstGeom>
-          <a:solidFill>
-            <a:srgbClr val="F8FAFC"/>
-          </a:solidFill>
-          <a:ln w="12700">
-            <a:solidFill>
-              <a:srgbClr val="E2E8F0"/>
-            </a:solidFill>
-            <a:prstDash val="solid"/>
-          </a:ln>
-        </p:spPr>
-      </p:sp>
-      <p:sp>
-        <p:nvSpPr>
-          <p:cNvPr id="24" name="Shape 22"/>
-          <p:cNvSpPr/>
-          <p:nvPr/>
-        </p:nvSpPr>
-        <p:spPr>
-          <a:xfrm>
-            <a:off x="5958840" y="3977640"/>
-            <a:ext cx="2499360" cy="0"/>
-          </a:xfrm>
-          <a:prstGeom prst="line">
-            <a:avLst/>
-          </a:prstGeom>
-          <a:noFill/>
-          <a:ln w="12700">
-            <a:solidFill>
-              <a:srgbClr val="E2E8F0"/>
-            </a:solidFill>
-            <a:prstDash val="dash"/>
-          </a:ln>
-        </p:spPr>
-      </p:sp>
-      <p:sp>
-        <p:nvSpPr>
-          <p:cNvPr id="25" name="Text 23"/>
-          <p:cNvSpPr/>
-          <p:nvPr/>
-        </p:nvSpPr>
-        <p:spPr>
-          <a:xfrm>
-            <a:off x="5958840" y="3456432"/>
-            <a:ext cx="2499360" cy="502920"/>
-          </a:xfrm>
-          <a:prstGeom prst="rect">
-            <a:avLst/>
-          </a:prstGeom>
-          <a:noFill/>
-          <a:ln/>
-        </p:spPr>
-        <p:txBody>
-          <a:bodyPr wrap="square" lIns="0" tIns="0" rIns="0" bIns="0" rtlCol="0" anchor="ctr"/>
-          <a:lstStyle/>
-          <a:p>
-            <a:pPr algn="ctr" indent="0" marL="0">
-              <a:buNone/>
-            </a:pPr>
-            <a:r>
-              <a:rPr lang="en-US" sz="1400" b="1" dirty="0">
-                <a:solidFill>
-                  <a:srgbClr val="0D9488"/>
-                </a:solidFill>
-                <a:latin typeface="Trebuchet MS" pitchFamily="34" charset="0"/>
-                <a:ea typeface="Trebuchet MS" pitchFamily="34" charset="-122"/>
-                <a:cs typeface="Trebuchet MS" pitchFamily="34" charset="-120"/>
-              </a:rPr>
-              <a:t>darkness</a:t>
+              <a:t>darkish</a:t>
             </a:r>
             <a:endParaRPr lang="en-US" sz="1400" dirty="0"/>
           </a:p>
@@ -22037,7 +22006,7 @@
                 <a:ea typeface="Trebuchet MS" pitchFamily="34" charset="-122"/>
                 <a:cs typeface="Trebuchet MS" pitchFamily="34" charset="-120"/>
               </a:rPr>
-              <a:t>ed</a:t>
+              <a:t>d</a:t>
             </a:r>
             <a:endParaRPr lang="en-US" sz="900" dirty="0"/>
           </a:p>
@@ -27093,7 +27062,7 @@
                 <a:ea typeface="Trebuchet MS" pitchFamily="34" charset="-122"/>
                 <a:cs typeface="Trebuchet MS" pitchFamily="34" charset="-120"/>
               </a:rPr>
-              <a:t>y</a:t>
+              <a:t>ee</a:t>
             </a:r>
             <a:endParaRPr lang="en-US" sz="900" dirty="0"/>
           </a:p>
@@ -27524,7 +27493,7 @@
                 <a:ea typeface="Trebuchet MS" pitchFamily="34" charset="-122"/>
                 <a:cs typeface="Trebuchet MS" pitchFamily="34" charset="-120"/>
               </a:rPr>
-              <a:t>darkness</a:t>
+              <a:t>darkish</a:t>
             </a:r>
             <a:endParaRPr lang="en-US" sz="2800" dirty="0"/>
           </a:p>
@@ -28351,7 +28320,7 @@
                 <a:ea typeface="Trebuchet MS" pitchFamily="34" charset="-122"/>
                 <a:cs typeface="Trebuchet MS" pitchFamily="34" charset="-120"/>
               </a:rPr>
-              <a:t>darkness</a:t>
+              <a:t>darkish</a:t>
             </a:r>
             <a:endParaRPr lang="en-US" sz="2800" dirty="0"/>
           </a:p>
@@ -28602,7 +28571,7 @@
                 <a:ea typeface="Trebuchet MS" pitchFamily="34" charset="-122"/>
                 <a:cs typeface="Trebuchet MS" pitchFamily="34" charset="-120"/>
               </a:rPr>
-              <a:t>ness</a:t>
+              <a:t>ish</a:t>
             </a:r>
             <a:endParaRPr lang="en-US" sz="1300" dirty="0"/>
           </a:p>
@@ -28641,7 +28610,7 @@
                 <a:ea typeface="Calibri" pitchFamily="34" charset="-122"/>
                 <a:cs typeface="Calibri" pitchFamily="34" charset="-120"/>
               </a:rPr>
-              <a:t>state or quality of</a:t>
+              <a:t>somewhat or slightly</a:t>
             </a:r>
             <a:endParaRPr lang="en-US" sz="850" dirty="0"/>
           </a:p>
@@ -29336,7 +29305,7 @@
                 <a:ea typeface="Trebuchet MS" pitchFamily="34" charset="-122"/>
                 <a:cs typeface="Trebuchet MS" pitchFamily="34" charset="-120"/>
               </a:rPr>
-              <a:t>darkness</a:t>
+              <a:t>darkish</a:t>
             </a:r>
             <a:endParaRPr lang="en-US" sz="2800" dirty="0"/>
           </a:p>
@@ -29587,7 +29556,7 @@
                 <a:ea typeface="Trebuchet MS" pitchFamily="34" charset="-122"/>
                 <a:cs typeface="Trebuchet MS" pitchFamily="34" charset="-120"/>
               </a:rPr>
-              <a:t>ness</a:t>
+              <a:t>ish</a:t>
             </a:r>
             <a:endParaRPr lang="en-US" sz="1300" dirty="0"/>
           </a:p>
@@ -29626,7 +29595,7 @@
                 <a:ea typeface="Calibri" pitchFamily="34" charset="-122"/>
                 <a:cs typeface="Calibri" pitchFamily="34" charset="-120"/>
               </a:rPr>
-              <a:t>state or quality of</a:t>
+              <a:t>somewhat or slightly</a:t>
             </a:r>
             <a:endParaRPr lang="en-US" sz="850" dirty="0"/>
           </a:p>
@@ -29890,7 +29859,7 @@
                 <a:ea typeface="Trebuchet MS" pitchFamily="34" charset="-122"/>
                 <a:cs typeface="Trebuchet MS" pitchFamily="34" charset="-120"/>
               </a:rPr>
-              <a:t>ness</a:t>
+              <a:t>ish</a:t>
             </a:r>
             <a:endParaRPr lang="en-US" sz="1400" dirty="0"/>
           </a:p>
@@ -30453,7 +30422,7 @@
                 <a:ea typeface="Trebuchet MS" pitchFamily="34" charset="-122"/>
                 <a:cs typeface="Trebuchet MS" pitchFamily="34" charset="-120"/>
               </a:rPr>
-              <a:t>darkness</a:t>
+              <a:t>darkish</a:t>
             </a:r>
             <a:endParaRPr lang="en-US" sz="2800" dirty="0"/>
           </a:p>
@@ -30704,7 +30673,7 @@
                 <a:ea typeface="Trebuchet MS" pitchFamily="34" charset="-122"/>
                 <a:cs typeface="Trebuchet MS" pitchFamily="34" charset="-120"/>
               </a:rPr>
-              <a:t>ness</a:t>
+              <a:t>ish</a:t>
             </a:r>
             <a:endParaRPr lang="en-US" sz="1300" dirty="0"/>
           </a:p>
@@ -30743,7 +30712,7 @@
                 <a:ea typeface="Calibri" pitchFamily="34" charset="-122"/>
                 <a:cs typeface="Calibri" pitchFamily="34" charset="-120"/>
               </a:rPr>
-              <a:t>state or quality of</a:t>
+              <a:t>somewhat or slightly</a:t>
             </a:r>
             <a:endParaRPr lang="en-US" sz="850" dirty="0"/>
           </a:p>
@@ -31007,7 +30976,7 @@
                 <a:ea typeface="Trebuchet MS" pitchFamily="34" charset="-122"/>
                 <a:cs typeface="Trebuchet MS" pitchFamily="34" charset="-120"/>
               </a:rPr>
-              <a:t>ness</a:t>
+              <a:t>ish</a:t>
             </a:r>
             <a:endParaRPr lang="en-US" sz="1400" dirty="0"/>
           </a:p>
@@ -31114,7 +31083,7 @@
         </p:nvSpPr>
         <p:spPr>
           <a:xfrm>
-            <a:off x="2254649" y="4169664"/>
+            <a:off x="2427732" y="4169664"/>
             <a:ext cx="685800" cy="475488"/>
           </a:xfrm>
           <a:prstGeom prst="rect">
@@ -31141,7 +31110,7 @@
         </p:nvSpPr>
         <p:spPr>
           <a:xfrm>
-            <a:off x="2254649" y="4169664"/>
+            <a:off x="2427732" y="4169664"/>
             <a:ext cx="685800" cy="475488"/>
           </a:xfrm>
           <a:prstGeom prst="rect">
@@ -31180,7 +31149,7 @@
         </p:nvSpPr>
         <p:spPr>
           <a:xfrm>
-            <a:off x="3293146" y="4169664"/>
+            <a:off x="3639312" y="4169664"/>
             <a:ext cx="685800" cy="475488"/>
           </a:xfrm>
           <a:prstGeom prst="rect">
@@ -31207,7 +31176,7 @@
         </p:nvSpPr>
         <p:spPr>
           <a:xfrm>
-            <a:off x="3293146" y="4169664"/>
+            <a:off x="3639312" y="4169664"/>
             <a:ext cx="685800" cy="475488"/>
           </a:xfrm>
           <a:prstGeom prst="rect">
@@ -31246,7 +31215,7 @@
         </p:nvSpPr>
         <p:spPr>
           <a:xfrm>
-            <a:off x="4331643" y="4169664"/>
+            <a:off x="4850892" y="4169664"/>
             <a:ext cx="685800" cy="475488"/>
           </a:xfrm>
           <a:prstGeom prst="rect">
@@ -31273,7 +31242,7 @@
         </p:nvSpPr>
         <p:spPr>
           <a:xfrm>
-            <a:off x="4331643" y="4169664"/>
+            <a:off x="4850892" y="4169664"/>
             <a:ext cx="685800" cy="475488"/>
           </a:xfrm>
           <a:prstGeom prst="rect">
@@ -31312,7 +31281,7 @@
         </p:nvSpPr>
         <p:spPr>
           <a:xfrm>
-            <a:off x="5370141" y="4169664"/>
+            <a:off x="6062472" y="4169664"/>
             <a:ext cx="685800" cy="475488"/>
           </a:xfrm>
           <a:prstGeom prst="rect">
@@ -31339,7 +31308,7 @@
         </p:nvSpPr>
         <p:spPr>
           <a:xfrm>
-            <a:off x="5370141" y="4169664"/>
+            <a:off x="6062472" y="4169664"/>
             <a:ext cx="685800" cy="475488"/>
           </a:xfrm>
           <a:prstGeom prst="rect">
@@ -31364,7 +31333,7 @@
                 <a:ea typeface="Trebuchet MS" pitchFamily="34" charset="-122"/>
                 <a:cs typeface="Trebuchet MS" pitchFamily="34" charset="-120"/>
               </a:rPr>
-              <a:t>n</a:t>
+              <a:t>i</a:t>
             </a:r>
             <a:endParaRPr lang="en-US" sz="900" dirty="0"/>
           </a:p>
@@ -31378,7 +31347,7 @@
         </p:nvSpPr>
         <p:spPr>
           <a:xfrm>
-            <a:off x="6408638" y="4169664"/>
+            <a:off x="7274052" y="4169664"/>
             <a:ext cx="685800" cy="475488"/>
           </a:xfrm>
           <a:prstGeom prst="rect">
@@ -31405,7 +31374,7 @@
         </p:nvSpPr>
         <p:spPr>
           <a:xfrm>
-            <a:off x="6408638" y="4169664"/>
+            <a:off x="7274052" y="4169664"/>
             <a:ext cx="685800" cy="475488"/>
           </a:xfrm>
           <a:prstGeom prst="rect">
@@ -31430,73 +31399,7 @@
                 <a:ea typeface="Trebuchet MS" pitchFamily="34" charset="-122"/>
                 <a:cs typeface="Trebuchet MS" pitchFamily="34" charset="-120"/>
               </a:rPr>
-              <a:t>e</a:t>
-            </a:r>
-            <a:endParaRPr lang="en-US" sz="900" dirty="0"/>
-          </a:p>
-        </p:txBody>
-      </p:sp>
-      <p:sp>
-        <p:nvSpPr>
-          <p:cNvPr id="43" name="Shape 41"/>
-          <p:cNvSpPr/>
-          <p:nvPr/>
-        </p:nvSpPr>
-        <p:spPr>
-          <a:xfrm>
-            <a:off x="7447135" y="4169664"/>
-            <a:ext cx="685800" cy="475488"/>
-          </a:xfrm>
-          <a:prstGeom prst="rect">
-            <a:avLst>
-              <a:gd name="adj" fmla="val 7692"/>
-            </a:avLst>
-          </a:prstGeom>
-          <a:solidFill>
-            <a:srgbClr val="FFFFFF"/>
-          </a:solidFill>
-          <a:ln w="12700">
-            <a:solidFill>
-              <a:srgbClr val="DB2777"/>
-            </a:solidFill>
-            <a:prstDash val="solid"/>
-          </a:ln>
-        </p:spPr>
-      </p:sp>
-      <p:sp>
-        <p:nvSpPr>
-          <p:cNvPr id="44" name="Text 42"/>
-          <p:cNvSpPr/>
-          <p:nvPr/>
-        </p:nvSpPr>
-        <p:spPr>
-          <a:xfrm>
-            <a:off x="7447135" y="4169664"/>
-            <a:ext cx="685800" cy="475488"/>
-          </a:xfrm>
-          <a:prstGeom prst="rect">
-            <a:avLst/>
-          </a:prstGeom>
-          <a:noFill/>
-          <a:ln/>
-        </p:spPr>
-        <p:txBody>
-          <a:bodyPr wrap="square" lIns="0" tIns="0" rIns="0" bIns="0" rtlCol="0" anchor="ctr"/>
-          <a:lstStyle/>
-          <a:p>
-            <a:pPr algn="ctr" indent="0" marL="0">
-              <a:buNone/>
-            </a:pPr>
-            <a:r>
-              <a:rPr lang="en-US" sz="900" b="1" dirty="0">
-                <a:solidFill>
-                  <a:srgbClr val="9D174D"/>
-                </a:solidFill>
-                <a:latin typeface="Trebuchet MS" pitchFamily="34" charset="0"/>
-                <a:ea typeface="Trebuchet MS" pitchFamily="34" charset="-122"/>
-                <a:cs typeface="Trebuchet MS" pitchFamily="34" charset="-120"/>
-              </a:rPr>
-              <a:t>ss</a:t>
+              <a:t>sh</a:t>
             </a:r>
             <a:endParaRPr lang="en-US" sz="900" dirty="0"/>
           </a:p>
@@ -33258,7 +33161,7 @@
                 <a:ea typeface="Trebuchet MS" pitchFamily="34" charset="-122"/>
                 <a:cs typeface="Trebuchet MS" pitchFamily="34" charset="-120"/>
               </a:rPr>
-              <a:t>em-</a:t>
+              <a:t>after-</a:t>
             </a:r>
             <a:endParaRPr lang="en-US" sz="1300" dirty="0"/>
           </a:p>
@@ -33386,7 +33289,7 @@
                 <a:ea typeface="Trebuchet MS" pitchFamily="34" charset="-122"/>
                 <a:cs typeface="Trebuchet MS" pitchFamily="34" charset="-120"/>
               </a:rPr>
-              <a:t>-en</a:t>
+              <a:t>-ness</a:t>
             </a:r>
             <a:endParaRPr lang="en-US" sz="1300" dirty="0"/>
           </a:p>
@@ -33450,7 +33353,7 @@
                 <a:ea typeface="Trebuchet MS" pitchFamily="34" charset="-122"/>
                 <a:cs typeface="Trebuchet MS" pitchFamily="34" charset="-120"/>
               </a:rPr>
-              <a:t>en-</a:t>
+              <a:t>pitch-</a:t>
             </a:r>
             <a:endParaRPr lang="en-US" sz="1300" dirty="0"/>
           </a:p>
@@ -33539,7 +33442,7 @@
                 <a:ea typeface="Trebuchet MS" pitchFamily="34" charset="-122"/>
                 <a:cs typeface="Trebuchet MS" pitchFamily="34" charset="-120"/>
               </a:rPr>
-              <a:t>-ness</a:t>
+              <a:t>-en</a:t>
             </a:r>
             <a:endParaRPr lang="en-US" sz="1300" dirty="0"/>
           </a:p>
@@ -33603,7 +33506,7 @@
                 <a:ea typeface="Trebuchet MS" pitchFamily="34" charset="-122"/>
                 <a:cs typeface="Trebuchet MS" pitchFamily="34" charset="-120"/>
               </a:rPr>
-              <a:t>be-</a:t>
+              <a:t>semi-</a:t>
             </a:r>
             <a:endParaRPr lang="en-US" sz="1300" dirty="0"/>
           </a:p>
@@ -33756,7 +33659,7 @@
                 <a:ea typeface="Trebuchet MS" pitchFamily="34" charset="-122"/>
                 <a:cs typeface="Trebuchet MS" pitchFamily="34" charset="-120"/>
               </a:rPr>
-              <a:t>after-</a:t>
+              <a:t>mid-</a:t>
             </a:r>
             <a:endParaRPr lang="en-US" sz="1300" dirty="0"/>
           </a:p>
@@ -33845,7 +33748,7 @@
                 <a:ea typeface="Trebuchet MS" pitchFamily="34" charset="-122"/>
                 <a:cs typeface="Trebuchet MS" pitchFamily="34" charset="-120"/>
               </a:rPr>
-              <a:t>-er</a:t>
+              <a:t>-ish</a:t>
             </a:r>
             <a:endParaRPr lang="en-US" sz="1300" dirty="0"/>
           </a:p>
@@ -33909,7 +33812,7 @@
                 <a:ea typeface="Trebuchet MS" pitchFamily="34" charset="-122"/>
                 <a:cs typeface="Trebuchet MS" pitchFamily="34" charset="-120"/>
               </a:rPr>
-              <a:t>pitch-</a:t>
+              <a:t>stark-</a:t>
             </a:r>
             <a:endParaRPr lang="en-US" sz="1300" dirty="0"/>
           </a:p>
@@ -33998,7 +33901,7 @@
                 <a:ea typeface="Trebuchet MS" pitchFamily="34" charset="-122"/>
                 <a:cs typeface="Trebuchet MS" pitchFamily="34" charset="-120"/>
               </a:rPr>
-              <a:t>-ish</a:t>
+              <a:t>-ened</a:t>
             </a:r>
             <a:endParaRPr lang="en-US" sz="1300" dirty="0"/>
           </a:p>
@@ -34301,7 +34204,7 @@
                 <a:ea typeface="Trebuchet MS" pitchFamily="34" charset="-122"/>
                 <a:cs typeface="Trebuchet MS" pitchFamily="34" charset="-120"/>
               </a:rPr>
-              <a:t>darker</a:t>
+              <a:t>darkish</a:t>
             </a:r>
             <a:endParaRPr lang="en-US" sz="1200" dirty="0"/>
           </a:p>
@@ -34367,7 +34270,7 @@
                 <a:ea typeface="Trebuchet MS" pitchFamily="34" charset="-122"/>
                 <a:cs typeface="Trebuchet MS" pitchFamily="34" charset="-120"/>
               </a:rPr>
-              <a:t>darkish</a:t>
+              <a:t>darkened</a:t>
             </a:r>
             <a:endParaRPr lang="en-US" sz="1200" dirty="0"/>
           </a:p>
@@ -34433,7 +34336,7 @@
                 <a:ea typeface="Trebuchet MS" pitchFamily="34" charset="-122"/>
                 <a:cs typeface="Trebuchet MS" pitchFamily="34" charset="-120"/>
               </a:rPr>
-              <a:t>darkroom</a:t>
+              <a:t>afterdark</a:t>
             </a:r>
             <a:endParaRPr lang="en-US" sz="1200" dirty="0"/>
           </a:p>
@@ -34499,7 +34402,7 @@
                 <a:ea typeface="Trebuchet MS" pitchFamily="34" charset="-122"/>
                 <a:cs typeface="Trebuchet MS" pitchFamily="34" charset="-120"/>
               </a:rPr>
-              <a:t>darkened</a:t>
+              <a:t>midark</a:t>
             </a:r>
             <a:endParaRPr lang="en-US" sz="1200" dirty="0"/>
           </a:p>
@@ -35753,7 +35656,7 @@
                 <a:ea typeface="Calibri" pitchFamily="34" charset="-122"/>
                 <a:cs typeface="Calibri" pitchFamily="34" charset="-120"/>
               </a:rPr>
-              <a:t>1.  The word 'darkness' is formed by adding the suffix '-ness' to the base word 'dark'.</a:t>
+              <a:t>1.  The root 'dark' means full of colour and brightness.</a:t>
             </a:r>
             <a:endParaRPr lang="en-US" sz="1300" dirty="0"/>
           </a:p>
@@ -35776,11 +35679,11 @@
             </a:avLst>
           </a:prstGeom>
           <a:solidFill>
-            <a:srgbClr val="DCFCE7"/>
-          </a:solidFill>
-          <a:ln w="12700">
-            <a:solidFill>
-              <a:srgbClr val="16A34A"/>
+            <a:srgbClr val="FEE2E2"/>
+          </a:solidFill>
+          <a:ln w="12700">
+            <a:solidFill>
+              <a:srgbClr val="DC2626"/>
             </a:solidFill>
             <a:prstDash val="solid"/>
           </a:ln>
@@ -35813,13 +35716,13 @@
             <a:r>
               <a:rPr lang="en-US" sz="1100" b="1" dirty="0">
                 <a:solidFill>
-                  <a:srgbClr val="16A34A"/>
+                  <a:srgbClr val="DC2626"/>
                 </a:solidFill>
                 <a:latin typeface="Trebuchet MS" pitchFamily="34" charset="0"/>
                 <a:ea typeface="Trebuchet MS" pitchFamily="34" charset="-122"/>
                 <a:cs typeface="Trebuchet MS" pitchFamily="34" charset="-120"/>
               </a:rPr>
-              <a:t>TRUE</a:t>
+              <a:t>FALSE</a:t>
             </a:r>
             <a:endParaRPr lang="en-US" sz="1100" dirty="0"/>
           </a:p>
@@ -35892,7 +35795,7 @@
                 <a:ea typeface="Calibri" pitchFamily="34" charset="-122"/>
                 <a:cs typeface="Calibri" pitchFamily="34" charset="-120"/>
               </a:rPr>
-              <a:t>2.  The word 'dark' originally came from the Latin language.</a:t>
+              <a:t>2.  The word 'darkness' is made from the root 'dark' and the suffix '-ness'.</a:t>
             </a:r>
             <a:endParaRPr lang="en-US" sz="1300" dirty="0"/>
           </a:p>
@@ -35915,11 +35818,11 @@
             </a:avLst>
           </a:prstGeom>
           <a:solidFill>
-            <a:srgbClr val="FEE2E2"/>
-          </a:solidFill>
-          <a:ln w="12700">
-            <a:solidFill>
-              <a:srgbClr val="DC2626"/>
+            <a:srgbClr val="DCFCE7"/>
+          </a:solidFill>
+          <a:ln w="12700">
+            <a:solidFill>
+              <a:srgbClr val="16A34A"/>
             </a:solidFill>
             <a:prstDash val="solid"/>
           </a:ln>
@@ -35952,13 +35855,13 @@
             <a:r>
               <a:rPr lang="en-US" sz="1100" b="1" dirty="0">
                 <a:solidFill>
-                  <a:srgbClr val="DC2626"/>
+                  <a:srgbClr val="16A34A"/>
                 </a:solidFill>
                 <a:latin typeface="Trebuchet MS" pitchFamily="34" charset="0"/>
                 <a:ea typeface="Trebuchet MS" pitchFamily="34" charset="-122"/>
                 <a:cs typeface="Trebuchet MS" pitchFamily="34" charset="-120"/>
               </a:rPr>
-              <a:t>FALSE</a:t>
+              <a:t>TRUE</a:t>
             </a:r>
             <a:endParaRPr lang="en-US" sz="1100" dirty="0"/>
           </a:p>
@@ -36031,7 +35934,7 @@
                 <a:ea typeface="Calibri" pitchFamily="34" charset="-122"/>
                 <a:cs typeface="Calibri" pitchFamily="34" charset="-120"/>
               </a:rPr>
-              <a:t>3.  A darkroom is a special room used in photography where light is kept out.</a:t>
+              <a:t>3.  The root 'dark' comes from the French language.</a:t>
             </a:r>
             <a:endParaRPr lang="en-US" sz="1300" dirty="0"/>
           </a:p>
@@ -36054,11 +35957,11 @@
             </a:avLst>
           </a:prstGeom>
           <a:solidFill>
-            <a:srgbClr val="DCFCE7"/>
-          </a:solidFill>
-          <a:ln w="12700">
-            <a:solidFill>
-              <a:srgbClr val="16A34A"/>
+            <a:srgbClr val="FEE2E2"/>
+          </a:solidFill>
+          <a:ln w="12700">
+            <a:solidFill>
+              <a:srgbClr val="DC2626"/>
             </a:solidFill>
             <a:prstDash val="solid"/>
           </a:ln>
@@ -36091,13 +35994,13 @@
             <a:r>
               <a:rPr lang="en-US" sz="1100" b="1" dirty="0">
                 <a:solidFill>
-                  <a:srgbClr val="16A34A"/>
+                  <a:srgbClr val="DC2626"/>
                 </a:solidFill>
                 <a:latin typeface="Trebuchet MS" pitchFamily="34" charset="0"/>
                 <a:ea typeface="Trebuchet MS" pitchFamily="34" charset="-122"/>
                 <a:cs typeface="Trebuchet MS" pitchFamily="34" charset="-120"/>
               </a:rPr>
-              <a:t>TRUE</a:t>
+              <a:t>FALSE</a:t>
             </a:r>
             <a:endParaRPr lang="en-US" sz="1100" dirty="0"/>
           </a:p>
@@ -36170,7 +36073,7 @@
                 <a:ea typeface="Calibri" pitchFamily="34" charset="-122"/>
                 <a:cs typeface="Calibri" pitchFamily="34" charset="-120"/>
               </a:rPr>
-              <a:t>4.  Adding the suffix '-en' to 'dark' makes the word 'darken', meaning to become or make dark.</a:t>
+              <a:t>4.  The word 'darkly' contains the suffix '-ly', which turns dark into an adverb.</a:t>
             </a:r>
             <a:endParaRPr lang="en-US" sz="1300" dirty="0"/>
           </a:p>
@@ -36309,7 +36212,7 @@
                 <a:ea typeface="Calibri" pitchFamily="34" charset="-122"/>
                 <a:cs typeface="Calibri" pitchFamily="34" charset="-120"/>
               </a:rPr>
-              <a:t>5.  The suffix '-ly' in 'darkly' changes the word into a noun.</a:t>
+              <a:t>5.  Adding '-en' to 'dark' makes the verb 'darken', meaning to make darker.</a:t>
             </a:r>
             <a:endParaRPr lang="en-US" sz="1300" dirty="0"/>
           </a:p>
@@ -36332,11 +36235,11 @@
             </a:avLst>
           </a:prstGeom>
           <a:solidFill>
-            <a:srgbClr val="FEE2E2"/>
-          </a:solidFill>
-          <a:ln w="12700">
-            <a:solidFill>
-              <a:srgbClr val="DC2626"/>
+            <a:srgbClr val="DCFCE7"/>
+          </a:solidFill>
+          <a:ln w="12700">
+            <a:solidFill>
+              <a:srgbClr val="16A34A"/>
             </a:solidFill>
             <a:prstDash val="solid"/>
           </a:ln>
@@ -36369,13 +36272,13 @@
             <a:r>
               <a:rPr lang="en-US" sz="1100" b="1" dirty="0">
                 <a:solidFill>
-                  <a:srgbClr val="DC2626"/>
+                  <a:srgbClr val="16A34A"/>
                 </a:solidFill>
                 <a:latin typeface="Trebuchet MS" pitchFamily="34" charset="0"/>
                 <a:ea typeface="Trebuchet MS" pitchFamily="34" charset="-122"/>
                 <a:cs typeface="Trebuchet MS" pitchFamily="34" charset="-120"/>
               </a:rPr>
-              <a:t>FALSE</a:t>
+              <a:t>TRUE</a:t>
             </a:r>
             <a:endParaRPr lang="en-US" sz="1100" dirty="0"/>
           </a:p>
@@ -37146,7 +37049,7 @@
                 <a:ea typeface="Trebuchet MS" pitchFamily="34" charset="-122"/>
                 <a:cs typeface="Trebuchet MS" pitchFamily="34" charset="-120"/>
               </a:rPr>
-              <a:t>darker</a:t>
+              <a:t>darkish</a:t>
             </a:r>
             <a:endParaRPr lang="en-US" sz="1300" dirty="0"/>
           </a:p>
@@ -37212,7 +37115,7 @@
                 <a:ea typeface="Trebuchet MS" pitchFamily="34" charset="-122"/>
                 <a:cs typeface="Trebuchet MS" pitchFamily="34" charset="-120"/>
               </a:rPr>
-              <a:t>darkish</a:t>
+              <a:t>darkened</a:t>
             </a:r>
             <a:endParaRPr lang="en-US" sz="1300" dirty="0"/>
           </a:p>
@@ -37278,7 +37181,7 @@
                 <a:ea typeface="Trebuchet MS" pitchFamily="34" charset="-122"/>
                 <a:cs typeface="Trebuchet MS" pitchFamily="34" charset="-120"/>
               </a:rPr>
-              <a:t>darkroom</a:t>
+              <a:t>afterdark</a:t>
             </a:r>
             <a:endParaRPr lang="en-US" sz="1300" dirty="0"/>
           </a:p>
@@ -37344,7 +37247,7 @@
                 <a:ea typeface="Trebuchet MS" pitchFamily="34" charset="-122"/>
                 <a:cs typeface="Trebuchet MS" pitchFamily="34" charset="-120"/>
               </a:rPr>
-              <a:t>darkened</a:t>
+              <a:t>midark</a:t>
             </a:r>
             <a:endParaRPr lang="en-US" sz="1300" dirty="0"/>
           </a:p>
@@ -37937,7 +37840,7 @@
                 <a:ea typeface="Trebuchet MS" pitchFamily="34" charset="-122"/>
                 <a:cs typeface="Trebuchet MS" pitchFamily="34" charset="-120"/>
               </a:rPr>
-              <a:t>em-</a:t>
+              <a:t>after-</a:t>
             </a:r>
             <a:endParaRPr lang="en-US" sz="1300" dirty="0"/>
           </a:p>
@@ -38065,7 +37968,7 @@
                 <a:ea typeface="Trebuchet MS" pitchFamily="34" charset="-122"/>
                 <a:cs typeface="Trebuchet MS" pitchFamily="34" charset="-120"/>
               </a:rPr>
-              <a:t>-en</a:t>
+              <a:t>-ness</a:t>
             </a:r>
             <a:endParaRPr lang="en-US" sz="1300" dirty="0"/>
           </a:p>
@@ -38129,7 +38032,7 @@
                 <a:ea typeface="Trebuchet MS" pitchFamily="34" charset="-122"/>
                 <a:cs typeface="Trebuchet MS" pitchFamily="34" charset="-120"/>
               </a:rPr>
-              <a:t>en-</a:t>
+              <a:t>pitch-</a:t>
             </a:r>
             <a:endParaRPr lang="en-US" sz="1300" dirty="0"/>
           </a:p>
@@ -38218,7 +38121,7 @@
                 <a:ea typeface="Trebuchet MS" pitchFamily="34" charset="-122"/>
                 <a:cs typeface="Trebuchet MS" pitchFamily="34" charset="-120"/>
               </a:rPr>
-              <a:t>-ness</a:t>
+              <a:t>-en</a:t>
             </a:r>
             <a:endParaRPr lang="en-US" sz="1300" dirty="0"/>
           </a:p>
@@ -38282,7 +38185,7 @@
                 <a:ea typeface="Trebuchet MS" pitchFamily="34" charset="-122"/>
                 <a:cs typeface="Trebuchet MS" pitchFamily="34" charset="-120"/>
               </a:rPr>
-              <a:t>be-</a:t>
+              <a:t>semi-</a:t>
             </a:r>
             <a:endParaRPr lang="en-US" sz="1300" dirty="0"/>
           </a:p>
@@ -38435,7 +38338,7 @@
                 <a:ea typeface="Trebuchet MS" pitchFamily="34" charset="-122"/>
                 <a:cs typeface="Trebuchet MS" pitchFamily="34" charset="-120"/>
               </a:rPr>
-              <a:t>after-</a:t>
+              <a:t>mid-</a:t>
             </a:r>
             <a:endParaRPr lang="en-US" sz="1300" dirty="0"/>
           </a:p>
@@ -38524,7 +38427,7 @@
                 <a:ea typeface="Trebuchet MS" pitchFamily="34" charset="-122"/>
                 <a:cs typeface="Trebuchet MS" pitchFamily="34" charset="-120"/>
               </a:rPr>
-              <a:t>-er</a:t>
+              <a:t>-ish</a:t>
             </a:r>
             <a:endParaRPr lang="en-US" sz="1300" dirty="0"/>
           </a:p>
@@ -38588,7 +38491,7 @@
                 <a:ea typeface="Trebuchet MS" pitchFamily="34" charset="-122"/>
                 <a:cs typeface="Trebuchet MS" pitchFamily="34" charset="-120"/>
               </a:rPr>
-              <a:t>pitch-</a:t>
+              <a:t>stark-</a:t>
             </a:r>
             <a:endParaRPr lang="en-US" sz="1300" dirty="0"/>
           </a:p>
@@ -38677,7 +38580,7 @@
                 <a:ea typeface="Trebuchet MS" pitchFamily="34" charset="-122"/>
                 <a:cs typeface="Trebuchet MS" pitchFamily="34" charset="-120"/>
               </a:rPr>
-              <a:t>-ish</a:t>
+              <a:t>-ened</a:t>
             </a:r>
             <a:endParaRPr lang="en-US" sz="1300" dirty="0"/>
           </a:p>
@@ -38731,7 +38634,7 @@
         <p:spPr>
           <a:xfrm>
             <a:off x="1508760" y="4178808"/>
-            <a:ext cx="822960" cy="420624"/>
+            <a:ext cx="1243584" cy="420624"/>
           </a:xfrm>
           <a:prstGeom prst="rect">
             <a:avLst>
@@ -38765,7 +38668,7 @@
         <p:spPr>
           <a:xfrm>
             <a:off x="1508760" y="4178808"/>
-            <a:ext cx="822960" cy="420624"/>
+            <a:ext cx="1243584" cy="420624"/>
           </a:xfrm>
           <a:prstGeom prst="rect">
             <a:avLst/>
@@ -38789,7 +38692,7 @@
                 <a:ea typeface="Trebuchet MS" pitchFamily="34" charset="-122"/>
                 <a:cs typeface="Trebuchet MS" pitchFamily="34" charset="-120"/>
               </a:rPr>
-              <a:t>em-</a:t>
+              <a:t>after-</a:t>
             </a:r>
             <a:endParaRPr lang="en-US" sz="1300" dirty="0"/>
           </a:p>
@@ -38803,7 +38706,7 @@
         </p:nvSpPr>
         <p:spPr>
           <a:xfrm>
-            <a:off x="2359152" y="4178808"/>
+            <a:off x="2779776" y="4178808"/>
             <a:ext cx="320040" cy="420624"/>
           </a:xfrm>
           <a:prstGeom prst="rect">
@@ -38842,7 +38745,7 @@
         </p:nvSpPr>
         <p:spPr>
           <a:xfrm>
-            <a:off x="2706624" y="4178808"/>
+            <a:off x="3127248" y="4178808"/>
             <a:ext cx="1243584" cy="420624"/>
           </a:xfrm>
           <a:prstGeom prst="rect">
@@ -38876,7 +38779,7 @@
         </p:nvSpPr>
         <p:spPr>
           <a:xfrm>
-            <a:off x="2706624" y="4178808"/>
+            <a:off x="3127248" y="4178808"/>
             <a:ext cx="1243584" cy="420624"/>
           </a:xfrm>
           <a:prstGeom prst="rect">
@@ -38915,7 +38818,7 @@
         </p:nvSpPr>
         <p:spPr>
           <a:xfrm>
-            <a:off x="3977640" y="4178808"/>
+            <a:off x="4398264" y="4178808"/>
             <a:ext cx="320040" cy="420624"/>
           </a:xfrm>
           <a:prstGeom prst="rect">
@@ -38954,8 +38857,8 @@
         </p:nvSpPr>
         <p:spPr>
           <a:xfrm>
-            <a:off x="4325112" y="4178808"/>
-            <a:ext cx="822960" cy="420624"/>
+            <a:off x="4745736" y="4178808"/>
+            <a:ext cx="1097280" cy="420624"/>
           </a:xfrm>
           <a:prstGeom prst="rect">
             <a:avLst>
@@ -38988,8 +38891,8 @@
         </p:nvSpPr>
         <p:spPr>
           <a:xfrm>
-            <a:off x="4325112" y="4178808"/>
-            <a:ext cx="822960" cy="420624"/>
+            <a:off x="4745736" y="4178808"/>
+            <a:ext cx="1097280" cy="420624"/>
           </a:xfrm>
           <a:prstGeom prst="rect">
             <a:avLst/>
@@ -39013,7 +38916,7 @@
                 <a:ea typeface="Trebuchet MS" pitchFamily="34" charset="-122"/>
                 <a:cs typeface="Trebuchet MS" pitchFamily="34" charset="-120"/>
               </a:rPr>
-              <a:t>-en</a:t>
+              <a:t>-ness</a:t>
             </a:r>
             <a:endParaRPr lang="en-US" sz="1300" dirty="0"/>
           </a:p>
@@ -39027,7 +38930,7 @@
         </p:nvSpPr>
         <p:spPr>
           <a:xfrm>
-            <a:off x="5221224" y="4178808"/>
+            <a:off x="5916168" y="4178808"/>
             <a:ext cx="365760" cy="420624"/>
           </a:xfrm>
           <a:prstGeom prst="rect">
@@ -39066,7 +38969,7 @@
         </p:nvSpPr>
         <p:spPr>
           <a:xfrm>
-            <a:off x="5632704" y="4178808"/>
+            <a:off x="6327648" y="4178808"/>
             <a:ext cx="2194560" cy="420624"/>
           </a:xfrm>
           <a:prstGeom prst="rect">
@@ -39093,7 +38996,7 @@
         </p:nvSpPr>
         <p:spPr>
           <a:xfrm>
-            <a:off x="5632704" y="4178808"/>
+            <a:off x="6327648" y="4178808"/>
             <a:ext cx="2194560" cy="420624"/>
           </a:xfrm>
           <a:prstGeom prst="rect">
@@ -39588,7 +39491,7 @@
                 <a:ea typeface="Calibri" pitchFamily="34" charset="-122"/>
                 <a:cs typeface="Calibri" pitchFamily="34" charset="-120"/>
               </a:rPr>
-              <a:t>Slightly dark or somewhat lacking in light.</a:t>
+              <a:t>Made darker, or with the light taken away.</a:t>
             </a:r>
             <a:endParaRPr lang="en-US" sz="1200" dirty="0"/>
           </a:p>
@@ -39727,7 +39630,7 @@
                 <a:ea typeface="Calibri" pitchFamily="34" charset="-122"/>
                 <a:cs typeface="Calibri" pitchFamily="34" charset="-120"/>
               </a:rPr>
-              <a:t>Describes something that has been made dark or had its light removed.</a:t>
+              <a:t>The middle of a dark period, such as the darkest point of night.</a:t>
             </a:r>
             <a:endParaRPr lang="en-US" sz="1200" dirty="0"/>
           </a:p>
@@ -39939,7 +39842,7 @@
                 <a:ea typeface="Trebuchet MS" pitchFamily="34" charset="-122"/>
                 <a:cs typeface="Trebuchet MS" pitchFamily="34" charset="-120"/>
               </a:rPr>
-              <a:t>darker</a:t>
+              <a:t>darkish</a:t>
             </a:r>
             <a:endParaRPr lang="en-US" sz="1200" dirty="0"/>
           </a:p>
@@ -40005,7 +39908,7 @@
                 <a:ea typeface="Calibri" pitchFamily="34" charset="-122"/>
                 <a:cs typeface="Calibri" pitchFamily="34" charset="-120"/>
               </a:rPr>
-              <a:t>A room with no light used for developing photographs.</a:t>
+              <a:t>The time after the sun has set and it is night.</a:t>
             </a:r>
             <a:endParaRPr lang="en-US" sz="1200" dirty="0"/>
           </a:p>
@@ -40078,7 +39981,7 @@
                 <a:ea typeface="Trebuchet MS" pitchFamily="34" charset="-122"/>
                 <a:cs typeface="Trebuchet MS" pitchFamily="34" charset="-120"/>
               </a:rPr>
-              <a:t>darkish</a:t>
+              <a:t>darkened</a:t>
             </a:r>
             <a:endParaRPr lang="en-US" sz="1200" dirty="0"/>
           </a:p>
@@ -40144,7 +40047,7 @@
                 <a:ea typeface="Calibri" pitchFamily="34" charset="-122"/>
                 <a:cs typeface="Calibri" pitchFamily="34" charset="-120"/>
               </a:rPr>
-              <a:t>In a way that seems gloomy, mysterious, or without light.</a:t>
+              <a:t>In a dark or mysterious way.</a:t>
             </a:r>
             <a:endParaRPr lang="en-US" sz="1200" dirty="0"/>
           </a:p>
@@ -40217,7 +40120,7 @@
                 <a:ea typeface="Trebuchet MS" pitchFamily="34" charset="-122"/>
                 <a:cs typeface="Trebuchet MS" pitchFamily="34" charset="-120"/>
               </a:rPr>
-              <a:t>darkroom</a:t>
+              <a:t>afterdark</a:t>
             </a:r>
             <a:endParaRPr lang="en-US" sz="1200" dirty="0"/>
           </a:p>
@@ -40283,7 +40186,7 @@
                 <a:ea typeface="Calibri" pitchFamily="34" charset="-122"/>
                 <a:cs typeface="Calibri" pitchFamily="34" charset="-120"/>
               </a:rPr>
-              <a:t>More dark than something else.</a:t>
+              <a:t>Slightly dark in colour or shade.</a:t>
             </a:r>
             <a:endParaRPr lang="en-US" sz="1200" dirty="0"/>
           </a:p>
@@ -40356,7 +40259,7 @@
                 <a:ea typeface="Trebuchet MS" pitchFamily="34" charset="-122"/>
                 <a:cs typeface="Trebuchet MS" pitchFamily="34" charset="-120"/>
               </a:rPr>
-              <a:t>darkened</a:t>
+              <a:t>midark</a:t>
             </a:r>
             <a:endParaRPr lang="en-US" sz="1200" dirty="0"/>
           </a:p>
@@ -40917,7 +40820,7 @@
                 <a:ea typeface="Calibri" pitchFamily="34" charset="-122"/>
                 <a:cs typeface="Calibri" pitchFamily="34" charset="-120"/>
               </a:rPr>
-              <a:t>The darkness crept into the room as the sun slowly set behind the mountains.</a:t>
+              <a:t>The darkness in the cave made it hard for the explorers to find their way.</a:t>
             </a:r>
             <a:endParaRPr lang="en-US" sz="1500" dirty="0"/>
           </a:p>
@@ -41081,7 +40984,7 @@
                 <a:ea typeface="Calibri" pitchFamily="34" charset="-122"/>
                 <a:cs typeface="Calibri" pitchFamily="34" charset="-120"/>
               </a:rPr>
-              <a:t>She noticed the sky begin to darken just before the storm rolled in over the bay.</a:t>
+              <a:t>As the storm clouds gathered, the sky began to darken very quickly.</a:t>
             </a:r>
             <a:endParaRPr lang="en-US" sz="1500" dirty="0"/>
           </a:p>
@@ -41245,7 +41148,7 @@
                 <a:ea typeface="Calibri" pitchFamily="34" charset="-122"/>
                 <a:cs typeface="Calibri" pitchFamily="34" charset="-120"/>
               </a:rPr>
-              <a:t>He spoke darkly about the strange noises he had heard coming from the old shed.</a:t>
+              <a:t>She spoke darkly about the mysterious figure she had seen near the old house.</a:t>
             </a:r>
             <a:endParaRPr lang="en-US" sz="1500" dirty="0"/>
           </a:p>

--- a/output/wordlabs-dark-3day.pptx
+++ b/output/wordlabs-dark-3day.pptx
@@ -21624,7 +21624,7 @@
         </p:nvSpPr>
         <p:spPr>
           <a:xfrm>
-            <a:off x="2254649" y="4169664"/>
+            <a:off x="2124837" y="4169664"/>
             <a:ext cx="685800" cy="475488"/>
           </a:xfrm>
           <a:prstGeom prst="rect">
@@ -21651,7 +21651,7 @@
         </p:nvSpPr>
         <p:spPr>
           <a:xfrm>
-            <a:off x="2254649" y="4169664"/>
+            <a:off x="2124837" y="4169664"/>
             <a:ext cx="685800" cy="475488"/>
           </a:xfrm>
           <a:prstGeom prst="rect">
@@ -21690,7 +21690,7 @@
         </p:nvSpPr>
         <p:spPr>
           <a:xfrm>
-            <a:off x="3293146" y="4169664"/>
+            <a:off x="3033522" y="4169664"/>
             <a:ext cx="685800" cy="475488"/>
           </a:xfrm>
           <a:prstGeom prst="rect">
@@ -21717,7 +21717,7 @@
         </p:nvSpPr>
         <p:spPr>
           <a:xfrm>
-            <a:off x="3293146" y="4169664"/>
+            <a:off x="3033522" y="4169664"/>
             <a:ext cx="685800" cy="475488"/>
           </a:xfrm>
           <a:prstGeom prst="rect">
@@ -21756,7 +21756,7 @@
         </p:nvSpPr>
         <p:spPr>
           <a:xfrm>
-            <a:off x="4331643" y="4169664"/>
+            <a:off x="3942207" y="4169664"/>
             <a:ext cx="685800" cy="475488"/>
           </a:xfrm>
           <a:prstGeom prst="rect">
@@ -21783,7 +21783,7 @@
         </p:nvSpPr>
         <p:spPr>
           <a:xfrm>
-            <a:off x="4331643" y="4169664"/>
+            <a:off x="3942207" y="4169664"/>
             <a:ext cx="685800" cy="475488"/>
           </a:xfrm>
           <a:prstGeom prst="rect">
@@ -21822,7 +21822,7 @@
         </p:nvSpPr>
         <p:spPr>
           <a:xfrm>
-            <a:off x="5370141" y="4169664"/>
+            <a:off x="4850892" y="4169664"/>
             <a:ext cx="685800" cy="475488"/>
           </a:xfrm>
           <a:prstGeom prst="rect">
@@ -21849,7 +21849,7 @@
         </p:nvSpPr>
         <p:spPr>
           <a:xfrm>
-            <a:off x="5370141" y="4169664"/>
+            <a:off x="4850892" y="4169664"/>
             <a:ext cx="685800" cy="475488"/>
           </a:xfrm>
           <a:prstGeom prst="rect">
@@ -21888,7 +21888,7 @@
         </p:nvSpPr>
         <p:spPr>
           <a:xfrm>
-            <a:off x="6408638" y="4169664"/>
+            <a:off x="5759577" y="4169664"/>
             <a:ext cx="685800" cy="475488"/>
           </a:xfrm>
           <a:prstGeom prst="rect">
@@ -21915,7 +21915,7 @@
         </p:nvSpPr>
         <p:spPr>
           <a:xfrm>
-            <a:off x="6408638" y="4169664"/>
+            <a:off x="5759577" y="4169664"/>
             <a:ext cx="685800" cy="475488"/>
           </a:xfrm>
           <a:prstGeom prst="rect">
@@ -21954,7 +21954,7 @@
         </p:nvSpPr>
         <p:spPr>
           <a:xfrm>
-            <a:off x="7447135" y="4169664"/>
+            <a:off x="6668262" y="4169664"/>
             <a:ext cx="685800" cy="475488"/>
           </a:xfrm>
           <a:prstGeom prst="rect">
@@ -21981,7 +21981,73 @@
         </p:nvSpPr>
         <p:spPr>
           <a:xfrm>
-            <a:off x="7447135" y="4169664"/>
+            <a:off x="6668262" y="4169664"/>
+            <a:ext cx="685800" cy="475488"/>
+          </a:xfrm>
+          <a:prstGeom prst="rect">
+            <a:avLst/>
+          </a:prstGeom>
+          <a:noFill/>
+          <a:ln/>
+        </p:spPr>
+        <p:txBody>
+          <a:bodyPr wrap="square" lIns="0" tIns="0" rIns="0" bIns="0" rtlCol="0" anchor="ctr"/>
+          <a:lstStyle/>
+          <a:p>
+            <a:pPr algn="ctr" indent="0" marL="0">
+              <a:buNone/>
+            </a:pPr>
+            <a:r>
+              <a:rPr lang="en-US" sz="900" b="1" dirty="0">
+                <a:solidFill>
+                  <a:srgbClr val="9D174D"/>
+                </a:solidFill>
+                <a:latin typeface="Trebuchet MS" pitchFamily="34" charset="0"/>
+                <a:ea typeface="Trebuchet MS" pitchFamily="34" charset="-122"/>
+                <a:cs typeface="Trebuchet MS" pitchFamily="34" charset="-120"/>
+              </a:rPr>
+              <a:t>e</a:t>
+            </a:r>
+            <a:endParaRPr lang="en-US" sz="900" dirty="0"/>
+          </a:p>
+        </p:txBody>
+      </p:sp>
+      <p:sp>
+        <p:nvSpPr>
+          <p:cNvPr id="48" name="Shape 46"/>
+          <p:cNvSpPr/>
+          <p:nvPr/>
+        </p:nvSpPr>
+        <p:spPr>
+          <a:xfrm>
+            <a:off x="7576947" y="4169664"/>
+            <a:ext cx="685800" cy="475488"/>
+          </a:xfrm>
+          <a:prstGeom prst="rect">
+            <a:avLst>
+              <a:gd name="adj" fmla="val 7692"/>
+            </a:avLst>
+          </a:prstGeom>
+          <a:solidFill>
+            <a:srgbClr val="FFFFFF"/>
+          </a:solidFill>
+          <a:ln w="12700">
+            <a:solidFill>
+              <a:srgbClr val="DB2777"/>
+            </a:solidFill>
+            <a:prstDash val="solid"/>
+          </a:ln>
+        </p:spPr>
+      </p:sp>
+      <p:sp>
+        <p:nvSpPr>
+          <p:cNvPr id="49" name="Text 47"/>
+          <p:cNvSpPr/>
+          <p:nvPr/>
+        </p:nvSpPr>
+        <p:spPr>
+          <a:xfrm>
+            <a:off x="7576947" y="4169664"/>
             <a:ext cx="685800" cy="475488"/>
           </a:xfrm>
           <a:prstGeom prst="rect">
@@ -27062,7 +27128,7 @@
                 <a:ea typeface="Trebuchet MS" pitchFamily="34" charset="-122"/>
                 <a:cs typeface="Trebuchet MS" pitchFamily="34" charset="-120"/>
               </a:rPr>
-              <a:t>ee</a:t>
+              <a:t>y</a:t>
             </a:r>
             <a:endParaRPr lang="en-US" sz="900" dirty="0"/>
           </a:p>
@@ -35656,7 +35722,7 @@
                 <a:ea typeface="Calibri" pitchFamily="34" charset="-122"/>
                 <a:cs typeface="Calibri" pitchFamily="34" charset="-120"/>
               </a:rPr>
-              <a:t>1.  The root 'dark' means full of colour and brightness.</a:t>
+              <a:t>1.  The word 'darkly' contains the suffix '-ly', which turns dark into an adverb.</a:t>
             </a:r>
             <a:endParaRPr lang="en-US" sz="1300" dirty="0"/>
           </a:p>
@@ -35679,11 +35745,11 @@
             </a:avLst>
           </a:prstGeom>
           <a:solidFill>
-            <a:srgbClr val="FEE2E2"/>
-          </a:solidFill>
-          <a:ln w="12700">
-            <a:solidFill>
-              <a:srgbClr val="DC2626"/>
+            <a:srgbClr val="DCFCE7"/>
+          </a:solidFill>
+          <a:ln w="12700">
+            <a:solidFill>
+              <a:srgbClr val="16A34A"/>
             </a:solidFill>
             <a:prstDash val="solid"/>
           </a:ln>
@@ -35716,13 +35782,13 @@
             <a:r>
               <a:rPr lang="en-US" sz="1100" b="1" dirty="0">
                 <a:solidFill>
-                  <a:srgbClr val="DC2626"/>
+                  <a:srgbClr val="16A34A"/>
                 </a:solidFill>
                 <a:latin typeface="Trebuchet MS" pitchFamily="34" charset="0"/>
                 <a:ea typeface="Trebuchet MS" pitchFamily="34" charset="-122"/>
                 <a:cs typeface="Trebuchet MS" pitchFamily="34" charset="-120"/>
               </a:rPr>
-              <a:t>FALSE</a:t>
+              <a:t>TRUE</a:t>
             </a:r>
             <a:endParaRPr lang="en-US" sz="1100" dirty="0"/>
           </a:p>
@@ -35795,7 +35861,7 @@
                 <a:ea typeface="Calibri" pitchFamily="34" charset="-122"/>
                 <a:cs typeface="Calibri" pitchFamily="34" charset="-120"/>
               </a:rPr>
-              <a:t>2.  The word 'darkness' is made from the root 'dark' and the suffix '-ness'.</a:t>
+              <a:t>2.  The root 'dark' means full of colour and brightness.</a:t>
             </a:r>
             <a:endParaRPr lang="en-US" sz="1300" dirty="0"/>
           </a:p>
@@ -35818,11 +35884,11 @@
             </a:avLst>
           </a:prstGeom>
           <a:solidFill>
-            <a:srgbClr val="DCFCE7"/>
-          </a:solidFill>
-          <a:ln w="12700">
-            <a:solidFill>
-              <a:srgbClr val="16A34A"/>
+            <a:srgbClr val="FEE2E2"/>
+          </a:solidFill>
+          <a:ln w="12700">
+            <a:solidFill>
+              <a:srgbClr val="DC2626"/>
             </a:solidFill>
             <a:prstDash val="solid"/>
           </a:ln>
@@ -35855,13 +35921,13 @@
             <a:r>
               <a:rPr lang="en-US" sz="1100" b="1" dirty="0">
                 <a:solidFill>
-                  <a:srgbClr val="16A34A"/>
+                  <a:srgbClr val="DC2626"/>
                 </a:solidFill>
                 <a:latin typeface="Trebuchet MS" pitchFamily="34" charset="0"/>
                 <a:ea typeface="Trebuchet MS" pitchFamily="34" charset="-122"/>
                 <a:cs typeface="Trebuchet MS" pitchFamily="34" charset="-120"/>
               </a:rPr>
-              <a:t>TRUE</a:t>
+              <a:t>FALSE</a:t>
             </a:r>
             <a:endParaRPr lang="en-US" sz="1100" dirty="0"/>
           </a:p>
@@ -35934,7 +36000,7 @@
                 <a:ea typeface="Calibri" pitchFamily="34" charset="-122"/>
                 <a:cs typeface="Calibri" pitchFamily="34" charset="-120"/>
               </a:rPr>
-              <a:t>3.  The root 'dark' comes from the French language.</a:t>
+              <a:t>3.  The word 'darkness' is made from the root 'dark' and the suffix '-ness'.</a:t>
             </a:r>
             <a:endParaRPr lang="en-US" sz="1300" dirty="0"/>
           </a:p>
@@ -35957,11 +36023,11 @@
             </a:avLst>
           </a:prstGeom>
           <a:solidFill>
-            <a:srgbClr val="FEE2E2"/>
-          </a:solidFill>
-          <a:ln w="12700">
-            <a:solidFill>
-              <a:srgbClr val="DC2626"/>
+            <a:srgbClr val="DCFCE7"/>
+          </a:solidFill>
+          <a:ln w="12700">
+            <a:solidFill>
+              <a:srgbClr val="16A34A"/>
             </a:solidFill>
             <a:prstDash val="solid"/>
           </a:ln>
@@ -35994,13 +36060,13 @@
             <a:r>
               <a:rPr lang="en-US" sz="1100" b="1" dirty="0">
                 <a:solidFill>
-                  <a:srgbClr val="DC2626"/>
+                  <a:srgbClr val="16A34A"/>
                 </a:solidFill>
                 <a:latin typeface="Trebuchet MS" pitchFamily="34" charset="0"/>
                 <a:ea typeface="Trebuchet MS" pitchFamily="34" charset="-122"/>
                 <a:cs typeface="Trebuchet MS" pitchFamily="34" charset="-120"/>
               </a:rPr>
-              <a:t>FALSE</a:t>
+              <a:t>TRUE</a:t>
             </a:r>
             <a:endParaRPr lang="en-US" sz="1100" dirty="0"/>
           </a:p>
@@ -36073,7 +36139,7 @@
                 <a:ea typeface="Calibri" pitchFamily="34" charset="-122"/>
                 <a:cs typeface="Calibri" pitchFamily="34" charset="-120"/>
               </a:rPr>
-              <a:t>4.  The word 'darkly' contains the suffix '-ly', which turns dark into an adverb.</a:t>
+              <a:t>4.  Adding '-en' to 'dark' makes the verb 'darken', meaning to make darker.</a:t>
             </a:r>
             <a:endParaRPr lang="en-US" sz="1300" dirty="0"/>
           </a:p>
@@ -36212,7 +36278,7 @@
                 <a:ea typeface="Calibri" pitchFamily="34" charset="-122"/>
                 <a:cs typeface="Calibri" pitchFamily="34" charset="-120"/>
               </a:rPr>
-              <a:t>5.  Adding '-en' to 'dark' makes the verb 'darken', meaning to make darker.</a:t>
+              <a:t>5.  The root 'dark' comes from the French language.</a:t>
             </a:r>
             <a:endParaRPr lang="en-US" sz="1300" dirty="0"/>
           </a:p>
@@ -36235,11 +36301,11 @@
             </a:avLst>
           </a:prstGeom>
           <a:solidFill>
-            <a:srgbClr val="DCFCE7"/>
-          </a:solidFill>
-          <a:ln w="12700">
-            <a:solidFill>
-              <a:srgbClr val="16A34A"/>
+            <a:srgbClr val="FEE2E2"/>
+          </a:solidFill>
+          <a:ln w="12700">
+            <a:solidFill>
+              <a:srgbClr val="DC2626"/>
             </a:solidFill>
             <a:prstDash val="solid"/>
           </a:ln>
@@ -36272,13 +36338,13 @@
             <a:r>
               <a:rPr lang="en-US" sz="1100" b="1" dirty="0">
                 <a:solidFill>
-                  <a:srgbClr val="16A34A"/>
+                  <a:srgbClr val="DC2626"/>
                 </a:solidFill>
                 <a:latin typeface="Trebuchet MS" pitchFamily="34" charset="0"/>
                 <a:ea typeface="Trebuchet MS" pitchFamily="34" charset="-122"/>
                 <a:cs typeface="Trebuchet MS" pitchFamily="34" charset="-120"/>
               </a:rPr>
-              <a:t>TRUE</a:t>
+              <a:t>FALSE</a:t>
             </a:r>
             <a:endParaRPr lang="en-US" sz="1100" dirty="0"/>
           </a:p>

--- a/output/wordlabs-dark-3day.pptx
+++ b/output/wordlabs-dark-3day.pptx
@@ -4240,7 +4240,7 @@
                 <a:ea typeface="Calibri" pitchFamily="34" charset="-122"/>
                 <a:cs typeface="Calibri" pitchFamily="34" charset="-120"/>
               </a:rPr>
-              <a:t>"absence of light"</a:t>
+              <a:t>"with little or no light"</a:t>
             </a:r>
             <a:endParaRPr lang="en-US" sz="2200" dirty="0"/>
           </a:p>
@@ -4279,7 +4279,7 @@
                 <a:ea typeface="Calibri" pitchFamily="34" charset="-122"/>
                 <a:cs typeface="Calibri" pitchFamily="34" charset="-120"/>
               </a:rPr>
-              <a:t>Origin: Old English: deorc</a:t>
+              <a:t>Origin: Anglo-Saxon (Old English) root</a:t>
             </a:r>
             <a:endParaRPr lang="en-US" sz="1300" dirty="0"/>
           </a:p>
@@ -5288,7 +5288,7 @@
                 <a:ea typeface="Calibri" pitchFamily="34" charset="-122"/>
                 <a:cs typeface="Calibri" pitchFamily="34" charset="-120"/>
               </a:rPr>
-              <a:t>Word Labs  •  wordlabs.app  •  Root: 'dark' = absence of light</a:t>
+              <a:t>Word Labs  •  wordlabs.app  •  Root: 'dark' = with little or no light</a:t>
             </a:r>
             <a:endParaRPr lang="en-US" sz="800" dirty="0"/>
           </a:p>
@@ -5622,7 +5622,7 @@
                 <a:ea typeface="Trebuchet MS" pitchFamily="34" charset="-122"/>
                 <a:cs typeface="Trebuchet MS" pitchFamily="34" charset="-120"/>
               </a:rPr>
-              <a:t>0</a:t>
+              <a:t>1</a:t>
             </a:r>
             <a:pPr algn="ctr" indent="0" marL="0">
               <a:buNone/>
@@ -5928,7 +5928,7 @@
                 <a:ea typeface="Calibri" pitchFamily="34" charset="-122"/>
                 <a:cs typeface="Calibri" pitchFamily="34" charset="-120"/>
               </a:rPr>
-              <a:t>Word Labs  •  wordlabs.app  •  Root: 'dark' = absence of light</a:t>
+              <a:t>Word Labs  •  wordlabs.app  •  Root: 'dark' = with little or no light</a:t>
             </a:r>
             <a:endParaRPr lang="en-US" sz="800" dirty="0"/>
           </a:p>
@@ -6040,7 +6040,7 @@
                 <a:ea typeface="Calibri" pitchFamily="34" charset="-122"/>
                 <a:cs typeface="Calibri" pitchFamily="34" charset="-120"/>
               </a:rPr>
-              <a:t>The </a:t>
+              <a:t>He looked </a:t>
             </a:r>
             <a:pPr algn="l" indent="0" marL="0">
               <a:buNone/>
@@ -6057,7 +6057,7 @@
                 <a:ea typeface="Calibri" pitchFamily="34" charset="-122"/>
                 <a:cs typeface="Calibri" pitchFamily="34" charset="-120"/>
               </a:rPr>
-              <a:t>darkness</a:t>
+              <a:t>darkly</a:t>
             </a:r>
             <a:pPr algn="l" indent="0" marL="0">
               <a:buNone/>
@@ -6071,7 +6071,7 @@
                 <a:ea typeface="Calibri" pitchFamily="34" charset="-122"/>
                 <a:cs typeface="Calibri" pitchFamily="34" charset="-120"/>
               </a:rPr>
-              <a:t> crept in as the sky began to </a:t>
+              <a:t> at the broken window, clearly upset. Midnight is usually the </a:t>
             </a:r>
             <a:pPr algn="l" indent="0" marL="0">
               <a:buNone/>
@@ -6088,7 +6088,7 @@
                 <a:ea typeface="Calibri" pitchFamily="34" charset="-122"/>
                 <a:cs typeface="Calibri" pitchFamily="34" charset="-120"/>
               </a:rPr>
-              <a:t>darken</a:t>
+              <a:t>darkest</a:t>
             </a:r>
             <a:pPr algn="l" indent="0" marL="0">
               <a:buNone/>
@@ -6102,7 +6102,7 @@
                 <a:ea typeface="Calibri" pitchFamily="34" charset="-122"/>
                 <a:cs typeface="Calibri" pitchFamily="34" charset="-120"/>
               </a:rPr>
-              <a:t> before the storm.</a:t>
+              <a:t> part of the night.</a:t>
             </a:r>
             <a:endParaRPr lang="en-US" sz="1800" dirty="0"/>
           </a:p>
@@ -6257,7 +6257,7 @@
                 <a:ea typeface="Trebuchet MS" pitchFamily="34" charset="-122"/>
                 <a:cs typeface="Trebuchet MS" pitchFamily="34" charset="-120"/>
               </a:rPr>
-              <a:t>darkness</a:t>
+              <a:t>darkly</a:t>
             </a:r>
             <a:endParaRPr lang="en-US" sz="1400" dirty="0"/>
           </a:p>
@@ -6385,7 +6385,7 @@
                 <a:ea typeface="Trebuchet MS" pitchFamily="34" charset="-122"/>
                 <a:cs typeface="Trebuchet MS" pitchFamily="34" charset="-120"/>
               </a:rPr>
-              <a:t>darken</a:t>
+              <a:t>darkest</a:t>
             </a:r>
             <a:endParaRPr lang="en-US" sz="1400" dirty="0"/>
           </a:p>
@@ -6716,7 +6716,7 @@
                 <a:ea typeface="Calibri" pitchFamily="34" charset="-122"/>
                 <a:cs typeface="Calibri" pitchFamily="34" charset="-120"/>
               </a:rPr>
-              <a:t>Word Labs  •  wordlabs.app  •  Root: 'dark' = absence of light</a:t>
+              <a:t>Word Labs  •  wordlabs.app  •  Root: 'dark' = with little or no light</a:t>
             </a:r>
             <a:endParaRPr lang="en-US" sz="800" dirty="0"/>
           </a:p>
@@ -6855,7 +6855,7 @@
                 <a:ea typeface="Trebuchet MS" pitchFamily="34" charset="-122"/>
                 <a:cs typeface="Trebuchet MS" pitchFamily="34" charset="-120"/>
               </a:rPr>
-              <a:t>darkness</a:t>
+              <a:t>darkly</a:t>
             </a:r>
             <a:endParaRPr lang="en-US" sz="2800" dirty="0"/>
           </a:p>
@@ -7543,7 +7543,7 @@
                 <a:ea typeface="Calibri" pitchFamily="34" charset="-122"/>
                 <a:cs typeface="Calibri" pitchFamily="34" charset="-120"/>
               </a:rPr>
-              <a:t>Word Labs  •  wordlabs.app  •  Root: 'dark' = absence of light</a:t>
+              <a:t>Word Labs  •  wordlabs.app  •  Root: 'dark' = with little or no light</a:t>
             </a:r>
             <a:endParaRPr lang="en-US" sz="800" dirty="0"/>
           </a:p>
@@ -7682,7 +7682,7 @@
                 <a:ea typeface="Trebuchet MS" pitchFamily="34" charset="-122"/>
                 <a:cs typeface="Trebuchet MS" pitchFamily="34" charset="-120"/>
               </a:rPr>
-              <a:t>darkness</a:t>
+              <a:t>darkly</a:t>
             </a:r>
             <a:endParaRPr lang="en-US" sz="2800" dirty="0"/>
           </a:p>
@@ -7860,7 +7860,7 @@
                 <a:ea typeface="Calibri" pitchFamily="34" charset="-122"/>
                 <a:cs typeface="Calibri" pitchFamily="34" charset="-120"/>
               </a:rPr>
-              <a:t>absence of light</a:t>
+              <a:t>with little or no light</a:t>
             </a:r>
             <a:endParaRPr lang="en-US" sz="850" dirty="0"/>
           </a:p>
@@ -7933,7 +7933,7 @@
                 <a:ea typeface="Trebuchet MS" pitchFamily="34" charset="-122"/>
                 <a:cs typeface="Trebuchet MS" pitchFamily="34" charset="-120"/>
               </a:rPr>
-              <a:t>ness</a:t>
+              <a:t>ly</a:t>
             </a:r>
             <a:endParaRPr lang="en-US" sz="1300" dirty="0"/>
           </a:p>
@@ -7972,7 +7972,7 @@
                 <a:ea typeface="Calibri" pitchFamily="34" charset="-122"/>
                 <a:cs typeface="Calibri" pitchFamily="34" charset="-120"/>
               </a:rPr>
-              <a:t>state or quality of</a:t>
+              <a:t>in a way</a:t>
             </a:r>
             <a:endParaRPr lang="en-US" sz="850" dirty="0"/>
           </a:p>
@@ -8528,7 +8528,7 @@
                 <a:ea typeface="Calibri" pitchFamily="34" charset="-122"/>
                 <a:cs typeface="Calibri" pitchFamily="34" charset="-120"/>
               </a:rPr>
-              <a:t>Word Labs  •  wordlabs.app  •  Root: 'dark' = absence of light</a:t>
+              <a:t>Word Labs  •  wordlabs.app  •  Root: 'dark' = with little or no light</a:t>
             </a:r>
             <a:endParaRPr lang="en-US" sz="800" dirty="0"/>
           </a:p>
@@ -8667,7 +8667,7 @@
                 <a:ea typeface="Trebuchet MS" pitchFamily="34" charset="-122"/>
                 <a:cs typeface="Trebuchet MS" pitchFamily="34" charset="-120"/>
               </a:rPr>
-              <a:t>darkness</a:t>
+              <a:t>darkly</a:t>
             </a:r>
             <a:endParaRPr lang="en-US" sz="2800" dirty="0"/>
           </a:p>
@@ -8845,7 +8845,7 @@
                 <a:ea typeface="Calibri" pitchFamily="34" charset="-122"/>
                 <a:cs typeface="Calibri" pitchFamily="34" charset="-120"/>
               </a:rPr>
-              <a:t>absence of light</a:t>
+              <a:t>with little or no light</a:t>
             </a:r>
             <a:endParaRPr lang="en-US" sz="850" dirty="0"/>
           </a:p>
@@ -8918,7 +8918,7 @@
                 <a:ea typeface="Trebuchet MS" pitchFamily="34" charset="-122"/>
                 <a:cs typeface="Trebuchet MS" pitchFamily="34" charset="-120"/>
               </a:rPr>
-              <a:t>ness</a:t>
+              <a:t>ly</a:t>
             </a:r>
             <a:endParaRPr lang="en-US" sz="1300" dirty="0"/>
           </a:p>
@@ -8957,7 +8957,7 @@
                 <a:ea typeface="Calibri" pitchFamily="34" charset="-122"/>
                 <a:cs typeface="Calibri" pitchFamily="34" charset="-120"/>
               </a:rPr>
-              <a:t>state or quality of</a:t>
+              <a:t>in a way</a:t>
             </a:r>
             <a:endParaRPr lang="en-US" sz="850" dirty="0"/>
           </a:p>
@@ -9221,7 +9221,7 @@
                 <a:ea typeface="Trebuchet MS" pitchFamily="34" charset="-122"/>
                 <a:cs typeface="Trebuchet MS" pitchFamily="34" charset="-120"/>
               </a:rPr>
-              <a:t>ness</a:t>
+              <a:t>ly</a:t>
             </a:r>
             <a:endParaRPr lang="en-US" sz="1400" dirty="0"/>
           </a:p>
@@ -9645,7 +9645,7 @@
                 <a:ea typeface="Calibri" pitchFamily="34" charset="-122"/>
                 <a:cs typeface="Calibri" pitchFamily="34" charset="-120"/>
               </a:rPr>
-              <a:t>Word Labs  •  wordlabs.app  •  Root: 'dark' = absence of light</a:t>
+              <a:t>Word Labs  •  wordlabs.app  •  Root: 'dark' = with little or no light</a:t>
             </a:r>
             <a:endParaRPr lang="en-US" sz="800" dirty="0"/>
           </a:p>
@@ -9784,7 +9784,7 @@
                 <a:ea typeface="Trebuchet MS" pitchFamily="34" charset="-122"/>
                 <a:cs typeface="Trebuchet MS" pitchFamily="34" charset="-120"/>
               </a:rPr>
-              <a:t>darkness</a:t>
+              <a:t>darkly</a:t>
             </a:r>
             <a:endParaRPr lang="en-US" sz="2800" dirty="0"/>
           </a:p>
@@ -9962,7 +9962,7 @@
                 <a:ea typeface="Calibri" pitchFamily="34" charset="-122"/>
                 <a:cs typeface="Calibri" pitchFamily="34" charset="-120"/>
               </a:rPr>
-              <a:t>absence of light</a:t>
+              <a:t>with little or no light</a:t>
             </a:r>
             <a:endParaRPr lang="en-US" sz="850" dirty="0"/>
           </a:p>
@@ -10035,7 +10035,7 @@
                 <a:ea typeface="Trebuchet MS" pitchFamily="34" charset="-122"/>
                 <a:cs typeface="Trebuchet MS" pitchFamily="34" charset="-120"/>
               </a:rPr>
-              <a:t>ness</a:t>
+              <a:t>ly</a:t>
             </a:r>
             <a:endParaRPr lang="en-US" sz="1300" dirty="0"/>
           </a:p>
@@ -10074,7 +10074,7 @@
                 <a:ea typeface="Calibri" pitchFamily="34" charset="-122"/>
                 <a:cs typeface="Calibri" pitchFamily="34" charset="-120"/>
               </a:rPr>
-              <a:t>state or quality of</a:t>
+              <a:t>in a way</a:t>
             </a:r>
             <a:endParaRPr lang="en-US" sz="850" dirty="0"/>
           </a:p>
@@ -10338,7 +10338,7 @@
                 <a:ea typeface="Trebuchet MS" pitchFamily="34" charset="-122"/>
                 <a:cs typeface="Trebuchet MS" pitchFamily="34" charset="-120"/>
               </a:rPr>
-              <a:t>ness</a:t>
+              <a:t>ly</a:t>
             </a:r>
             <a:endParaRPr lang="en-US" sz="1400" dirty="0"/>
           </a:p>
@@ -10445,7 +10445,7 @@
         </p:nvSpPr>
         <p:spPr>
           <a:xfrm>
-            <a:off x="2254649" y="4169664"/>
+            <a:off x="2427732" y="4169664"/>
             <a:ext cx="685800" cy="475488"/>
           </a:xfrm>
           <a:prstGeom prst="rect">
@@ -10472,7 +10472,7 @@
         </p:nvSpPr>
         <p:spPr>
           <a:xfrm>
-            <a:off x="2254649" y="4169664"/>
+            <a:off x="2427732" y="4169664"/>
             <a:ext cx="685800" cy="475488"/>
           </a:xfrm>
           <a:prstGeom prst="rect">
@@ -10511,7 +10511,7 @@
         </p:nvSpPr>
         <p:spPr>
           <a:xfrm>
-            <a:off x="3293146" y="4169664"/>
+            <a:off x="3639312" y="4169664"/>
             <a:ext cx="685800" cy="475488"/>
           </a:xfrm>
           <a:prstGeom prst="rect">
@@ -10538,7 +10538,7 @@
         </p:nvSpPr>
         <p:spPr>
           <a:xfrm>
-            <a:off x="3293146" y="4169664"/>
+            <a:off x="3639312" y="4169664"/>
             <a:ext cx="685800" cy="475488"/>
           </a:xfrm>
           <a:prstGeom prst="rect">
@@ -10577,7 +10577,7 @@
         </p:nvSpPr>
         <p:spPr>
           <a:xfrm>
-            <a:off x="4331643" y="4169664"/>
+            <a:off x="4850892" y="4169664"/>
             <a:ext cx="685800" cy="475488"/>
           </a:xfrm>
           <a:prstGeom prst="rect">
@@ -10604,7 +10604,7 @@
         </p:nvSpPr>
         <p:spPr>
           <a:xfrm>
-            <a:off x="4331643" y="4169664"/>
+            <a:off x="4850892" y="4169664"/>
             <a:ext cx="685800" cy="475488"/>
           </a:xfrm>
           <a:prstGeom prst="rect">
@@ -10643,7 +10643,7 @@
         </p:nvSpPr>
         <p:spPr>
           <a:xfrm>
-            <a:off x="5370141" y="4169664"/>
+            <a:off x="6062472" y="4169664"/>
             <a:ext cx="685800" cy="475488"/>
           </a:xfrm>
           <a:prstGeom prst="rect">
@@ -10670,7 +10670,7 @@
         </p:nvSpPr>
         <p:spPr>
           <a:xfrm>
-            <a:off x="5370141" y="4169664"/>
+            <a:off x="6062472" y="4169664"/>
             <a:ext cx="685800" cy="475488"/>
           </a:xfrm>
           <a:prstGeom prst="rect">
@@ -10695,7 +10695,7 @@
                 <a:ea typeface="Trebuchet MS" pitchFamily="34" charset="-122"/>
                 <a:cs typeface="Trebuchet MS" pitchFamily="34" charset="-120"/>
               </a:rPr>
-              <a:t>n</a:t>
+              <a:t>l</a:t>
             </a:r>
             <a:endParaRPr lang="en-US" sz="900" dirty="0"/>
           </a:p>
@@ -10709,7 +10709,7 @@
         </p:nvSpPr>
         <p:spPr>
           <a:xfrm>
-            <a:off x="6408638" y="4169664"/>
+            <a:off x="7274052" y="4169664"/>
             <a:ext cx="685800" cy="475488"/>
           </a:xfrm>
           <a:prstGeom prst="rect">
@@ -10736,7 +10736,7 @@
         </p:nvSpPr>
         <p:spPr>
           <a:xfrm>
-            <a:off x="6408638" y="4169664"/>
+            <a:off x="7274052" y="4169664"/>
             <a:ext cx="685800" cy="475488"/>
           </a:xfrm>
           <a:prstGeom prst="rect">
@@ -10761,73 +10761,7 @@
                 <a:ea typeface="Trebuchet MS" pitchFamily="34" charset="-122"/>
                 <a:cs typeface="Trebuchet MS" pitchFamily="34" charset="-120"/>
               </a:rPr>
-              <a:t>e</a:t>
-            </a:r>
-            <a:endParaRPr lang="en-US" sz="900" dirty="0"/>
-          </a:p>
-        </p:txBody>
-      </p:sp>
-      <p:sp>
-        <p:nvSpPr>
-          <p:cNvPr id="43" name="Shape 41"/>
-          <p:cNvSpPr/>
-          <p:nvPr/>
-        </p:nvSpPr>
-        <p:spPr>
-          <a:xfrm>
-            <a:off x="7447135" y="4169664"/>
-            <a:ext cx="685800" cy="475488"/>
-          </a:xfrm>
-          <a:prstGeom prst="rect">
-            <a:avLst>
-              <a:gd name="adj" fmla="val 7692"/>
-            </a:avLst>
-          </a:prstGeom>
-          <a:solidFill>
-            <a:srgbClr val="FFFFFF"/>
-          </a:solidFill>
-          <a:ln w="12700">
-            <a:solidFill>
-              <a:srgbClr val="DB2777"/>
-            </a:solidFill>
-            <a:prstDash val="solid"/>
-          </a:ln>
-        </p:spPr>
-      </p:sp>
-      <p:sp>
-        <p:nvSpPr>
-          <p:cNvPr id="44" name="Text 42"/>
-          <p:cNvSpPr/>
-          <p:nvPr/>
-        </p:nvSpPr>
-        <p:spPr>
-          <a:xfrm>
-            <a:off x="7447135" y="4169664"/>
-            <a:ext cx="685800" cy="475488"/>
-          </a:xfrm>
-          <a:prstGeom prst="rect">
-            <a:avLst/>
-          </a:prstGeom>
-          <a:noFill/>
-          <a:ln/>
-        </p:spPr>
-        <p:txBody>
-          <a:bodyPr wrap="square" lIns="0" tIns="0" rIns="0" bIns="0" rtlCol="0" anchor="ctr"/>
-          <a:lstStyle/>
-          <a:p>
-            <a:pPr algn="ctr" indent="0" marL="0">
-              <a:buNone/>
-            </a:pPr>
-            <a:r>
-              <a:rPr lang="en-US" sz="900" b="1" dirty="0">
-                <a:solidFill>
-                  <a:srgbClr val="9D174D"/>
-                </a:solidFill>
-                <a:latin typeface="Trebuchet MS" pitchFamily="34" charset="0"/>
-                <a:ea typeface="Trebuchet MS" pitchFamily="34" charset="-122"/>
-                <a:cs typeface="Trebuchet MS" pitchFamily="34" charset="-120"/>
-              </a:rPr>
-              <a:t>ss</a:t>
+              <a:t>y</a:t>
             </a:r>
             <a:endParaRPr lang="en-US" sz="900" dirty="0"/>
           </a:p>
@@ -11119,7 +11053,7 @@
                 <a:ea typeface="Calibri" pitchFamily="34" charset="-122"/>
                 <a:cs typeface="Calibri" pitchFamily="34" charset="-120"/>
               </a:rPr>
-              <a:t>Word Labs  •  wordlabs.app  •  Root: 'dark' = absence of light</a:t>
+              <a:t>Word Labs  •  wordlabs.app  •  Root: 'dark' = with little or no light</a:t>
             </a:r>
             <a:endParaRPr lang="en-US" sz="800" dirty="0"/>
           </a:p>
@@ -11258,7 +11192,7 @@
                 <a:ea typeface="Trebuchet MS" pitchFamily="34" charset="-122"/>
                 <a:cs typeface="Trebuchet MS" pitchFamily="34" charset="-120"/>
               </a:rPr>
-              <a:t>darken</a:t>
+              <a:t>darkest</a:t>
             </a:r>
             <a:endParaRPr lang="en-US" sz="2800" dirty="0"/>
           </a:p>
@@ -11946,7 +11880,7 @@
                 <a:ea typeface="Calibri" pitchFamily="34" charset="-122"/>
                 <a:cs typeface="Calibri" pitchFamily="34" charset="-120"/>
               </a:rPr>
-              <a:t>Word Labs  •  wordlabs.app  •  Root: 'dark' = absence of light</a:t>
+              <a:t>Word Labs  •  wordlabs.app  •  Root: 'dark' = with little or no light</a:t>
             </a:r>
             <a:endParaRPr lang="en-US" sz="800" dirty="0"/>
           </a:p>
@@ -12085,7 +12019,7 @@
                 <a:ea typeface="Trebuchet MS" pitchFamily="34" charset="-122"/>
                 <a:cs typeface="Trebuchet MS" pitchFamily="34" charset="-120"/>
               </a:rPr>
-              <a:t>darken</a:t>
+              <a:t>darkest</a:t>
             </a:r>
             <a:endParaRPr lang="en-US" sz="2800" dirty="0"/>
           </a:p>
@@ -12263,7 +12197,7 @@
                 <a:ea typeface="Calibri" pitchFamily="34" charset="-122"/>
                 <a:cs typeface="Calibri" pitchFamily="34" charset="-120"/>
               </a:rPr>
-              <a:t>absence of light</a:t>
+              <a:t>with little or no light</a:t>
             </a:r>
             <a:endParaRPr lang="en-US" sz="850" dirty="0"/>
           </a:p>
@@ -12336,7 +12270,7 @@
                 <a:ea typeface="Trebuchet MS" pitchFamily="34" charset="-122"/>
                 <a:cs typeface="Trebuchet MS" pitchFamily="34" charset="-120"/>
               </a:rPr>
-              <a:t>en</a:t>
+              <a:t>est</a:t>
             </a:r>
             <a:endParaRPr lang="en-US" sz="1300" dirty="0"/>
           </a:p>
@@ -12375,7 +12309,7 @@
                 <a:ea typeface="Calibri" pitchFamily="34" charset="-122"/>
                 <a:cs typeface="Calibri" pitchFamily="34" charset="-120"/>
               </a:rPr>
-              <a:t>to make or become</a:t>
+              <a:t>most</a:t>
             </a:r>
             <a:endParaRPr lang="en-US" sz="850" dirty="0"/>
           </a:p>
@@ -12931,7 +12865,7 @@
                 <a:ea typeface="Calibri" pitchFamily="34" charset="-122"/>
                 <a:cs typeface="Calibri" pitchFamily="34" charset="-120"/>
               </a:rPr>
-              <a:t>Word Labs  •  wordlabs.app  •  Root: 'dark' = absence of light</a:t>
+              <a:t>Word Labs  •  wordlabs.app  •  Root: 'dark' = with little or no light</a:t>
             </a:r>
             <a:endParaRPr lang="en-US" sz="800" dirty="0"/>
           </a:p>
@@ -13070,7 +13004,7 @@
                 <a:ea typeface="Trebuchet MS" pitchFamily="34" charset="-122"/>
                 <a:cs typeface="Trebuchet MS" pitchFamily="34" charset="-120"/>
               </a:rPr>
-              <a:t>darken</a:t>
+              <a:t>darkest</a:t>
             </a:r>
             <a:endParaRPr lang="en-US" sz="2800" dirty="0"/>
           </a:p>
@@ -13248,7 +13182,7 @@
                 <a:ea typeface="Calibri" pitchFamily="34" charset="-122"/>
                 <a:cs typeface="Calibri" pitchFamily="34" charset="-120"/>
               </a:rPr>
-              <a:t>absence of light</a:t>
+              <a:t>with little or no light</a:t>
             </a:r>
             <a:endParaRPr lang="en-US" sz="850" dirty="0"/>
           </a:p>
@@ -13321,7 +13255,7 @@
                 <a:ea typeface="Trebuchet MS" pitchFamily="34" charset="-122"/>
                 <a:cs typeface="Trebuchet MS" pitchFamily="34" charset="-120"/>
               </a:rPr>
-              <a:t>en</a:t>
+              <a:t>est</a:t>
             </a:r>
             <a:endParaRPr lang="en-US" sz="1300" dirty="0"/>
           </a:p>
@@ -13360,7 +13294,7 @@
                 <a:ea typeface="Calibri" pitchFamily="34" charset="-122"/>
                 <a:cs typeface="Calibri" pitchFamily="34" charset="-120"/>
               </a:rPr>
-              <a:t>to make or become</a:t>
+              <a:t>most</a:t>
             </a:r>
             <a:endParaRPr lang="en-US" sz="850" dirty="0"/>
           </a:p>
@@ -13624,7 +13558,7 @@
                 <a:ea typeface="Trebuchet MS" pitchFamily="34" charset="-122"/>
                 <a:cs typeface="Trebuchet MS" pitchFamily="34" charset="-120"/>
               </a:rPr>
-              <a:t>en</a:t>
+              <a:t>est</a:t>
             </a:r>
             <a:endParaRPr lang="en-US" sz="1400" dirty="0"/>
           </a:p>
@@ -13957,7 +13891,7 @@
                 <a:ea typeface="Calibri" pitchFamily="34" charset="-122"/>
                 <a:cs typeface="Calibri" pitchFamily="34" charset="-120"/>
               </a:rPr>
-              <a:t>Root 'dark' — absence of light</a:t>
+              <a:t>Root 'dark' — with little or no light</a:t>
             </a:r>
             <a:endParaRPr lang="en-US" sz="1600" dirty="0"/>
           </a:p>
@@ -14313,7 +14247,7 @@
                 <a:ea typeface="Calibri" pitchFamily="34" charset="-122"/>
                 <a:cs typeface="Calibri" pitchFamily="34" charset="-120"/>
               </a:rPr>
-              <a:t>Word Labs  •  wordlabs.app  •  Root: 'dark' = absence of light</a:t>
+              <a:t>Word Labs  •  wordlabs.app  •  Root: 'dark' = with little or no light</a:t>
             </a:r>
             <a:endParaRPr lang="en-US" sz="800" dirty="0"/>
           </a:p>
@@ -14452,7 +14386,7 @@
                 <a:ea typeface="Trebuchet MS" pitchFamily="34" charset="-122"/>
                 <a:cs typeface="Trebuchet MS" pitchFamily="34" charset="-120"/>
               </a:rPr>
-              <a:t>darken</a:t>
+              <a:t>darkest</a:t>
             </a:r>
             <a:endParaRPr lang="en-US" sz="2800" dirty="0"/>
           </a:p>
@@ -14630,7 +14564,7 @@
                 <a:ea typeface="Calibri" pitchFamily="34" charset="-122"/>
                 <a:cs typeface="Calibri" pitchFamily="34" charset="-120"/>
               </a:rPr>
-              <a:t>absence of light</a:t>
+              <a:t>with little or no light</a:t>
             </a:r>
             <a:endParaRPr lang="en-US" sz="850" dirty="0"/>
           </a:p>
@@ -14703,7 +14637,7 @@
                 <a:ea typeface="Trebuchet MS" pitchFamily="34" charset="-122"/>
                 <a:cs typeface="Trebuchet MS" pitchFamily="34" charset="-120"/>
               </a:rPr>
-              <a:t>en</a:t>
+              <a:t>est</a:t>
             </a:r>
             <a:endParaRPr lang="en-US" sz="1300" dirty="0"/>
           </a:p>
@@ -14742,7 +14676,7 @@
                 <a:ea typeface="Calibri" pitchFamily="34" charset="-122"/>
                 <a:cs typeface="Calibri" pitchFamily="34" charset="-120"/>
               </a:rPr>
-              <a:t>to make or become</a:t>
+              <a:t>most</a:t>
             </a:r>
             <a:endParaRPr lang="en-US" sz="850" dirty="0"/>
           </a:p>
@@ -15006,7 +14940,7 @@
                 <a:ea typeface="Trebuchet MS" pitchFamily="34" charset="-122"/>
                 <a:cs typeface="Trebuchet MS" pitchFamily="34" charset="-120"/>
               </a:rPr>
-              <a:t>en</a:t>
+              <a:t>est</a:t>
             </a:r>
             <a:endParaRPr lang="en-US" sz="1400" dirty="0"/>
           </a:p>
@@ -15113,7 +15047,7 @@
         </p:nvSpPr>
         <p:spPr>
           <a:xfrm>
-            <a:off x="2427732" y="4169664"/>
+            <a:off x="2254649" y="4169664"/>
             <a:ext cx="685800" cy="475488"/>
           </a:xfrm>
           <a:prstGeom prst="rect">
@@ -15140,7 +15074,7 @@
         </p:nvSpPr>
         <p:spPr>
           <a:xfrm>
-            <a:off x="2427732" y="4169664"/>
+            <a:off x="2254649" y="4169664"/>
             <a:ext cx="685800" cy="475488"/>
           </a:xfrm>
           <a:prstGeom prst="rect">
@@ -15179,7 +15113,7 @@
         </p:nvSpPr>
         <p:spPr>
           <a:xfrm>
-            <a:off x="3639312" y="4169664"/>
+            <a:off x="3293146" y="4169664"/>
             <a:ext cx="685800" cy="475488"/>
           </a:xfrm>
           <a:prstGeom prst="rect">
@@ -15206,7 +15140,7 @@
         </p:nvSpPr>
         <p:spPr>
           <a:xfrm>
-            <a:off x="3639312" y="4169664"/>
+            <a:off x="3293146" y="4169664"/>
             <a:ext cx="685800" cy="475488"/>
           </a:xfrm>
           <a:prstGeom prst="rect">
@@ -15245,7 +15179,7 @@
         </p:nvSpPr>
         <p:spPr>
           <a:xfrm>
-            <a:off x="4850892" y="4169664"/>
+            <a:off x="4331643" y="4169664"/>
             <a:ext cx="685800" cy="475488"/>
           </a:xfrm>
           <a:prstGeom prst="rect">
@@ -15272,7 +15206,7 @@
         </p:nvSpPr>
         <p:spPr>
           <a:xfrm>
-            <a:off x="4850892" y="4169664"/>
+            <a:off x="4331643" y="4169664"/>
             <a:ext cx="685800" cy="475488"/>
           </a:xfrm>
           <a:prstGeom prst="rect">
@@ -15311,7 +15245,7 @@
         </p:nvSpPr>
         <p:spPr>
           <a:xfrm>
-            <a:off x="6062472" y="4169664"/>
+            <a:off x="5370141" y="4169664"/>
             <a:ext cx="685800" cy="475488"/>
           </a:xfrm>
           <a:prstGeom prst="rect">
@@ -15338,7 +15272,7 @@
         </p:nvSpPr>
         <p:spPr>
           <a:xfrm>
-            <a:off x="6062472" y="4169664"/>
+            <a:off x="5370141" y="4169664"/>
             <a:ext cx="685800" cy="475488"/>
           </a:xfrm>
           <a:prstGeom prst="rect">
@@ -15377,7 +15311,7 @@
         </p:nvSpPr>
         <p:spPr>
           <a:xfrm>
-            <a:off x="7274052" y="4169664"/>
+            <a:off x="6408638" y="4169664"/>
             <a:ext cx="685800" cy="475488"/>
           </a:xfrm>
           <a:prstGeom prst="rect">
@@ -15404,7 +15338,7 @@
         </p:nvSpPr>
         <p:spPr>
           <a:xfrm>
-            <a:off x="7274052" y="4169664"/>
+            <a:off x="6408638" y="4169664"/>
             <a:ext cx="685800" cy="475488"/>
           </a:xfrm>
           <a:prstGeom prst="rect">
@@ -15429,7 +15363,73 @@
                 <a:ea typeface="Trebuchet MS" pitchFamily="34" charset="-122"/>
                 <a:cs typeface="Trebuchet MS" pitchFamily="34" charset="-120"/>
               </a:rPr>
-              <a:t>n</a:t>
+              <a:t>s</a:t>
+            </a:r>
+            <a:endParaRPr lang="en-US" sz="900" dirty="0"/>
+          </a:p>
+        </p:txBody>
+      </p:sp>
+      <p:sp>
+        <p:nvSpPr>
+          <p:cNvPr id="43" name="Shape 41"/>
+          <p:cNvSpPr/>
+          <p:nvPr/>
+        </p:nvSpPr>
+        <p:spPr>
+          <a:xfrm>
+            <a:off x="7447135" y="4169664"/>
+            <a:ext cx="685800" cy="475488"/>
+          </a:xfrm>
+          <a:prstGeom prst="rect">
+            <a:avLst>
+              <a:gd name="adj" fmla="val 7692"/>
+            </a:avLst>
+          </a:prstGeom>
+          <a:solidFill>
+            <a:srgbClr val="FFFFFF"/>
+          </a:solidFill>
+          <a:ln w="12700">
+            <a:solidFill>
+              <a:srgbClr val="DB2777"/>
+            </a:solidFill>
+            <a:prstDash val="solid"/>
+          </a:ln>
+        </p:spPr>
+      </p:sp>
+      <p:sp>
+        <p:nvSpPr>
+          <p:cNvPr id="44" name="Text 42"/>
+          <p:cNvSpPr/>
+          <p:nvPr/>
+        </p:nvSpPr>
+        <p:spPr>
+          <a:xfrm>
+            <a:off x="7447135" y="4169664"/>
+            <a:ext cx="685800" cy="475488"/>
+          </a:xfrm>
+          <a:prstGeom prst="rect">
+            <a:avLst/>
+          </a:prstGeom>
+          <a:noFill/>
+          <a:ln/>
+        </p:spPr>
+        <p:txBody>
+          <a:bodyPr wrap="square" lIns="0" tIns="0" rIns="0" bIns="0" rtlCol="0" anchor="ctr"/>
+          <a:lstStyle/>
+          <a:p>
+            <a:pPr algn="ctr" indent="0" marL="0">
+              <a:buNone/>
+            </a:pPr>
+            <a:r>
+              <a:rPr lang="en-US" sz="900" b="1" dirty="0">
+                <a:solidFill>
+                  <a:srgbClr val="9D174D"/>
+                </a:solidFill>
+                <a:latin typeface="Trebuchet MS" pitchFamily="34" charset="0"/>
+                <a:ea typeface="Trebuchet MS" pitchFamily="34" charset="-122"/>
+                <a:cs typeface="Trebuchet MS" pitchFamily="34" charset="-120"/>
+              </a:rPr>
+              <a:t>t</a:t>
             </a:r>
             <a:endParaRPr lang="en-US" sz="900" dirty="0"/>
           </a:p>
@@ -16003,7 +16003,7 @@
                 <a:ea typeface="Calibri" pitchFamily="34" charset="-122"/>
                 <a:cs typeface="Calibri" pitchFamily="34" charset="-120"/>
               </a:rPr>
-              <a:t>Word Labs  •  wordlabs.app  •  Root: 'dark' = absence of light</a:t>
+              <a:t>Word Labs  •  wordlabs.app  •  Root: 'dark' = with little or no light</a:t>
             </a:r>
             <a:endParaRPr lang="en-US" sz="800" dirty="0"/>
           </a:p>
@@ -16337,7 +16337,7 @@
                 <a:ea typeface="Trebuchet MS" pitchFamily="34" charset="-122"/>
                 <a:cs typeface="Trebuchet MS" pitchFamily="34" charset="-120"/>
               </a:rPr>
-              <a:t>1</a:t>
+              <a:t>0</a:t>
             </a:r>
             <a:pPr algn="ctr" indent="0" marL="0">
               <a:buNone/>
@@ -16643,7 +16643,7 @@
                 <a:ea typeface="Calibri" pitchFamily="34" charset="-122"/>
                 <a:cs typeface="Calibri" pitchFamily="34" charset="-120"/>
               </a:rPr>
-              <a:t>Word Labs  •  wordlabs.app  •  Root: 'dark' = absence of light</a:t>
+              <a:t>Word Labs  •  wordlabs.app  •  Root: 'dark' = with little or no light</a:t>
             </a:r>
             <a:endParaRPr lang="en-US" sz="800" dirty="0"/>
           </a:p>
@@ -16755,7 +16755,7 @@
                 <a:ea typeface="Calibri" pitchFamily="34" charset="-122"/>
                 <a:cs typeface="Calibri" pitchFamily="34" charset="-120"/>
               </a:rPr>
-              <a:t>The </a:t>
+              <a:t>The room </a:t>
             </a:r>
             <a:pPr algn="l" indent="0" marL="0">
               <a:buNone/>
@@ -16786,7 +16786,7 @@
                 <a:ea typeface="Calibri" pitchFamily="34" charset="-122"/>
                 <a:cs typeface="Calibri" pitchFamily="34" charset="-120"/>
               </a:rPr>
-              <a:t> room felt eerie, but she moved </a:t>
+              <a:t> quickly as the sun set behind the hills. The power cut left the whole street in </a:t>
             </a:r>
             <a:pPr algn="l" indent="0" marL="0">
               <a:buNone/>
@@ -16803,7 +16803,7 @@
                 <a:ea typeface="Calibri" pitchFamily="34" charset="-122"/>
                 <a:cs typeface="Calibri" pitchFamily="34" charset="-120"/>
               </a:rPr>
-              <a:t>darkly</a:t>
+              <a:t>darkness</a:t>
             </a:r>
             <a:pPr algn="l" indent="0" marL="0">
               <a:buNone/>
@@ -16817,7 +16817,38 @@
                 <a:ea typeface="Calibri" pitchFamily="34" charset="-122"/>
                 <a:cs typeface="Calibri" pitchFamily="34" charset="-120"/>
               </a:rPr>
-              <a:t> through it and waited until after dark.</a:t>
+              <a:t>. The </a:t>
+            </a:r>
+            <a:pPr algn="l" indent="0" marL="0">
+              <a:buNone/>
+            </a:pPr>
+            <a:r>
+              <a:rPr lang="en-US" sz="1800" b="1" dirty="0">
+                <a:solidFill>
+                  <a:srgbClr val="0D9488"/>
+                </a:solidFill>
+                <a:highlight>
+                  <a:srgbClr val="CCFBF1"/>
+                </a:highlight>
+                <a:latin typeface="Calibri" pitchFamily="34" charset="0"/>
+                <a:ea typeface="Calibri" pitchFamily="34" charset="-122"/>
+                <a:cs typeface="Calibri" pitchFamily="34" charset="-120"/>
+              </a:rPr>
+              <a:t>darkening</a:t>
+            </a:r>
+            <a:pPr algn="l" indent="0" marL="0">
+              <a:buNone/>
+            </a:pPr>
+            <a:r>
+              <a:rPr lang="en-US" sz="1800" dirty="0">
+                <a:solidFill>
+                  <a:srgbClr val="0F172A"/>
+                </a:solidFill>
+                <a:latin typeface="Calibri" pitchFamily="34" charset="0"/>
+                <a:ea typeface="Calibri" pitchFamily="34" charset="-122"/>
+                <a:cs typeface="Calibri" pitchFamily="34" charset="-120"/>
+              </a:rPr>
+              <a:t> sky told us a storm was coming.</a:t>
             </a:r>
             <a:endParaRPr lang="en-US" sz="1800" dirty="0"/>
           </a:p>
@@ -17100,7 +17131,7 @@
                 <a:ea typeface="Trebuchet MS" pitchFamily="34" charset="-122"/>
                 <a:cs typeface="Trebuchet MS" pitchFamily="34" charset="-120"/>
               </a:rPr>
-              <a:t>darkly</a:t>
+              <a:t>darkness</a:t>
             </a:r>
             <a:endParaRPr lang="en-US" sz="1400" dirty="0"/>
           </a:p>
@@ -17228,7 +17259,7 @@
                 <a:ea typeface="Trebuchet MS" pitchFamily="34" charset="-122"/>
                 <a:cs typeface="Trebuchet MS" pitchFamily="34" charset="-120"/>
               </a:rPr>
-              <a:t>darkish</a:t>
+              <a:t>darkening</a:t>
             </a:r>
             <a:endParaRPr lang="en-US" sz="1400" dirty="0"/>
           </a:p>
@@ -17559,7 +17590,7 @@
                 <a:ea typeface="Calibri" pitchFamily="34" charset="-122"/>
                 <a:cs typeface="Calibri" pitchFamily="34" charset="-120"/>
               </a:rPr>
-              <a:t>Word Labs  •  wordlabs.app  •  Root: 'dark' = absence of light</a:t>
+              <a:t>Word Labs  •  wordlabs.app  •  Root: 'dark' = with little or no light</a:t>
             </a:r>
             <a:endParaRPr lang="en-US" sz="800" dirty="0"/>
           </a:p>
@@ -18386,7 +18417,7 @@
                 <a:ea typeface="Calibri" pitchFamily="34" charset="-122"/>
                 <a:cs typeface="Calibri" pitchFamily="34" charset="-120"/>
               </a:rPr>
-              <a:t>Word Labs  •  wordlabs.app  •  Root: 'dark' = absence of light</a:t>
+              <a:t>Word Labs  •  wordlabs.app  •  Root: 'dark' = with little or no light</a:t>
             </a:r>
             <a:endParaRPr lang="en-US" sz="800" dirty="0"/>
           </a:p>
@@ -18703,7 +18734,7 @@
                 <a:ea typeface="Calibri" pitchFamily="34" charset="-122"/>
                 <a:cs typeface="Calibri" pitchFamily="34" charset="-120"/>
               </a:rPr>
-              <a:t>absence of light</a:t>
+              <a:t>with little or no light</a:t>
             </a:r>
             <a:endParaRPr lang="en-US" sz="850" dirty="0"/>
           </a:p>
@@ -18815,7 +18846,7 @@
                 <a:ea typeface="Calibri" pitchFamily="34" charset="-122"/>
                 <a:cs typeface="Calibri" pitchFamily="34" charset="-120"/>
               </a:rPr>
-              <a:t>to make or become</a:t>
+              <a:t>made of; to make</a:t>
             </a:r>
             <a:endParaRPr lang="en-US" sz="850" dirty="0"/>
           </a:p>
@@ -19483,7 +19514,7 @@
                 <a:ea typeface="Calibri" pitchFamily="34" charset="-122"/>
                 <a:cs typeface="Calibri" pitchFamily="34" charset="-120"/>
               </a:rPr>
-              <a:t>Word Labs  •  wordlabs.app  •  Root: 'dark' = absence of light</a:t>
+              <a:t>Word Labs  •  wordlabs.app  •  Root: 'dark' = with little or no light</a:t>
             </a:r>
             <a:endParaRPr lang="en-US" sz="800" dirty="0"/>
           </a:p>
@@ -19800,7 +19831,7 @@
                 <a:ea typeface="Calibri" pitchFamily="34" charset="-122"/>
                 <a:cs typeface="Calibri" pitchFamily="34" charset="-120"/>
               </a:rPr>
-              <a:t>absence of light</a:t>
+              <a:t>with little or no light</a:t>
             </a:r>
             <a:endParaRPr lang="en-US" sz="850" dirty="0"/>
           </a:p>
@@ -19912,7 +19943,7 @@
                 <a:ea typeface="Calibri" pitchFamily="34" charset="-122"/>
                 <a:cs typeface="Calibri" pitchFamily="34" charset="-120"/>
               </a:rPr>
-              <a:t>to make or become</a:t>
+              <a:t>made of; to make</a:t>
             </a:r>
             <a:endParaRPr lang="en-US" sz="850" dirty="0"/>
           </a:p>
@@ -20712,7 +20743,7 @@
                 <a:ea typeface="Calibri" pitchFamily="34" charset="-122"/>
                 <a:cs typeface="Calibri" pitchFamily="34" charset="-120"/>
               </a:rPr>
-              <a:t>Word Labs  •  wordlabs.app  •  Root: 'dark' = absence of light</a:t>
+              <a:t>Word Labs  •  wordlabs.app  •  Root: 'dark' = with little or no light</a:t>
             </a:r>
             <a:endParaRPr lang="en-US" sz="800" dirty="0"/>
           </a:p>
@@ -21029,7 +21060,7 @@
                 <a:ea typeface="Calibri" pitchFamily="34" charset="-122"/>
                 <a:cs typeface="Calibri" pitchFamily="34" charset="-120"/>
               </a:rPr>
-              <a:t>absence of light</a:t>
+              <a:t>with little or no light</a:t>
             </a:r>
             <a:endParaRPr lang="en-US" sz="850" dirty="0"/>
           </a:p>
@@ -21141,7 +21172,7 @@
                 <a:ea typeface="Calibri" pitchFamily="34" charset="-122"/>
                 <a:cs typeface="Calibri" pitchFamily="34" charset="-120"/>
               </a:rPr>
-              <a:t>to make or become</a:t>
+              <a:t>made of; to make</a:t>
             </a:r>
             <a:endParaRPr lang="en-US" sz="850" dirty="0"/>
           </a:p>
@@ -21624,7 +21655,7 @@
         </p:nvSpPr>
         <p:spPr>
           <a:xfrm>
-            <a:off x="2124837" y="4169664"/>
+            <a:off x="2254649" y="4169664"/>
             <a:ext cx="685800" cy="475488"/>
           </a:xfrm>
           <a:prstGeom prst="rect">
@@ -21651,7 +21682,7 @@
         </p:nvSpPr>
         <p:spPr>
           <a:xfrm>
-            <a:off x="2124837" y="4169664"/>
+            <a:off x="2254649" y="4169664"/>
             <a:ext cx="685800" cy="475488"/>
           </a:xfrm>
           <a:prstGeom prst="rect">
@@ -21690,7 +21721,7 @@
         </p:nvSpPr>
         <p:spPr>
           <a:xfrm>
-            <a:off x="3033522" y="4169664"/>
+            <a:off x="3293146" y="4169664"/>
             <a:ext cx="685800" cy="475488"/>
           </a:xfrm>
           <a:prstGeom prst="rect">
@@ -21717,7 +21748,7 @@
         </p:nvSpPr>
         <p:spPr>
           <a:xfrm>
-            <a:off x="3033522" y="4169664"/>
+            <a:off x="3293146" y="4169664"/>
             <a:ext cx="685800" cy="475488"/>
           </a:xfrm>
           <a:prstGeom prst="rect">
@@ -21756,7 +21787,7 @@
         </p:nvSpPr>
         <p:spPr>
           <a:xfrm>
-            <a:off x="3942207" y="4169664"/>
+            <a:off x="4331643" y="4169664"/>
             <a:ext cx="685800" cy="475488"/>
           </a:xfrm>
           <a:prstGeom prst="rect">
@@ -21783,7 +21814,7 @@
         </p:nvSpPr>
         <p:spPr>
           <a:xfrm>
-            <a:off x="3942207" y="4169664"/>
+            <a:off x="4331643" y="4169664"/>
             <a:ext cx="685800" cy="475488"/>
           </a:xfrm>
           <a:prstGeom prst="rect">
@@ -21822,7 +21853,7 @@
         </p:nvSpPr>
         <p:spPr>
           <a:xfrm>
-            <a:off x="4850892" y="4169664"/>
+            <a:off x="5370141" y="4169664"/>
             <a:ext cx="685800" cy="475488"/>
           </a:xfrm>
           <a:prstGeom prst="rect">
@@ -21849,7 +21880,7 @@
         </p:nvSpPr>
         <p:spPr>
           <a:xfrm>
-            <a:off x="4850892" y="4169664"/>
+            <a:off x="5370141" y="4169664"/>
             <a:ext cx="685800" cy="475488"/>
           </a:xfrm>
           <a:prstGeom prst="rect">
@@ -21888,7 +21919,7 @@
         </p:nvSpPr>
         <p:spPr>
           <a:xfrm>
-            <a:off x="5759577" y="4169664"/>
+            <a:off x="6408638" y="4169664"/>
             <a:ext cx="685800" cy="475488"/>
           </a:xfrm>
           <a:prstGeom prst="rect">
@@ -21915,7 +21946,7 @@
         </p:nvSpPr>
         <p:spPr>
           <a:xfrm>
-            <a:off x="5759577" y="4169664"/>
+            <a:off x="6408638" y="4169664"/>
             <a:ext cx="685800" cy="475488"/>
           </a:xfrm>
           <a:prstGeom prst="rect">
@@ -21954,7 +21985,7 @@
         </p:nvSpPr>
         <p:spPr>
           <a:xfrm>
-            <a:off x="6668262" y="4169664"/>
+            <a:off x="7447135" y="4169664"/>
             <a:ext cx="685800" cy="475488"/>
           </a:xfrm>
           <a:prstGeom prst="rect">
@@ -21981,7 +22012,7 @@
         </p:nvSpPr>
         <p:spPr>
           <a:xfrm>
-            <a:off x="6668262" y="4169664"/>
+            <a:off x="7447135" y="4169664"/>
             <a:ext cx="685800" cy="475488"/>
           </a:xfrm>
           <a:prstGeom prst="rect">
@@ -22006,73 +22037,7 @@
                 <a:ea typeface="Trebuchet MS" pitchFamily="34" charset="-122"/>
                 <a:cs typeface="Trebuchet MS" pitchFamily="34" charset="-120"/>
               </a:rPr>
-              <a:t>e</a:t>
-            </a:r>
-            <a:endParaRPr lang="en-US" sz="900" dirty="0"/>
-          </a:p>
-        </p:txBody>
-      </p:sp>
-      <p:sp>
-        <p:nvSpPr>
-          <p:cNvPr id="48" name="Shape 46"/>
-          <p:cNvSpPr/>
-          <p:nvPr/>
-        </p:nvSpPr>
-        <p:spPr>
-          <a:xfrm>
-            <a:off x="7576947" y="4169664"/>
-            <a:ext cx="685800" cy="475488"/>
-          </a:xfrm>
-          <a:prstGeom prst="rect">
-            <a:avLst>
-              <a:gd name="adj" fmla="val 7692"/>
-            </a:avLst>
-          </a:prstGeom>
-          <a:solidFill>
-            <a:srgbClr val="FFFFFF"/>
-          </a:solidFill>
-          <a:ln w="12700">
-            <a:solidFill>
-              <a:srgbClr val="DB2777"/>
-            </a:solidFill>
-            <a:prstDash val="solid"/>
-          </a:ln>
-        </p:spPr>
-      </p:sp>
-      <p:sp>
-        <p:nvSpPr>
-          <p:cNvPr id="49" name="Text 47"/>
-          <p:cNvSpPr/>
-          <p:nvPr/>
-        </p:nvSpPr>
-        <p:spPr>
-          <a:xfrm>
-            <a:off x="7576947" y="4169664"/>
-            <a:ext cx="685800" cy="475488"/>
-          </a:xfrm>
-          <a:prstGeom prst="rect">
-            <a:avLst/>
-          </a:prstGeom>
-          <a:noFill/>
-          <a:ln/>
-        </p:spPr>
-        <p:txBody>
-          <a:bodyPr wrap="square" lIns="0" tIns="0" rIns="0" bIns="0" rtlCol="0" anchor="ctr"/>
-          <a:lstStyle/>
-          <a:p>
-            <a:pPr algn="ctr" indent="0" marL="0">
-              <a:buNone/>
-            </a:pPr>
-            <a:r>
-              <a:rPr lang="en-US" sz="900" b="1" dirty="0">
-                <a:solidFill>
-                  <a:srgbClr val="9D174D"/>
-                </a:solidFill>
-                <a:latin typeface="Trebuchet MS" pitchFamily="34" charset="0"/>
-                <a:ea typeface="Trebuchet MS" pitchFamily="34" charset="-122"/>
-                <a:cs typeface="Trebuchet MS" pitchFamily="34" charset="-120"/>
-              </a:rPr>
-              <a:t>d</a:t>
+              <a:t>ed</a:t>
             </a:r>
             <a:endParaRPr lang="en-US" sz="900" dirty="0"/>
           </a:p>
@@ -22364,7 +22329,7 @@
                 <a:ea typeface="Calibri" pitchFamily="34" charset="-122"/>
                 <a:cs typeface="Calibri" pitchFamily="34" charset="-120"/>
               </a:rPr>
-              <a:t>Word Labs  •  wordlabs.app  •  Root: 'dark' = absence of light</a:t>
+              <a:t>Word Labs  •  wordlabs.app  •  Root: 'dark' = with little or no light</a:t>
             </a:r>
             <a:endParaRPr lang="en-US" sz="800" dirty="0"/>
           </a:p>
@@ -22503,7 +22468,7 @@
                 <a:ea typeface="Trebuchet MS" pitchFamily="34" charset="-122"/>
                 <a:cs typeface="Trebuchet MS" pitchFamily="34" charset="-120"/>
               </a:rPr>
-              <a:t>darkly</a:t>
+              <a:t>darkness</a:t>
             </a:r>
             <a:endParaRPr lang="en-US" sz="2800" dirty="0"/>
           </a:p>
@@ -23191,7 +23156,7 @@
                 <a:ea typeface="Calibri" pitchFamily="34" charset="-122"/>
                 <a:cs typeface="Calibri" pitchFamily="34" charset="-120"/>
               </a:rPr>
-              <a:t>Word Labs  •  wordlabs.app  •  Root: 'dark' = absence of light</a:t>
+              <a:t>Word Labs  •  wordlabs.app  •  Root: 'dark' = with little or no light</a:t>
             </a:r>
             <a:endParaRPr lang="en-US" sz="800" dirty="0"/>
           </a:p>
@@ -23330,7 +23295,7 @@
                 <a:ea typeface="Trebuchet MS" pitchFamily="34" charset="-122"/>
                 <a:cs typeface="Trebuchet MS" pitchFamily="34" charset="-120"/>
               </a:rPr>
-              <a:t>darkly</a:t>
+              <a:t>darkness</a:t>
             </a:r>
             <a:endParaRPr lang="en-US" sz="2800" dirty="0"/>
           </a:p>
@@ -23508,7 +23473,7 @@
                 <a:ea typeface="Calibri" pitchFamily="34" charset="-122"/>
                 <a:cs typeface="Calibri" pitchFamily="34" charset="-120"/>
               </a:rPr>
-              <a:t>absence of light</a:t>
+              <a:t>with little or no light</a:t>
             </a:r>
             <a:endParaRPr lang="en-US" sz="850" dirty="0"/>
           </a:p>
@@ -23581,7 +23546,7 @@
                 <a:ea typeface="Trebuchet MS" pitchFamily="34" charset="-122"/>
                 <a:cs typeface="Trebuchet MS" pitchFamily="34" charset="-120"/>
               </a:rPr>
-              <a:t>ly</a:t>
+              <a:t>ness</a:t>
             </a:r>
             <a:endParaRPr lang="en-US" sz="1300" dirty="0"/>
           </a:p>
@@ -23620,7 +23585,7 @@
                 <a:ea typeface="Calibri" pitchFamily="34" charset="-122"/>
                 <a:cs typeface="Calibri" pitchFamily="34" charset="-120"/>
               </a:rPr>
-              <a:t>in a certain way</a:t>
+              <a:t>state of</a:t>
             </a:r>
             <a:endParaRPr lang="en-US" sz="850" dirty="0"/>
           </a:p>
@@ -24176,7 +24141,7 @@
                 <a:ea typeface="Calibri" pitchFamily="34" charset="-122"/>
                 <a:cs typeface="Calibri" pitchFamily="34" charset="-120"/>
               </a:rPr>
-              <a:t>Word Labs  •  wordlabs.app  •  Root: 'dark' = absence of light</a:t>
+              <a:t>Word Labs  •  wordlabs.app  •  Root: 'dark' = with little or no light</a:t>
             </a:r>
             <a:endParaRPr lang="en-US" sz="800" dirty="0"/>
           </a:p>
@@ -24249,7 +24214,7 @@
                 <a:ea typeface="Trebuchet MS" pitchFamily="34" charset="-122"/>
                 <a:cs typeface="Trebuchet MS" pitchFamily="34" charset="-120"/>
               </a:rPr>
-              <a:t>We are learning that the root 'dark' means 'absence of light'.</a:t>
+              <a:t>We are learning that the root 'dark' means 'with little or no light'.</a:t>
             </a:r>
             <a:endParaRPr lang="en-US" sz="2000" dirty="0"/>
           </a:p>
@@ -24895,7 +24860,7 @@
                 <a:ea typeface="Calibri" pitchFamily="34" charset="-122"/>
                 <a:cs typeface="Calibri" pitchFamily="34" charset="-120"/>
               </a:rPr>
-              <a:t>Word Labs  •  wordlabs.app  •  Root: 'dark' = absence of light</a:t>
+              <a:t>Word Labs  •  wordlabs.app  •  Root: 'dark' = with little or no light</a:t>
             </a:r>
             <a:endParaRPr lang="en-US" sz="800" dirty="0"/>
           </a:p>
@@ -25034,7 +24999,7 @@
                 <a:ea typeface="Trebuchet MS" pitchFamily="34" charset="-122"/>
                 <a:cs typeface="Trebuchet MS" pitchFamily="34" charset="-120"/>
               </a:rPr>
-              <a:t>darkly</a:t>
+              <a:t>darkness</a:t>
             </a:r>
             <a:endParaRPr lang="en-US" sz="2800" dirty="0"/>
           </a:p>
@@ -25212,7 +25177,7 @@
                 <a:ea typeface="Calibri" pitchFamily="34" charset="-122"/>
                 <a:cs typeface="Calibri" pitchFamily="34" charset="-120"/>
               </a:rPr>
-              <a:t>absence of light</a:t>
+              <a:t>with little or no light</a:t>
             </a:r>
             <a:endParaRPr lang="en-US" sz="850" dirty="0"/>
           </a:p>
@@ -25285,7 +25250,7 @@
                 <a:ea typeface="Trebuchet MS" pitchFamily="34" charset="-122"/>
                 <a:cs typeface="Trebuchet MS" pitchFamily="34" charset="-120"/>
               </a:rPr>
-              <a:t>ly</a:t>
+              <a:t>ness</a:t>
             </a:r>
             <a:endParaRPr lang="en-US" sz="1300" dirty="0"/>
           </a:p>
@@ -25324,7 +25289,7 @@
                 <a:ea typeface="Calibri" pitchFamily="34" charset="-122"/>
                 <a:cs typeface="Calibri" pitchFamily="34" charset="-120"/>
               </a:rPr>
-              <a:t>in a certain way</a:t>
+              <a:t>state of</a:t>
             </a:r>
             <a:endParaRPr lang="en-US" sz="850" dirty="0"/>
           </a:p>
@@ -25588,7 +25553,7 @@
                 <a:ea typeface="Trebuchet MS" pitchFamily="34" charset="-122"/>
                 <a:cs typeface="Trebuchet MS" pitchFamily="34" charset="-120"/>
               </a:rPr>
-              <a:t>ly</a:t>
+              <a:t>ness</a:t>
             </a:r>
             <a:endParaRPr lang="en-US" sz="1400" dirty="0"/>
           </a:p>
@@ -26012,7 +25977,7 @@
                 <a:ea typeface="Calibri" pitchFamily="34" charset="-122"/>
                 <a:cs typeface="Calibri" pitchFamily="34" charset="-120"/>
               </a:rPr>
-              <a:t>Word Labs  •  wordlabs.app  •  Root: 'dark' = absence of light</a:t>
+              <a:t>Word Labs  •  wordlabs.app  •  Root: 'dark' = with little or no light</a:t>
             </a:r>
             <a:endParaRPr lang="en-US" sz="800" dirty="0"/>
           </a:p>
@@ -26151,7 +26116,7 @@
                 <a:ea typeface="Trebuchet MS" pitchFamily="34" charset="-122"/>
                 <a:cs typeface="Trebuchet MS" pitchFamily="34" charset="-120"/>
               </a:rPr>
-              <a:t>darkly</a:t>
+              <a:t>darkness</a:t>
             </a:r>
             <a:endParaRPr lang="en-US" sz="2800" dirty="0"/>
           </a:p>
@@ -26329,7 +26294,7 @@
                 <a:ea typeface="Calibri" pitchFamily="34" charset="-122"/>
                 <a:cs typeface="Calibri" pitchFamily="34" charset="-120"/>
               </a:rPr>
-              <a:t>absence of light</a:t>
+              <a:t>with little or no light</a:t>
             </a:r>
             <a:endParaRPr lang="en-US" sz="850" dirty="0"/>
           </a:p>
@@ -26402,7 +26367,7 @@
                 <a:ea typeface="Trebuchet MS" pitchFamily="34" charset="-122"/>
                 <a:cs typeface="Trebuchet MS" pitchFamily="34" charset="-120"/>
               </a:rPr>
-              <a:t>ly</a:t>
+              <a:t>ness</a:t>
             </a:r>
             <a:endParaRPr lang="en-US" sz="1300" dirty="0"/>
           </a:p>
@@ -26441,7 +26406,7 @@
                 <a:ea typeface="Calibri" pitchFamily="34" charset="-122"/>
                 <a:cs typeface="Calibri" pitchFamily="34" charset="-120"/>
               </a:rPr>
-              <a:t>in a certain way</a:t>
+              <a:t>state of</a:t>
             </a:r>
             <a:endParaRPr lang="en-US" sz="850" dirty="0"/>
           </a:p>
@@ -26705,7 +26670,7 @@
                 <a:ea typeface="Trebuchet MS" pitchFamily="34" charset="-122"/>
                 <a:cs typeface="Trebuchet MS" pitchFamily="34" charset="-120"/>
               </a:rPr>
-              <a:t>ly</a:t>
+              <a:t>ness</a:t>
             </a:r>
             <a:endParaRPr lang="en-US" sz="1400" dirty="0"/>
           </a:p>
@@ -26812,7 +26777,7 @@
         </p:nvSpPr>
         <p:spPr>
           <a:xfrm>
-            <a:off x="2427732" y="4169664"/>
+            <a:off x="2254649" y="4169664"/>
             <a:ext cx="685800" cy="475488"/>
           </a:xfrm>
           <a:prstGeom prst="rect">
@@ -26839,7 +26804,7 @@
         </p:nvSpPr>
         <p:spPr>
           <a:xfrm>
-            <a:off x="2427732" y="4169664"/>
+            <a:off x="2254649" y="4169664"/>
             <a:ext cx="685800" cy="475488"/>
           </a:xfrm>
           <a:prstGeom prst="rect">
@@ -26878,7 +26843,7 @@
         </p:nvSpPr>
         <p:spPr>
           <a:xfrm>
-            <a:off x="3639312" y="4169664"/>
+            <a:off x="3293146" y="4169664"/>
             <a:ext cx="685800" cy="475488"/>
           </a:xfrm>
           <a:prstGeom prst="rect">
@@ -26905,7 +26870,7 @@
         </p:nvSpPr>
         <p:spPr>
           <a:xfrm>
-            <a:off x="3639312" y="4169664"/>
+            <a:off x="3293146" y="4169664"/>
             <a:ext cx="685800" cy="475488"/>
           </a:xfrm>
           <a:prstGeom prst="rect">
@@ -26944,7 +26909,7 @@
         </p:nvSpPr>
         <p:spPr>
           <a:xfrm>
-            <a:off x="4850892" y="4169664"/>
+            <a:off x="4331643" y="4169664"/>
             <a:ext cx="685800" cy="475488"/>
           </a:xfrm>
           <a:prstGeom prst="rect">
@@ -26971,7 +26936,7 @@
         </p:nvSpPr>
         <p:spPr>
           <a:xfrm>
-            <a:off x="4850892" y="4169664"/>
+            <a:off x="4331643" y="4169664"/>
             <a:ext cx="685800" cy="475488"/>
           </a:xfrm>
           <a:prstGeom prst="rect">
@@ -27010,7 +26975,7 @@
         </p:nvSpPr>
         <p:spPr>
           <a:xfrm>
-            <a:off x="6062472" y="4169664"/>
+            <a:off x="5370141" y="4169664"/>
             <a:ext cx="685800" cy="475488"/>
           </a:xfrm>
           <a:prstGeom prst="rect">
@@ -27037,7 +27002,7 @@
         </p:nvSpPr>
         <p:spPr>
           <a:xfrm>
-            <a:off x="6062472" y="4169664"/>
+            <a:off x="5370141" y="4169664"/>
             <a:ext cx="685800" cy="475488"/>
           </a:xfrm>
           <a:prstGeom prst="rect">
@@ -27062,7 +27027,7 @@
                 <a:ea typeface="Trebuchet MS" pitchFamily="34" charset="-122"/>
                 <a:cs typeface="Trebuchet MS" pitchFamily="34" charset="-120"/>
               </a:rPr>
-              <a:t>l</a:t>
+              <a:t>n</a:t>
             </a:r>
             <a:endParaRPr lang="en-US" sz="900" dirty="0"/>
           </a:p>
@@ -27076,7 +27041,7 @@
         </p:nvSpPr>
         <p:spPr>
           <a:xfrm>
-            <a:off x="7274052" y="4169664"/>
+            <a:off x="6408638" y="4169664"/>
             <a:ext cx="685800" cy="475488"/>
           </a:xfrm>
           <a:prstGeom prst="rect">
@@ -27103,7 +27068,7 @@
         </p:nvSpPr>
         <p:spPr>
           <a:xfrm>
-            <a:off x="7274052" y="4169664"/>
+            <a:off x="6408638" y="4169664"/>
             <a:ext cx="685800" cy="475488"/>
           </a:xfrm>
           <a:prstGeom prst="rect">
@@ -27128,7 +27093,73 @@
                 <a:ea typeface="Trebuchet MS" pitchFamily="34" charset="-122"/>
                 <a:cs typeface="Trebuchet MS" pitchFamily="34" charset="-120"/>
               </a:rPr>
-              <a:t>y</a:t>
+              <a:t>e</a:t>
+            </a:r>
+            <a:endParaRPr lang="en-US" sz="900" dirty="0"/>
+          </a:p>
+        </p:txBody>
+      </p:sp>
+      <p:sp>
+        <p:nvSpPr>
+          <p:cNvPr id="43" name="Shape 41"/>
+          <p:cNvSpPr/>
+          <p:nvPr/>
+        </p:nvSpPr>
+        <p:spPr>
+          <a:xfrm>
+            <a:off x="7447135" y="4169664"/>
+            <a:ext cx="685800" cy="475488"/>
+          </a:xfrm>
+          <a:prstGeom prst="rect">
+            <a:avLst>
+              <a:gd name="adj" fmla="val 7692"/>
+            </a:avLst>
+          </a:prstGeom>
+          <a:solidFill>
+            <a:srgbClr val="FFFFFF"/>
+          </a:solidFill>
+          <a:ln w="12700">
+            <a:solidFill>
+              <a:srgbClr val="DB2777"/>
+            </a:solidFill>
+            <a:prstDash val="solid"/>
+          </a:ln>
+        </p:spPr>
+      </p:sp>
+      <p:sp>
+        <p:nvSpPr>
+          <p:cNvPr id="44" name="Text 42"/>
+          <p:cNvSpPr/>
+          <p:nvPr/>
+        </p:nvSpPr>
+        <p:spPr>
+          <a:xfrm>
+            <a:off x="7447135" y="4169664"/>
+            <a:ext cx="685800" cy="475488"/>
+          </a:xfrm>
+          <a:prstGeom prst="rect">
+            <a:avLst/>
+          </a:prstGeom>
+          <a:noFill/>
+          <a:ln/>
+        </p:spPr>
+        <p:txBody>
+          <a:bodyPr wrap="square" lIns="0" tIns="0" rIns="0" bIns="0" rtlCol="0" anchor="ctr"/>
+          <a:lstStyle/>
+          <a:p>
+            <a:pPr algn="ctr" indent="0" marL="0">
+              <a:buNone/>
+            </a:pPr>
+            <a:r>
+              <a:rPr lang="en-US" sz="900" b="1" dirty="0">
+                <a:solidFill>
+                  <a:srgbClr val="9D174D"/>
+                </a:solidFill>
+                <a:latin typeface="Trebuchet MS" pitchFamily="34" charset="0"/>
+                <a:ea typeface="Trebuchet MS" pitchFamily="34" charset="-122"/>
+                <a:cs typeface="Trebuchet MS" pitchFamily="34" charset="-120"/>
+              </a:rPr>
+              <a:t>ss</a:t>
             </a:r>
             <a:endParaRPr lang="en-US" sz="900" dirty="0"/>
           </a:p>
@@ -27420,7 +27451,7 @@
                 <a:ea typeface="Calibri" pitchFamily="34" charset="-122"/>
                 <a:cs typeface="Calibri" pitchFamily="34" charset="-120"/>
               </a:rPr>
-              <a:t>Word Labs  •  wordlabs.app  •  Root: 'dark' = absence of light</a:t>
+              <a:t>Word Labs  •  wordlabs.app  •  Root: 'dark' = with little or no light</a:t>
             </a:r>
             <a:endParaRPr lang="en-US" sz="800" dirty="0"/>
           </a:p>
@@ -27559,7 +27590,7 @@
                 <a:ea typeface="Trebuchet MS" pitchFamily="34" charset="-122"/>
                 <a:cs typeface="Trebuchet MS" pitchFamily="34" charset="-120"/>
               </a:rPr>
-              <a:t>darkish</a:t>
+              <a:t>darkening</a:t>
             </a:r>
             <a:endParaRPr lang="en-US" sz="2800" dirty="0"/>
           </a:p>
@@ -28247,7 +28278,7 @@
                 <a:ea typeface="Calibri" pitchFamily="34" charset="-122"/>
                 <a:cs typeface="Calibri" pitchFamily="34" charset="-120"/>
               </a:rPr>
-              <a:t>Word Labs  •  wordlabs.app  •  Root: 'dark' = absence of light</a:t>
+              <a:t>Word Labs  •  wordlabs.app  •  Root: 'dark' = with little or no light</a:t>
             </a:r>
             <a:endParaRPr lang="en-US" sz="800" dirty="0"/>
           </a:p>
@@ -28386,7 +28417,7 @@
                 <a:ea typeface="Trebuchet MS" pitchFamily="34" charset="-122"/>
                 <a:cs typeface="Trebuchet MS" pitchFamily="34" charset="-120"/>
               </a:rPr>
-              <a:t>darkish</a:t>
+              <a:t>darkening</a:t>
             </a:r>
             <a:endParaRPr lang="en-US" sz="2800" dirty="0"/>
           </a:p>
@@ -28466,7 +28497,7 @@
         </p:nvSpPr>
         <p:spPr>
           <a:xfrm>
-            <a:off x="2938272" y="2258568"/>
+            <a:off x="2221992" y="2258568"/>
             <a:ext cx="1828800" cy="292608"/>
           </a:xfrm>
           <a:prstGeom prst="rect">
@@ -28500,7 +28531,7 @@
         </p:nvSpPr>
         <p:spPr>
           <a:xfrm>
-            <a:off x="2938272" y="2258568"/>
+            <a:off x="2221992" y="2258568"/>
             <a:ext cx="1828800" cy="292608"/>
           </a:xfrm>
           <a:prstGeom prst="rect">
@@ -28539,7 +28570,7 @@
         </p:nvSpPr>
         <p:spPr>
           <a:xfrm>
-            <a:off x="2938272" y="2569464"/>
+            <a:off x="2221992" y="2569464"/>
             <a:ext cx="1828800" cy="201168"/>
           </a:xfrm>
           <a:prstGeom prst="rect">
@@ -28564,7 +28595,7 @@
                 <a:ea typeface="Calibri" pitchFamily="34" charset="-122"/>
                 <a:cs typeface="Calibri" pitchFamily="34" charset="-120"/>
               </a:rPr>
-              <a:t>absence of light</a:t>
+              <a:t>with little or no light</a:t>
             </a:r>
             <a:endParaRPr lang="en-US" sz="850" dirty="0"/>
           </a:p>
@@ -28578,7 +28609,7 @@
         </p:nvSpPr>
         <p:spPr>
           <a:xfrm>
-            <a:off x="5803392" y="2258568"/>
+            <a:off x="4370832" y="2258568"/>
             <a:ext cx="1828800" cy="292608"/>
           </a:xfrm>
           <a:prstGeom prst="rect">
@@ -28612,7 +28643,7 @@
         </p:nvSpPr>
         <p:spPr>
           <a:xfrm>
-            <a:off x="5803392" y="2258568"/>
+            <a:off x="4370832" y="2258568"/>
             <a:ext cx="1828800" cy="292608"/>
           </a:xfrm>
           <a:prstGeom prst="rect">
@@ -28637,7 +28668,7 @@
                 <a:ea typeface="Trebuchet MS" pitchFamily="34" charset="-122"/>
                 <a:cs typeface="Trebuchet MS" pitchFamily="34" charset="-120"/>
               </a:rPr>
-              <a:t>ish</a:t>
+              <a:t>en</a:t>
             </a:r>
             <a:endParaRPr lang="en-US" sz="1300" dirty="0"/>
           </a:p>
@@ -28651,7 +28682,7 @@
         </p:nvSpPr>
         <p:spPr>
           <a:xfrm>
-            <a:off x="5803392" y="2569464"/>
+            <a:off x="4370832" y="2569464"/>
             <a:ext cx="1828800" cy="201168"/>
           </a:xfrm>
           <a:prstGeom prst="rect">
@@ -28676,7 +28707,7 @@
                 <a:ea typeface="Calibri" pitchFamily="34" charset="-122"/>
                 <a:cs typeface="Calibri" pitchFamily="34" charset="-120"/>
               </a:rPr>
-              <a:t>somewhat or slightly</a:t>
+              <a:t>made of; to make</a:t>
             </a:r>
             <a:endParaRPr lang="en-US" sz="850" dirty="0"/>
           </a:p>
@@ -28685,6 +28716,118 @@
       <p:sp>
         <p:nvSpPr>
           <p:cNvPr id="22" name="Shape 20"/>
+          <p:cNvSpPr/>
+          <p:nvPr/>
+        </p:nvSpPr>
+        <p:spPr>
+          <a:xfrm>
+            <a:off x="6519672" y="2258568"/>
+            <a:ext cx="1828800" cy="292608"/>
+          </a:xfrm>
+          <a:prstGeom prst="rect">
+            <a:avLst>
+              <a:gd name="adj" fmla="val 25000"/>
+            </a:avLst>
+          </a:prstGeom>
+          <a:solidFill>
+            <a:srgbClr val="FCE7F3"/>
+          </a:solidFill>
+          <a:ln w="19050">
+            <a:solidFill>
+              <a:srgbClr val="DB2777"/>
+            </a:solidFill>
+            <a:prstDash val="solid"/>
+          </a:ln>
+          <a:effectLst>
+            <a:outerShdw sx="100000" sy="100000" kx="0" ky="0" algn="bl" rotWithShape="0" blurRad="101600" dist="38100" dir="8100000">
+              <a:srgbClr val="000000">
+                <a:alpha val="12000"/>
+              </a:srgbClr>
+            </a:outerShdw>
+          </a:effectLst>
+        </p:spPr>
+      </p:sp>
+      <p:sp>
+        <p:nvSpPr>
+          <p:cNvPr id="23" name="Text 21"/>
+          <p:cNvSpPr/>
+          <p:nvPr/>
+        </p:nvSpPr>
+        <p:spPr>
+          <a:xfrm>
+            <a:off x="6519672" y="2258568"/>
+            <a:ext cx="1828800" cy="292608"/>
+          </a:xfrm>
+          <a:prstGeom prst="rect">
+            <a:avLst/>
+          </a:prstGeom>
+          <a:noFill/>
+          <a:ln/>
+        </p:spPr>
+        <p:txBody>
+          <a:bodyPr wrap="square" lIns="0" tIns="0" rIns="0" bIns="0" rtlCol="0" anchor="ctr"/>
+          <a:lstStyle/>
+          <a:p>
+            <a:pPr algn="ctr" indent="0" marL="0">
+              <a:buNone/>
+            </a:pPr>
+            <a:r>
+              <a:rPr lang="en-US" sz="1300" b="1" dirty="0">
+                <a:solidFill>
+                  <a:srgbClr val="9D174D"/>
+                </a:solidFill>
+                <a:latin typeface="Trebuchet MS" pitchFamily="34" charset="0"/>
+                <a:ea typeface="Trebuchet MS" pitchFamily="34" charset="-122"/>
+                <a:cs typeface="Trebuchet MS" pitchFamily="34" charset="-120"/>
+              </a:rPr>
+              <a:t>ing</a:t>
+            </a:r>
+            <a:endParaRPr lang="en-US" sz="1300" dirty="0"/>
+          </a:p>
+        </p:txBody>
+      </p:sp>
+      <p:sp>
+        <p:nvSpPr>
+          <p:cNvPr id="24" name="Text 22"/>
+          <p:cNvSpPr/>
+          <p:nvPr/>
+        </p:nvSpPr>
+        <p:spPr>
+          <a:xfrm>
+            <a:off x="6519672" y="2569464"/>
+            <a:ext cx="1828800" cy="201168"/>
+          </a:xfrm>
+          <a:prstGeom prst="rect">
+            <a:avLst/>
+          </a:prstGeom>
+          <a:noFill/>
+          <a:ln/>
+        </p:spPr>
+        <p:txBody>
+          <a:bodyPr wrap="square" lIns="0" tIns="0" rIns="0" bIns="0" rtlCol="0" anchor="t"/>
+          <a:lstStyle/>
+          <a:p>
+            <a:pPr algn="ctr" indent="0" marL="0">
+              <a:buNone/>
+            </a:pPr>
+            <a:r>
+              <a:rPr lang="en-US" sz="850" dirty="0">
+                <a:solidFill>
+                  <a:srgbClr val="475569"/>
+                </a:solidFill>
+                <a:latin typeface="Calibri" pitchFamily="34" charset="0"/>
+                <a:ea typeface="Calibri" pitchFamily="34" charset="-122"/>
+                <a:cs typeface="Calibri" pitchFamily="34" charset="-120"/>
+              </a:rPr>
+              <a:t>happening now</a:t>
+            </a:r>
+            <a:endParaRPr lang="en-US" sz="850" dirty="0"/>
+          </a:p>
+        </p:txBody>
+      </p:sp>
+      <p:sp>
+        <p:nvSpPr>
+          <p:cNvPr id="25" name="Shape 23"/>
           <p:cNvSpPr/>
           <p:nvPr/>
         </p:nvSpPr>
@@ -28711,7 +28854,7 @@
       </p:sp>
       <p:sp>
         <p:nvSpPr>
-          <p:cNvPr id="23" name="Text 21"/>
+          <p:cNvPr id="26" name="Text 24"/>
           <p:cNvSpPr/>
           <p:nvPr/>
         </p:nvSpPr>
@@ -28750,7 +28893,7 @@
       </p:sp>
       <p:sp>
         <p:nvSpPr>
-          <p:cNvPr id="24" name="Shape 22"/>
+          <p:cNvPr id="27" name="Shape 25"/>
           <p:cNvSpPr/>
           <p:nvPr/>
         </p:nvSpPr>
@@ -28777,7 +28920,7 @@
       </p:sp>
       <p:sp>
         <p:nvSpPr>
-          <p:cNvPr id="25" name="Text 23"/>
+          <p:cNvPr id="28" name="Text 26"/>
           <p:cNvSpPr/>
           <p:nvPr/>
         </p:nvSpPr>
@@ -28816,7 +28959,7 @@
       </p:sp>
       <p:sp>
         <p:nvSpPr>
-          <p:cNvPr id="26" name="Shape 24"/>
+          <p:cNvPr id="29" name="Shape 27"/>
           <p:cNvSpPr/>
           <p:nvPr/>
         </p:nvSpPr>
@@ -28843,7 +28986,7 @@
       </p:sp>
       <p:sp>
         <p:nvSpPr>
-          <p:cNvPr id="27" name="Text 25"/>
+          <p:cNvPr id="30" name="Text 28"/>
           <p:cNvSpPr/>
           <p:nvPr/>
         </p:nvSpPr>
@@ -28882,7 +29025,7 @@
       </p:sp>
       <p:sp>
         <p:nvSpPr>
-          <p:cNvPr id="28" name="Shape 26"/>
+          <p:cNvPr id="31" name="Shape 29"/>
           <p:cNvSpPr/>
           <p:nvPr/>
         </p:nvSpPr>
@@ -28909,7 +29052,7 @@
       </p:sp>
       <p:sp>
         <p:nvSpPr>
-          <p:cNvPr id="29" name="Text 27"/>
+          <p:cNvPr id="32" name="Text 30"/>
           <p:cNvSpPr/>
           <p:nvPr/>
         </p:nvSpPr>
@@ -29232,7 +29375,7 @@
                 <a:ea typeface="Calibri" pitchFamily="34" charset="-122"/>
                 <a:cs typeface="Calibri" pitchFamily="34" charset="-120"/>
               </a:rPr>
-              <a:t>Word Labs  •  wordlabs.app  •  Root: 'dark' = absence of light</a:t>
+              <a:t>Word Labs  •  wordlabs.app  •  Root: 'dark' = with little or no light</a:t>
             </a:r>
             <a:endParaRPr lang="en-US" sz="800" dirty="0"/>
           </a:p>
@@ -29371,7 +29514,7 @@
                 <a:ea typeface="Trebuchet MS" pitchFamily="34" charset="-122"/>
                 <a:cs typeface="Trebuchet MS" pitchFamily="34" charset="-120"/>
               </a:rPr>
-              <a:t>darkish</a:t>
+              <a:t>darkening</a:t>
             </a:r>
             <a:endParaRPr lang="en-US" sz="2800" dirty="0"/>
           </a:p>
@@ -29451,7 +29594,7 @@
         </p:nvSpPr>
         <p:spPr>
           <a:xfrm>
-            <a:off x="2938272" y="2258568"/>
+            <a:off x="2221992" y="2258568"/>
             <a:ext cx="1828800" cy="292608"/>
           </a:xfrm>
           <a:prstGeom prst="rect">
@@ -29485,7 +29628,7 @@
         </p:nvSpPr>
         <p:spPr>
           <a:xfrm>
-            <a:off x="2938272" y="2258568"/>
+            <a:off x="2221992" y="2258568"/>
             <a:ext cx="1828800" cy="292608"/>
           </a:xfrm>
           <a:prstGeom prst="rect">
@@ -29524,7 +29667,7 @@
         </p:nvSpPr>
         <p:spPr>
           <a:xfrm>
-            <a:off x="2938272" y="2569464"/>
+            <a:off x="2221992" y="2569464"/>
             <a:ext cx="1828800" cy="201168"/>
           </a:xfrm>
           <a:prstGeom prst="rect">
@@ -29549,7 +29692,7 @@
                 <a:ea typeface="Calibri" pitchFamily="34" charset="-122"/>
                 <a:cs typeface="Calibri" pitchFamily="34" charset="-120"/>
               </a:rPr>
-              <a:t>absence of light</a:t>
+              <a:t>with little or no light</a:t>
             </a:r>
             <a:endParaRPr lang="en-US" sz="850" dirty="0"/>
           </a:p>
@@ -29563,7 +29706,7 @@
         </p:nvSpPr>
         <p:spPr>
           <a:xfrm>
-            <a:off x="5803392" y="2258568"/>
+            <a:off x="4370832" y="2258568"/>
             <a:ext cx="1828800" cy="292608"/>
           </a:xfrm>
           <a:prstGeom prst="rect">
@@ -29597,7 +29740,7 @@
         </p:nvSpPr>
         <p:spPr>
           <a:xfrm>
-            <a:off x="5803392" y="2258568"/>
+            <a:off x="4370832" y="2258568"/>
             <a:ext cx="1828800" cy="292608"/>
           </a:xfrm>
           <a:prstGeom prst="rect">
@@ -29622,7 +29765,7 @@
                 <a:ea typeface="Trebuchet MS" pitchFamily="34" charset="-122"/>
                 <a:cs typeface="Trebuchet MS" pitchFamily="34" charset="-120"/>
               </a:rPr>
-              <a:t>ish</a:t>
+              <a:t>en</a:t>
             </a:r>
             <a:endParaRPr lang="en-US" sz="1300" dirty="0"/>
           </a:p>
@@ -29636,7 +29779,7 @@
         </p:nvSpPr>
         <p:spPr>
           <a:xfrm>
-            <a:off x="5803392" y="2569464"/>
+            <a:off x="4370832" y="2569464"/>
             <a:ext cx="1828800" cy="201168"/>
           </a:xfrm>
           <a:prstGeom prst="rect">
@@ -29661,7 +29804,7 @@
                 <a:ea typeface="Calibri" pitchFamily="34" charset="-122"/>
                 <a:cs typeface="Calibri" pitchFamily="34" charset="-120"/>
               </a:rPr>
-              <a:t>somewhat or slightly</a:t>
+              <a:t>made of; to make</a:t>
             </a:r>
             <a:endParaRPr lang="en-US" sz="850" dirty="0"/>
           </a:p>
@@ -29670,6 +29813,118 @@
       <p:sp>
         <p:nvSpPr>
           <p:cNvPr id="22" name="Shape 20"/>
+          <p:cNvSpPr/>
+          <p:nvPr/>
+        </p:nvSpPr>
+        <p:spPr>
+          <a:xfrm>
+            <a:off x="6519672" y="2258568"/>
+            <a:ext cx="1828800" cy="292608"/>
+          </a:xfrm>
+          <a:prstGeom prst="rect">
+            <a:avLst>
+              <a:gd name="adj" fmla="val 25000"/>
+            </a:avLst>
+          </a:prstGeom>
+          <a:solidFill>
+            <a:srgbClr val="FCE7F3"/>
+          </a:solidFill>
+          <a:ln w="19050">
+            <a:solidFill>
+              <a:srgbClr val="DB2777"/>
+            </a:solidFill>
+            <a:prstDash val="solid"/>
+          </a:ln>
+          <a:effectLst>
+            <a:outerShdw sx="100000" sy="100000" kx="0" ky="0" algn="bl" rotWithShape="0" blurRad="101600" dist="38100" dir="8100000">
+              <a:srgbClr val="000000">
+                <a:alpha val="12000"/>
+              </a:srgbClr>
+            </a:outerShdw>
+          </a:effectLst>
+        </p:spPr>
+      </p:sp>
+      <p:sp>
+        <p:nvSpPr>
+          <p:cNvPr id="23" name="Text 21"/>
+          <p:cNvSpPr/>
+          <p:nvPr/>
+        </p:nvSpPr>
+        <p:spPr>
+          <a:xfrm>
+            <a:off x="6519672" y="2258568"/>
+            <a:ext cx="1828800" cy="292608"/>
+          </a:xfrm>
+          <a:prstGeom prst="rect">
+            <a:avLst/>
+          </a:prstGeom>
+          <a:noFill/>
+          <a:ln/>
+        </p:spPr>
+        <p:txBody>
+          <a:bodyPr wrap="square" lIns="0" tIns="0" rIns="0" bIns="0" rtlCol="0" anchor="ctr"/>
+          <a:lstStyle/>
+          <a:p>
+            <a:pPr algn="ctr" indent="0" marL="0">
+              <a:buNone/>
+            </a:pPr>
+            <a:r>
+              <a:rPr lang="en-US" sz="1300" b="1" dirty="0">
+                <a:solidFill>
+                  <a:srgbClr val="9D174D"/>
+                </a:solidFill>
+                <a:latin typeface="Trebuchet MS" pitchFamily="34" charset="0"/>
+                <a:ea typeface="Trebuchet MS" pitchFamily="34" charset="-122"/>
+                <a:cs typeface="Trebuchet MS" pitchFamily="34" charset="-120"/>
+              </a:rPr>
+              <a:t>ing</a:t>
+            </a:r>
+            <a:endParaRPr lang="en-US" sz="1300" dirty="0"/>
+          </a:p>
+        </p:txBody>
+      </p:sp>
+      <p:sp>
+        <p:nvSpPr>
+          <p:cNvPr id="24" name="Text 22"/>
+          <p:cNvSpPr/>
+          <p:nvPr/>
+        </p:nvSpPr>
+        <p:spPr>
+          <a:xfrm>
+            <a:off x="6519672" y="2569464"/>
+            <a:ext cx="1828800" cy="201168"/>
+          </a:xfrm>
+          <a:prstGeom prst="rect">
+            <a:avLst/>
+          </a:prstGeom>
+          <a:noFill/>
+          <a:ln/>
+        </p:spPr>
+        <p:txBody>
+          <a:bodyPr wrap="square" lIns="0" tIns="0" rIns="0" bIns="0" rtlCol="0" anchor="t"/>
+          <a:lstStyle/>
+          <a:p>
+            <a:pPr algn="ctr" indent="0" marL="0">
+              <a:buNone/>
+            </a:pPr>
+            <a:r>
+              <a:rPr lang="en-US" sz="850" dirty="0">
+                <a:solidFill>
+                  <a:srgbClr val="475569"/>
+                </a:solidFill>
+                <a:latin typeface="Calibri" pitchFamily="34" charset="0"/>
+                <a:ea typeface="Calibri" pitchFamily="34" charset="-122"/>
+                <a:cs typeface="Calibri" pitchFamily="34" charset="-120"/>
+              </a:rPr>
+              <a:t>happening now</a:t>
+            </a:r>
+            <a:endParaRPr lang="en-US" sz="850" dirty="0"/>
+          </a:p>
+        </p:txBody>
+      </p:sp>
+      <p:sp>
+        <p:nvSpPr>
+          <p:cNvPr id="25" name="Shape 23"/>
           <p:cNvSpPr/>
           <p:nvPr/>
         </p:nvSpPr>
@@ -29696,7 +29951,7 @@
       </p:sp>
       <p:sp>
         <p:nvSpPr>
-          <p:cNvPr id="23" name="Text 21"/>
+          <p:cNvPr id="26" name="Text 24"/>
           <p:cNvSpPr/>
           <p:nvPr/>
         </p:nvSpPr>
@@ -29735,7 +29990,7 @@
       </p:sp>
       <p:sp>
         <p:nvSpPr>
-          <p:cNvPr id="24" name="Shape 22"/>
+          <p:cNvPr id="27" name="Shape 25"/>
           <p:cNvSpPr/>
           <p:nvPr/>
         </p:nvSpPr>
@@ -29762,13 +30017,13 @@
       </p:sp>
       <p:sp>
         <p:nvSpPr>
-          <p:cNvPr id="25" name="Shape 23"/>
-          <p:cNvSpPr/>
-          <p:nvPr/>
-        </p:nvSpPr>
-        <p:spPr>
-          <a:xfrm>
-            <a:off x="2999232" y="3364992"/>
+          <p:cNvPr id="28" name="Shape 26"/>
+          <p:cNvSpPr/>
+          <p:nvPr/>
+        </p:nvSpPr>
+        <p:spPr>
+          <a:xfrm>
+            <a:off x="2313432" y="3364992"/>
             <a:ext cx="1645920" cy="475488"/>
           </a:xfrm>
           <a:prstGeom prst="rect">
@@ -29789,13 +30044,13 @@
       </p:sp>
       <p:sp>
         <p:nvSpPr>
-          <p:cNvPr id="26" name="Text 24"/>
-          <p:cNvSpPr/>
-          <p:nvPr/>
-        </p:nvSpPr>
-        <p:spPr>
-          <a:xfrm>
-            <a:off x="2999232" y="3364992"/>
+          <p:cNvPr id="29" name="Text 27"/>
+          <p:cNvSpPr/>
+          <p:nvPr/>
+        </p:nvSpPr>
+        <p:spPr>
+          <a:xfrm>
+            <a:off x="2313432" y="3364992"/>
             <a:ext cx="1645920" cy="475488"/>
           </a:xfrm>
           <a:prstGeom prst="rect">
@@ -29828,14 +30083,14 @@
       </p:sp>
       <p:sp>
         <p:nvSpPr>
-          <p:cNvPr id="27" name="Text 25"/>
-          <p:cNvSpPr/>
-          <p:nvPr/>
-        </p:nvSpPr>
-        <p:spPr>
-          <a:xfrm>
-            <a:off x="4645152" y="3364992"/>
-            <a:ext cx="1097280" cy="475488"/>
+          <p:cNvPr id="30" name="Text 28"/>
+          <p:cNvSpPr/>
+          <p:nvPr/>
+        </p:nvSpPr>
+        <p:spPr>
+          <a:xfrm>
+            <a:off x="3959352" y="3364992"/>
+            <a:ext cx="411480" cy="475488"/>
           </a:xfrm>
           <a:prstGeom prst="rect">
             <a:avLst/>
@@ -29867,13 +30122,13 @@
       </p:sp>
       <p:sp>
         <p:nvSpPr>
-          <p:cNvPr id="28" name="Shape 26"/>
-          <p:cNvSpPr/>
-          <p:nvPr/>
-        </p:nvSpPr>
-        <p:spPr>
-          <a:xfrm>
-            <a:off x="5742432" y="3364992"/>
+          <p:cNvPr id="31" name="Shape 29"/>
+          <p:cNvSpPr/>
+          <p:nvPr/>
+        </p:nvSpPr>
+        <p:spPr>
+          <a:xfrm>
+            <a:off x="4370832" y="3364992"/>
             <a:ext cx="1645920" cy="475488"/>
           </a:xfrm>
           <a:prstGeom prst="rect">
@@ -29894,13 +30149,13 @@
       </p:sp>
       <p:sp>
         <p:nvSpPr>
-          <p:cNvPr id="29" name="Text 27"/>
-          <p:cNvSpPr/>
-          <p:nvPr/>
-        </p:nvSpPr>
-        <p:spPr>
-          <a:xfrm>
-            <a:off x="5742432" y="3364992"/>
+          <p:cNvPr id="32" name="Text 30"/>
+          <p:cNvSpPr/>
+          <p:nvPr/>
+        </p:nvSpPr>
+        <p:spPr>
+          <a:xfrm>
+            <a:off x="4370832" y="3364992"/>
             <a:ext cx="1645920" cy="475488"/>
           </a:xfrm>
           <a:prstGeom prst="rect">
@@ -29925,7 +30180,7 @@
                 <a:ea typeface="Trebuchet MS" pitchFamily="34" charset="-122"/>
                 <a:cs typeface="Trebuchet MS" pitchFamily="34" charset="-120"/>
               </a:rPr>
-              <a:t>ish</a:t>
+              <a:t>en</a:t>
             </a:r>
             <a:endParaRPr lang="en-US" sz="1400" dirty="0"/>
           </a:p>
@@ -29933,7 +30188,112 @@
       </p:sp>
       <p:sp>
         <p:nvSpPr>
-          <p:cNvPr id="30" name="Shape 28"/>
+          <p:cNvPr id="33" name="Text 31"/>
+          <p:cNvSpPr/>
+          <p:nvPr/>
+        </p:nvSpPr>
+        <p:spPr>
+          <a:xfrm>
+            <a:off x="6016752" y="3364992"/>
+            <a:ext cx="411480" cy="475488"/>
+          </a:xfrm>
+          <a:prstGeom prst="rect">
+            <a:avLst/>
+          </a:prstGeom>
+          <a:noFill/>
+          <a:ln/>
+        </p:spPr>
+        <p:txBody>
+          <a:bodyPr wrap="square" lIns="0" tIns="0" rIns="0" bIns="0" rtlCol="0" anchor="ctr"/>
+          <a:lstStyle/>
+          <a:p>
+            <a:pPr algn="ctr" indent="0" marL="0">
+              <a:buNone/>
+            </a:pPr>
+            <a:r>
+              <a:rPr lang="en-US" sz="1600" b="1" dirty="0">
+                <a:solidFill>
+                  <a:srgbClr val="0D9488"/>
+                </a:solidFill>
+                <a:latin typeface="Trebuchet MS" pitchFamily="34" charset="0"/>
+                <a:ea typeface="Trebuchet MS" pitchFamily="34" charset="-122"/>
+                <a:cs typeface="Trebuchet MS" pitchFamily="34" charset="-120"/>
+              </a:rPr>
+              <a:t>·</a:t>
+            </a:r>
+            <a:endParaRPr lang="en-US" sz="1600" dirty="0"/>
+          </a:p>
+        </p:txBody>
+      </p:sp>
+      <p:sp>
+        <p:nvSpPr>
+          <p:cNvPr id="34" name="Shape 32"/>
+          <p:cNvSpPr/>
+          <p:nvPr/>
+        </p:nvSpPr>
+        <p:spPr>
+          <a:xfrm>
+            <a:off x="6428232" y="3364992"/>
+            <a:ext cx="1645920" cy="475488"/>
+          </a:xfrm>
+          <a:prstGeom prst="rect">
+            <a:avLst>
+              <a:gd name="adj" fmla="val 9615"/>
+            </a:avLst>
+          </a:prstGeom>
+          <a:solidFill>
+            <a:srgbClr val="FFFFFF"/>
+          </a:solidFill>
+          <a:ln w="12700">
+            <a:solidFill>
+              <a:srgbClr val="0D9488"/>
+            </a:solidFill>
+            <a:prstDash val="solid"/>
+          </a:ln>
+        </p:spPr>
+      </p:sp>
+      <p:sp>
+        <p:nvSpPr>
+          <p:cNvPr id="35" name="Text 33"/>
+          <p:cNvSpPr/>
+          <p:nvPr/>
+        </p:nvSpPr>
+        <p:spPr>
+          <a:xfrm>
+            <a:off x="6428232" y="3364992"/>
+            <a:ext cx="1645920" cy="475488"/>
+          </a:xfrm>
+          <a:prstGeom prst="rect">
+            <a:avLst/>
+          </a:prstGeom>
+          <a:noFill/>
+          <a:ln/>
+        </p:spPr>
+        <p:txBody>
+          <a:bodyPr wrap="square" lIns="0" tIns="0" rIns="0" bIns="0" rtlCol="0" anchor="ctr"/>
+          <a:lstStyle/>
+          <a:p>
+            <a:pPr algn="ctr" indent="0" marL="0">
+              <a:buNone/>
+            </a:pPr>
+            <a:r>
+              <a:rPr lang="en-US" sz="1400" b="1" dirty="0">
+                <a:solidFill>
+                  <a:srgbClr val="0D9488"/>
+                </a:solidFill>
+                <a:latin typeface="Trebuchet MS" pitchFamily="34" charset="0"/>
+                <a:ea typeface="Trebuchet MS" pitchFamily="34" charset="-122"/>
+                <a:cs typeface="Trebuchet MS" pitchFamily="34" charset="-120"/>
+              </a:rPr>
+              <a:t>ing</a:t>
+            </a:r>
+            <a:endParaRPr lang="en-US" sz="1400" dirty="0"/>
+          </a:p>
+        </p:txBody>
+      </p:sp>
+      <p:sp>
+        <p:nvSpPr>
+          <p:cNvPr id="36" name="Shape 34"/>
           <p:cNvSpPr/>
           <p:nvPr/>
         </p:nvSpPr>
@@ -29960,7 +30320,7 @@
       </p:sp>
       <p:sp>
         <p:nvSpPr>
-          <p:cNvPr id="31" name="Text 29"/>
+          <p:cNvPr id="37" name="Text 35"/>
           <p:cNvSpPr/>
           <p:nvPr/>
         </p:nvSpPr>
@@ -29999,7 +30359,7 @@
       </p:sp>
       <p:sp>
         <p:nvSpPr>
-          <p:cNvPr id="32" name="Shape 30"/>
+          <p:cNvPr id="38" name="Shape 36"/>
           <p:cNvSpPr/>
           <p:nvPr/>
         </p:nvSpPr>
@@ -30026,7 +30386,7 @@
       </p:sp>
       <p:sp>
         <p:nvSpPr>
-          <p:cNvPr id="33" name="Text 31"/>
+          <p:cNvPr id="39" name="Text 37"/>
           <p:cNvSpPr/>
           <p:nvPr/>
         </p:nvSpPr>
@@ -30349,7 +30709,7 @@
                 <a:ea typeface="Calibri" pitchFamily="34" charset="-122"/>
                 <a:cs typeface="Calibri" pitchFamily="34" charset="-120"/>
               </a:rPr>
-              <a:t>Word Labs  •  wordlabs.app  •  Root: 'dark' = absence of light</a:t>
+              <a:t>Word Labs  •  wordlabs.app  •  Root: 'dark' = with little or no light</a:t>
             </a:r>
             <a:endParaRPr lang="en-US" sz="800" dirty="0"/>
           </a:p>
@@ -30488,7 +30848,7 @@
                 <a:ea typeface="Trebuchet MS" pitchFamily="34" charset="-122"/>
                 <a:cs typeface="Trebuchet MS" pitchFamily="34" charset="-120"/>
               </a:rPr>
-              <a:t>darkish</a:t>
+              <a:t>darkening</a:t>
             </a:r>
             <a:endParaRPr lang="en-US" sz="2800" dirty="0"/>
           </a:p>
@@ -30568,7 +30928,7 @@
         </p:nvSpPr>
         <p:spPr>
           <a:xfrm>
-            <a:off x="2938272" y="2258568"/>
+            <a:off x="2221992" y="2258568"/>
             <a:ext cx="1828800" cy="292608"/>
           </a:xfrm>
           <a:prstGeom prst="rect">
@@ -30602,7 +30962,7 @@
         </p:nvSpPr>
         <p:spPr>
           <a:xfrm>
-            <a:off x="2938272" y="2258568"/>
+            <a:off x="2221992" y="2258568"/>
             <a:ext cx="1828800" cy="292608"/>
           </a:xfrm>
           <a:prstGeom prst="rect">
@@ -30641,7 +31001,7 @@
         </p:nvSpPr>
         <p:spPr>
           <a:xfrm>
-            <a:off x="2938272" y="2569464"/>
+            <a:off x="2221992" y="2569464"/>
             <a:ext cx="1828800" cy="201168"/>
           </a:xfrm>
           <a:prstGeom prst="rect">
@@ -30666,7 +31026,7 @@
                 <a:ea typeface="Calibri" pitchFamily="34" charset="-122"/>
                 <a:cs typeface="Calibri" pitchFamily="34" charset="-120"/>
               </a:rPr>
-              <a:t>absence of light</a:t>
+              <a:t>with little or no light</a:t>
             </a:r>
             <a:endParaRPr lang="en-US" sz="850" dirty="0"/>
           </a:p>
@@ -30680,7 +31040,7 @@
         </p:nvSpPr>
         <p:spPr>
           <a:xfrm>
-            <a:off x="5803392" y="2258568"/>
+            <a:off x="4370832" y="2258568"/>
             <a:ext cx="1828800" cy="292608"/>
           </a:xfrm>
           <a:prstGeom prst="rect">
@@ -30714,7 +31074,7 @@
         </p:nvSpPr>
         <p:spPr>
           <a:xfrm>
-            <a:off x="5803392" y="2258568"/>
+            <a:off x="4370832" y="2258568"/>
             <a:ext cx="1828800" cy="292608"/>
           </a:xfrm>
           <a:prstGeom prst="rect">
@@ -30739,7 +31099,7 @@
                 <a:ea typeface="Trebuchet MS" pitchFamily="34" charset="-122"/>
                 <a:cs typeface="Trebuchet MS" pitchFamily="34" charset="-120"/>
               </a:rPr>
-              <a:t>ish</a:t>
+              <a:t>en</a:t>
             </a:r>
             <a:endParaRPr lang="en-US" sz="1300" dirty="0"/>
           </a:p>
@@ -30753,7 +31113,7 @@
         </p:nvSpPr>
         <p:spPr>
           <a:xfrm>
-            <a:off x="5803392" y="2569464"/>
+            <a:off x="4370832" y="2569464"/>
             <a:ext cx="1828800" cy="201168"/>
           </a:xfrm>
           <a:prstGeom prst="rect">
@@ -30778,7 +31138,7 @@
                 <a:ea typeface="Calibri" pitchFamily="34" charset="-122"/>
                 <a:cs typeface="Calibri" pitchFamily="34" charset="-120"/>
               </a:rPr>
-              <a:t>somewhat or slightly</a:t>
+              <a:t>made of; to make</a:t>
             </a:r>
             <a:endParaRPr lang="en-US" sz="850" dirty="0"/>
           </a:p>
@@ -30787,6 +31147,118 @@
       <p:sp>
         <p:nvSpPr>
           <p:cNvPr id="22" name="Shape 20"/>
+          <p:cNvSpPr/>
+          <p:nvPr/>
+        </p:nvSpPr>
+        <p:spPr>
+          <a:xfrm>
+            <a:off x="6519672" y="2258568"/>
+            <a:ext cx="1828800" cy="292608"/>
+          </a:xfrm>
+          <a:prstGeom prst="rect">
+            <a:avLst>
+              <a:gd name="adj" fmla="val 25000"/>
+            </a:avLst>
+          </a:prstGeom>
+          <a:solidFill>
+            <a:srgbClr val="FCE7F3"/>
+          </a:solidFill>
+          <a:ln w="19050">
+            <a:solidFill>
+              <a:srgbClr val="DB2777"/>
+            </a:solidFill>
+            <a:prstDash val="solid"/>
+          </a:ln>
+          <a:effectLst>
+            <a:outerShdw sx="100000" sy="100000" kx="0" ky="0" algn="bl" rotWithShape="0" blurRad="101600" dist="38100" dir="8100000">
+              <a:srgbClr val="000000">
+                <a:alpha val="12000"/>
+              </a:srgbClr>
+            </a:outerShdw>
+          </a:effectLst>
+        </p:spPr>
+      </p:sp>
+      <p:sp>
+        <p:nvSpPr>
+          <p:cNvPr id="23" name="Text 21"/>
+          <p:cNvSpPr/>
+          <p:nvPr/>
+        </p:nvSpPr>
+        <p:spPr>
+          <a:xfrm>
+            <a:off x="6519672" y="2258568"/>
+            <a:ext cx="1828800" cy="292608"/>
+          </a:xfrm>
+          <a:prstGeom prst="rect">
+            <a:avLst/>
+          </a:prstGeom>
+          <a:noFill/>
+          <a:ln/>
+        </p:spPr>
+        <p:txBody>
+          <a:bodyPr wrap="square" lIns="0" tIns="0" rIns="0" bIns="0" rtlCol="0" anchor="ctr"/>
+          <a:lstStyle/>
+          <a:p>
+            <a:pPr algn="ctr" indent="0" marL="0">
+              <a:buNone/>
+            </a:pPr>
+            <a:r>
+              <a:rPr lang="en-US" sz="1300" b="1" dirty="0">
+                <a:solidFill>
+                  <a:srgbClr val="9D174D"/>
+                </a:solidFill>
+                <a:latin typeface="Trebuchet MS" pitchFamily="34" charset="0"/>
+                <a:ea typeface="Trebuchet MS" pitchFamily="34" charset="-122"/>
+                <a:cs typeface="Trebuchet MS" pitchFamily="34" charset="-120"/>
+              </a:rPr>
+              <a:t>ing</a:t>
+            </a:r>
+            <a:endParaRPr lang="en-US" sz="1300" dirty="0"/>
+          </a:p>
+        </p:txBody>
+      </p:sp>
+      <p:sp>
+        <p:nvSpPr>
+          <p:cNvPr id="24" name="Text 22"/>
+          <p:cNvSpPr/>
+          <p:nvPr/>
+        </p:nvSpPr>
+        <p:spPr>
+          <a:xfrm>
+            <a:off x="6519672" y="2569464"/>
+            <a:ext cx="1828800" cy="201168"/>
+          </a:xfrm>
+          <a:prstGeom prst="rect">
+            <a:avLst/>
+          </a:prstGeom>
+          <a:noFill/>
+          <a:ln/>
+        </p:spPr>
+        <p:txBody>
+          <a:bodyPr wrap="square" lIns="0" tIns="0" rIns="0" bIns="0" rtlCol="0" anchor="t"/>
+          <a:lstStyle/>
+          <a:p>
+            <a:pPr algn="ctr" indent="0" marL="0">
+              <a:buNone/>
+            </a:pPr>
+            <a:r>
+              <a:rPr lang="en-US" sz="850" dirty="0">
+                <a:solidFill>
+                  <a:srgbClr val="475569"/>
+                </a:solidFill>
+                <a:latin typeface="Calibri" pitchFamily="34" charset="0"/>
+                <a:ea typeface="Calibri" pitchFamily="34" charset="-122"/>
+                <a:cs typeface="Calibri" pitchFamily="34" charset="-120"/>
+              </a:rPr>
+              <a:t>happening now</a:t>
+            </a:r>
+            <a:endParaRPr lang="en-US" sz="850" dirty="0"/>
+          </a:p>
+        </p:txBody>
+      </p:sp>
+      <p:sp>
+        <p:nvSpPr>
+          <p:cNvPr id="25" name="Shape 23"/>
           <p:cNvSpPr/>
           <p:nvPr/>
         </p:nvSpPr>
@@ -30813,7 +31285,7 @@
       </p:sp>
       <p:sp>
         <p:nvSpPr>
-          <p:cNvPr id="23" name="Text 21"/>
+          <p:cNvPr id="26" name="Text 24"/>
           <p:cNvSpPr/>
           <p:nvPr/>
         </p:nvSpPr>
@@ -30852,7 +31324,7 @@
       </p:sp>
       <p:sp>
         <p:nvSpPr>
-          <p:cNvPr id="24" name="Shape 22"/>
+          <p:cNvPr id="27" name="Shape 25"/>
           <p:cNvSpPr/>
           <p:nvPr/>
         </p:nvSpPr>
@@ -30879,13 +31351,13 @@
       </p:sp>
       <p:sp>
         <p:nvSpPr>
-          <p:cNvPr id="25" name="Shape 23"/>
-          <p:cNvSpPr/>
-          <p:nvPr/>
-        </p:nvSpPr>
-        <p:spPr>
-          <a:xfrm>
-            <a:off x="2999232" y="3364992"/>
+          <p:cNvPr id="28" name="Shape 26"/>
+          <p:cNvSpPr/>
+          <p:nvPr/>
+        </p:nvSpPr>
+        <p:spPr>
+          <a:xfrm>
+            <a:off x="2313432" y="3364992"/>
             <a:ext cx="1645920" cy="475488"/>
           </a:xfrm>
           <a:prstGeom prst="rect">
@@ -30906,13 +31378,13 @@
       </p:sp>
       <p:sp>
         <p:nvSpPr>
-          <p:cNvPr id="26" name="Text 24"/>
-          <p:cNvSpPr/>
-          <p:nvPr/>
-        </p:nvSpPr>
-        <p:spPr>
-          <a:xfrm>
-            <a:off x="2999232" y="3364992"/>
+          <p:cNvPr id="29" name="Text 27"/>
+          <p:cNvSpPr/>
+          <p:nvPr/>
+        </p:nvSpPr>
+        <p:spPr>
+          <a:xfrm>
+            <a:off x="2313432" y="3364992"/>
             <a:ext cx="1645920" cy="475488"/>
           </a:xfrm>
           <a:prstGeom prst="rect">
@@ -30945,14 +31417,14 @@
       </p:sp>
       <p:sp>
         <p:nvSpPr>
-          <p:cNvPr id="27" name="Text 25"/>
-          <p:cNvSpPr/>
-          <p:nvPr/>
-        </p:nvSpPr>
-        <p:spPr>
-          <a:xfrm>
-            <a:off x="4645152" y="3364992"/>
-            <a:ext cx="1097280" cy="475488"/>
+          <p:cNvPr id="30" name="Text 28"/>
+          <p:cNvSpPr/>
+          <p:nvPr/>
+        </p:nvSpPr>
+        <p:spPr>
+          <a:xfrm>
+            <a:off x="3959352" y="3364992"/>
+            <a:ext cx="411480" cy="475488"/>
           </a:xfrm>
           <a:prstGeom prst="rect">
             <a:avLst/>
@@ -30984,13 +31456,13 @@
       </p:sp>
       <p:sp>
         <p:nvSpPr>
-          <p:cNvPr id="28" name="Shape 26"/>
-          <p:cNvSpPr/>
-          <p:nvPr/>
-        </p:nvSpPr>
-        <p:spPr>
-          <a:xfrm>
-            <a:off x="5742432" y="3364992"/>
+          <p:cNvPr id="31" name="Shape 29"/>
+          <p:cNvSpPr/>
+          <p:nvPr/>
+        </p:nvSpPr>
+        <p:spPr>
+          <a:xfrm>
+            <a:off x="4370832" y="3364992"/>
             <a:ext cx="1645920" cy="475488"/>
           </a:xfrm>
           <a:prstGeom prst="rect">
@@ -31011,13 +31483,13 @@
       </p:sp>
       <p:sp>
         <p:nvSpPr>
-          <p:cNvPr id="29" name="Text 27"/>
-          <p:cNvSpPr/>
-          <p:nvPr/>
-        </p:nvSpPr>
-        <p:spPr>
-          <a:xfrm>
-            <a:off x="5742432" y="3364992"/>
+          <p:cNvPr id="32" name="Text 30"/>
+          <p:cNvSpPr/>
+          <p:nvPr/>
+        </p:nvSpPr>
+        <p:spPr>
+          <a:xfrm>
+            <a:off x="4370832" y="3364992"/>
             <a:ext cx="1645920" cy="475488"/>
           </a:xfrm>
           <a:prstGeom prst="rect">
@@ -31042,7 +31514,7 @@
                 <a:ea typeface="Trebuchet MS" pitchFamily="34" charset="-122"/>
                 <a:cs typeface="Trebuchet MS" pitchFamily="34" charset="-120"/>
               </a:rPr>
-              <a:t>ish</a:t>
+              <a:t>en</a:t>
             </a:r>
             <a:endParaRPr lang="en-US" sz="1400" dirty="0"/>
           </a:p>
@@ -31050,7 +31522,112 @@
       </p:sp>
       <p:sp>
         <p:nvSpPr>
-          <p:cNvPr id="30" name="Shape 28"/>
+          <p:cNvPr id="33" name="Text 31"/>
+          <p:cNvSpPr/>
+          <p:nvPr/>
+        </p:nvSpPr>
+        <p:spPr>
+          <a:xfrm>
+            <a:off x="6016752" y="3364992"/>
+            <a:ext cx="411480" cy="475488"/>
+          </a:xfrm>
+          <a:prstGeom prst="rect">
+            <a:avLst/>
+          </a:prstGeom>
+          <a:noFill/>
+          <a:ln/>
+        </p:spPr>
+        <p:txBody>
+          <a:bodyPr wrap="square" lIns="0" tIns="0" rIns="0" bIns="0" rtlCol="0" anchor="ctr"/>
+          <a:lstStyle/>
+          <a:p>
+            <a:pPr algn="ctr" indent="0" marL="0">
+              <a:buNone/>
+            </a:pPr>
+            <a:r>
+              <a:rPr lang="en-US" sz="1600" b="1" dirty="0">
+                <a:solidFill>
+                  <a:srgbClr val="0D9488"/>
+                </a:solidFill>
+                <a:latin typeface="Trebuchet MS" pitchFamily="34" charset="0"/>
+                <a:ea typeface="Trebuchet MS" pitchFamily="34" charset="-122"/>
+                <a:cs typeface="Trebuchet MS" pitchFamily="34" charset="-120"/>
+              </a:rPr>
+              <a:t>·</a:t>
+            </a:r>
+            <a:endParaRPr lang="en-US" sz="1600" dirty="0"/>
+          </a:p>
+        </p:txBody>
+      </p:sp>
+      <p:sp>
+        <p:nvSpPr>
+          <p:cNvPr id="34" name="Shape 32"/>
+          <p:cNvSpPr/>
+          <p:nvPr/>
+        </p:nvSpPr>
+        <p:spPr>
+          <a:xfrm>
+            <a:off x="6428232" y="3364992"/>
+            <a:ext cx="1645920" cy="475488"/>
+          </a:xfrm>
+          <a:prstGeom prst="rect">
+            <a:avLst>
+              <a:gd name="adj" fmla="val 9615"/>
+            </a:avLst>
+          </a:prstGeom>
+          <a:solidFill>
+            <a:srgbClr val="FFFFFF"/>
+          </a:solidFill>
+          <a:ln w="12700">
+            <a:solidFill>
+              <a:srgbClr val="0D9488"/>
+            </a:solidFill>
+            <a:prstDash val="solid"/>
+          </a:ln>
+        </p:spPr>
+      </p:sp>
+      <p:sp>
+        <p:nvSpPr>
+          <p:cNvPr id="35" name="Text 33"/>
+          <p:cNvSpPr/>
+          <p:nvPr/>
+        </p:nvSpPr>
+        <p:spPr>
+          <a:xfrm>
+            <a:off x="6428232" y="3364992"/>
+            <a:ext cx="1645920" cy="475488"/>
+          </a:xfrm>
+          <a:prstGeom prst="rect">
+            <a:avLst/>
+          </a:prstGeom>
+          <a:noFill/>
+          <a:ln/>
+        </p:spPr>
+        <p:txBody>
+          <a:bodyPr wrap="square" lIns="0" tIns="0" rIns="0" bIns="0" rtlCol="0" anchor="ctr"/>
+          <a:lstStyle/>
+          <a:p>
+            <a:pPr algn="ctr" indent="0" marL="0">
+              <a:buNone/>
+            </a:pPr>
+            <a:r>
+              <a:rPr lang="en-US" sz="1400" b="1" dirty="0">
+                <a:solidFill>
+                  <a:srgbClr val="0D9488"/>
+                </a:solidFill>
+                <a:latin typeface="Trebuchet MS" pitchFamily="34" charset="0"/>
+                <a:ea typeface="Trebuchet MS" pitchFamily="34" charset="-122"/>
+                <a:cs typeface="Trebuchet MS" pitchFamily="34" charset="-120"/>
+              </a:rPr>
+              <a:t>ing</a:t>
+            </a:r>
+            <a:endParaRPr lang="en-US" sz="1400" dirty="0"/>
+          </a:p>
+        </p:txBody>
+      </p:sp>
+      <p:sp>
+        <p:nvSpPr>
+          <p:cNvPr id="36" name="Shape 34"/>
           <p:cNvSpPr/>
           <p:nvPr/>
         </p:nvSpPr>
@@ -31077,7 +31654,7 @@
       </p:sp>
       <p:sp>
         <p:nvSpPr>
-          <p:cNvPr id="31" name="Text 29"/>
+          <p:cNvPr id="37" name="Text 35"/>
           <p:cNvSpPr/>
           <p:nvPr/>
         </p:nvSpPr>
@@ -31116,7 +31693,7 @@
       </p:sp>
       <p:sp>
         <p:nvSpPr>
-          <p:cNvPr id="32" name="Shape 30"/>
+          <p:cNvPr id="38" name="Shape 36"/>
           <p:cNvSpPr/>
           <p:nvPr/>
         </p:nvSpPr>
@@ -31143,13 +31720,13 @@
       </p:sp>
       <p:sp>
         <p:nvSpPr>
-          <p:cNvPr id="33" name="Shape 31"/>
-          <p:cNvSpPr/>
-          <p:nvPr/>
-        </p:nvSpPr>
-        <p:spPr>
-          <a:xfrm>
-            <a:off x="2427732" y="4169664"/>
+          <p:cNvPr id="39" name="Shape 37"/>
+          <p:cNvSpPr/>
+          <p:nvPr/>
+        </p:nvSpPr>
+        <p:spPr>
+          <a:xfrm>
+            <a:off x="2124837" y="4169664"/>
             <a:ext cx="685800" cy="475488"/>
           </a:xfrm>
           <a:prstGeom prst="rect">
@@ -31170,13 +31747,13 @@
       </p:sp>
       <p:sp>
         <p:nvSpPr>
-          <p:cNvPr id="34" name="Text 32"/>
-          <p:cNvSpPr/>
-          <p:nvPr/>
-        </p:nvSpPr>
-        <p:spPr>
-          <a:xfrm>
-            <a:off x="2427732" y="4169664"/>
+          <p:cNvPr id="40" name="Text 38"/>
+          <p:cNvSpPr/>
+          <p:nvPr/>
+        </p:nvSpPr>
+        <p:spPr>
+          <a:xfrm>
+            <a:off x="2124837" y="4169664"/>
             <a:ext cx="685800" cy="475488"/>
           </a:xfrm>
           <a:prstGeom prst="rect">
@@ -31209,13 +31786,13 @@
       </p:sp>
       <p:sp>
         <p:nvSpPr>
-          <p:cNvPr id="35" name="Shape 33"/>
-          <p:cNvSpPr/>
-          <p:nvPr/>
-        </p:nvSpPr>
-        <p:spPr>
-          <a:xfrm>
-            <a:off x="3639312" y="4169664"/>
+          <p:cNvPr id="41" name="Shape 39"/>
+          <p:cNvSpPr/>
+          <p:nvPr/>
+        </p:nvSpPr>
+        <p:spPr>
+          <a:xfrm>
+            <a:off x="3033522" y="4169664"/>
             <a:ext cx="685800" cy="475488"/>
           </a:xfrm>
           <a:prstGeom prst="rect">
@@ -31236,13 +31813,13 @@
       </p:sp>
       <p:sp>
         <p:nvSpPr>
-          <p:cNvPr id="36" name="Text 34"/>
-          <p:cNvSpPr/>
-          <p:nvPr/>
-        </p:nvSpPr>
-        <p:spPr>
-          <a:xfrm>
-            <a:off x="3639312" y="4169664"/>
+          <p:cNvPr id="42" name="Text 40"/>
+          <p:cNvSpPr/>
+          <p:nvPr/>
+        </p:nvSpPr>
+        <p:spPr>
+          <a:xfrm>
+            <a:off x="3033522" y="4169664"/>
             <a:ext cx="685800" cy="475488"/>
           </a:xfrm>
           <a:prstGeom prst="rect">
@@ -31275,13 +31852,13 @@
       </p:sp>
       <p:sp>
         <p:nvSpPr>
-          <p:cNvPr id="37" name="Shape 35"/>
-          <p:cNvSpPr/>
-          <p:nvPr/>
-        </p:nvSpPr>
-        <p:spPr>
-          <a:xfrm>
-            <a:off x="4850892" y="4169664"/>
+          <p:cNvPr id="43" name="Shape 41"/>
+          <p:cNvSpPr/>
+          <p:nvPr/>
+        </p:nvSpPr>
+        <p:spPr>
+          <a:xfrm>
+            <a:off x="3942207" y="4169664"/>
             <a:ext cx="685800" cy="475488"/>
           </a:xfrm>
           <a:prstGeom prst="rect">
@@ -31302,13 +31879,13 @@
       </p:sp>
       <p:sp>
         <p:nvSpPr>
-          <p:cNvPr id="38" name="Text 36"/>
-          <p:cNvSpPr/>
-          <p:nvPr/>
-        </p:nvSpPr>
-        <p:spPr>
-          <a:xfrm>
-            <a:off x="4850892" y="4169664"/>
+          <p:cNvPr id="44" name="Text 42"/>
+          <p:cNvSpPr/>
+          <p:nvPr/>
+        </p:nvSpPr>
+        <p:spPr>
+          <a:xfrm>
+            <a:off x="3942207" y="4169664"/>
             <a:ext cx="685800" cy="475488"/>
           </a:xfrm>
           <a:prstGeom prst="rect">
@@ -31341,13 +31918,13 @@
       </p:sp>
       <p:sp>
         <p:nvSpPr>
-          <p:cNvPr id="39" name="Shape 37"/>
-          <p:cNvSpPr/>
-          <p:nvPr/>
-        </p:nvSpPr>
-        <p:spPr>
-          <a:xfrm>
-            <a:off x="6062472" y="4169664"/>
+          <p:cNvPr id="45" name="Shape 43"/>
+          <p:cNvSpPr/>
+          <p:nvPr/>
+        </p:nvSpPr>
+        <p:spPr>
+          <a:xfrm>
+            <a:off x="4850892" y="4169664"/>
             <a:ext cx="685800" cy="475488"/>
           </a:xfrm>
           <a:prstGeom prst="rect">
@@ -31368,13 +31945,13 @@
       </p:sp>
       <p:sp>
         <p:nvSpPr>
-          <p:cNvPr id="40" name="Text 38"/>
-          <p:cNvSpPr/>
-          <p:nvPr/>
-        </p:nvSpPr>
-        <p:spPr>
-          <a:xfrm>
-            <a:off x="6062472" y="4169664"/>
+          <p:cNvPr id="46" name="Text 44"/>
+          <p:cNvSpPr/>
+          <p:nvPr/>
+        </p:nvSpPr>
+        <p:spPr>
+          <a:xfrm>
+            <a:off x="4850892" y="4169664"/>
             <a:ext cx="685800" cy="475488"/>
           </a:xfrm>
           <a:prstGeom prst="rect">
@@ -31399,7 +31976,7 @@
                 <a:ea typeface="Trebuchet MS" pitchFamily="34" charset="-122"/>
                 <a:cs typeface="Trebuchet MS" pitchFamily="34" charset="-120"/>
               </a:rPr>
-              <a:t>i</a:t>
+              <a:t>e</a:t>
             </a:r>
             <a:endParaRPr lang="en-US" sz="900" dirty="0"/>
           </a:p>
@@ -31407,13 +31984,13 @@
       </p:sp>
       <p:sp>
         <p:nvSpPr>
-          <p:cNvPr id="41" name="Shape 39"/>
-          <p:cNvSpPr/>
-          <p:nvPr/>
-        </p:nvSpPr>
-        <p:spPr>
-          <a:xfrm>
-            <a:off x="7274052" y="4169664"/>
+          <p:cNvPr id="47" name="Shape 45"/>
+          <p:cNvSpPr/>
+          <p:nvPr/>
+        </p:nvSpPr>
+        <p:spPr>
+          <a:xfrm>
+            <a:off x="5759577" y="4169664"/>
             <a:ext cx="685800" cy="475488"/>
           </a:xfrm>
           <a:prstGeom prst="rect">
@@ -31434,13 +32011,13 @@
       </p:sp>
       <p:sp>
         <p:nvSpPr>
-          <p:cNvPr id="42" name="Text 40"/>
-          <p:cNvSpPr/>
-          <p:nvPr/>
-        </p:nvSpPr>
-        <p:spPr>
-          <a:xfrm>
-            <a:off x="7274052" y="4169664"/>
+          <p:cNvPr id="48" name="Text 46"/>
+          <p:cNvSpPr/>
+          <p:nvPr/>
+        </p:nvSpPr>
+        <p:spPr>
+          <a:xfrm>
+            <a:off x="5759577" y="4169664"/>
             <a:ext cx="685800" cy="475488"/>
           </a:xfrm>
           <a:prstGeom prst="rect">
@@ -31465,7 +32042,139 @@
                 <a:ea typeface="Trebuchet MS" pitchFamily="34" charset="-122"/>
                 <a:cs typeface="Trebuchet MS" pitchFamily="34" charset="-120"/>
               </a:rPr>
-              <a:t>sh</a:t>
+              <a:t>n</a:t>
+            </a:r>
+            <a:endParaRPr lang="en-US" sz="900" dirty="0"/>
+          </a:p>
+        </p:txBody>
+      </p:sp>
+      <p:sp>
+        <p:nvSpPr>
+          <p:cNvPr id="49" name="Shape 47"/>
+          <p:cNvSpPr/>
+          <p:nvPr/>
+        </p:nvSpPr>
+        <p:spPr>
+          <a:xfrm>
+            <a:off x="6668262" y="4169664"/>
+            <a:ext cx="685800" cy="475488"/>
+          </a:xfrm>
+          <a:prstGeom prst="rect">
+            <a:avLst>
+              <a:gd name="adj" fmla="val 7692"/>
+            </a:avLst>
+          </a:prstGeom>
+          <a:solidFill>
+            <a:srgbClr val="FFFFFF"/>
+          </a:solidFill>
+          <a:ln w="12700">
+            <a:solidFill>
+              <a:srgbClr val="DB2777"/>
+            </a:solidFill>
+            <a:prstDash val="solid"/>
+          </a:ln>
+        </p:spPr>
+      </p:sp>
+      <p:sp>
+        <p:nvSpPr>
+          <p:cNvPr id="50" name="Text 48"/>
+          <p:cNvSpPr/>
+          <p:nvPr/>
+        </p:nvSpPr>
+        <p:spPr>
+          <a:xfrm>
+            <a:off x="6668262" y="4169664"/>
+            <a:ext cx="685800" cy="475488"/>
+          </a:xfrm>
+          <a:prstGeom prst="rect">
+            <a:avLst/>
+          </a:prstGeom>
+          <a:noFill/>
+          <a:ln/>
+        </p:spPr>
+        <p:txBody>
+          <a:bodyPr wrap="square" lIns="0" tIns="0" rIns="0" bIns="0" rtlCol="0" anchor="ctr"/>
+          <a:lstStyle/>
+          <a:p>
+            <a:pPr algn="ctr" indent="0" marL="0">
+              <a:buNone/>
+            </a:pPr>
+            <a:r>
+              <a:rPr lang="en-US" sz="900" b="1" dirty="0">
+                <a:solidFill>
+                  <a:srgbClr val="9D174D"/>
+                </a:solidFill>
+                <a:latin typeface="Trebuchet MS" pitchFamily="34" charset="0"/>
+                <a:ea typeface="Trebuchet MS" pitchFamily="34" charset="-122"/>
+                <a:cs typeface="Trebuchet MS" pitchFamily="34" charset="-120"/>
+              </a:rPr>
+              <a:t>i</a:t>
+            </a:r>
+            <a:endParaRPr lang="en-US" sz="900" dirty="0"/>
+          </a:p>
+        </p:txBody>
+      </p:sp>
+      <p:sp>
+        <p:nvSpPr>
+          <p:cNvPr id="51" name="Shape 49"/>
+          <p:cNvSpPr/>
+          <p:nvPr/>
+        </p:nvSpPr>
+        <p:spPr>
+          <a:xfrm>
+            <a:off x="7576947" y="4169664"/>
+            <a:ext cx="685800" cy="475488"/>
+          </a:xfrm>
+          <a:prstGeom prst="rect">
+            <a:avLst>
+              <a:gd name="adj" fmla="val 7692"/>
+            </a:avLst>
+          </a:prstGeom>
+          <a:solidFill>
+            <a:srgbClr val="FFFFFF"/>
+          </a:solidFill>
+          <a:ln w="12700">
+            <a:solidFill>
+              <a:srgbClr val="DB2777"/>
+            </a:solidFill>
+            <a:prstDash val="solid"/>
+          </a:ln>
+        </p:spPr>
+      </p:sp>
+      <p:sp>
+        <p:nvSpPr>
+          <p:cNvPr id="52" name="Text 50"/>
+          <p:cNvSpPr/>
+          <p:nvPr/>
+        </p:nvSpPr>
+        <p:spPr>
+          <a:xfrm>
+            <a:off x="7576947" y="4169664"/>
+            <a:ext cx="685800" cy="475488"/>
+          </a:xfrm>
+          <a:prstGeom prst="rect">
+            <a:avLst/>
+          </a:prstGeom>
+          <a:noFill/>
+          <a:ln/>
+        </p:spPr>
+        <p:txBody>
+          <a:bodyPr wrap="square" lIns="0" tIns="0" rIns="0" bIns="0" rtlCol="0" anchor="ctr"/>
+          <a:lstStyle/>
+          <a:p>
+            <a:pPr algn="ctr" indent="0" marL="0">
+              <a:buNone/>
+            </a:pPr>
+            <a:r>
+              <a:rPr lang="en-US" sz="900" b="1" dirty="0">
+                <a:solidFill>
+                  <a:srgbClr val="9D174D"/>
+                </a:solidFill>
+                <a:latin typeface="Trebuchet MS" pitchFamily="34" charset="0"/>
+                <a:ea typeface="Trebuchet MS" pitchFamily="34" charset="-122"/>
+                <a:cs typeface="Trebuchet MS" pitchFamily="34" charset="-120"/>
+              </a:rPr>
+              <a:t>ng</a:t>
             </a:r>
             <a:endParaRPr lang="en-US" sz="900" dirty="0"/>
           </a:p>
@@ -31757,7 +32466,7 @@
                 <a:ea typeface="Calibri" pitchFamily="34" charset="-122"/>
                 <a:cs typeface="Calibri" pitchFamily="34" charset="-120"/>
               </a:rPr>
-              <a:t>Word Labs  •  wordlabs.app  •  Root: 'dark' = absence of light</a:t>
+              <a:t>Word Labs  •  wordlabs.app  •  Root: 'dark' = with little or no light</a:t>
             </a:r>
             <a:endParaRPr lang="en-US" sz="800" dirty="0"/>
           </a:p>
@@ -32926,7 +33635,7 @@
                 <a:ea typeface="Calibri" pitchFamily="34" charset="-122"/>
                 <a:cs typeface="Calibri" pitchFamily="34" charset="-120"/>
               </a:rPr>
-              <a:t>Word Labs  •  wordlabs.app  •  Root: 'dark' = absence of light</a:t>
+              <a:t>Word Labs  •  wordlabs.app  •  Root: 'dark' = with little or no light</a:t>
             </a:r>
             <a:endParaRPr lang="en-US" sz="800" dirty="0"/>
           </a:p>
@@ -33184,7 +33893,7 @@
             <a:avLst/>
           </a:prstGeom>
           <a:solidFill>
-            <a:srgbClr val="DDD6FE"/>
+            <a:srgbClr val="F8FAFC"/>
           </a:solidFill>
           <a:ln w="12700">
             <a:solidFill>
@@ -33196,14 +33905,39 @@
       </p:sp>
       <p:sp>
         <p:nvSpPr>
-          <p:cNvPr id="18" name="Text 16"/>
-          <p:cNvSpPr/>
-          <p:nvPr/>
-        </p:nvSpPr>
-        <p:spPr>
-          <a:xfrm>
-            <a:off x="365760" y="1563624"/>
-            <a:ext cx="2468880" cy="402336"/>
+          <p:cNvPr id="18" name="Shape 16"/>
+          <p:cNvSpPr/>
+          <p:nvPr/>
+        </p:nvSpPr>
+        <p:spPr>
+          <a:xfrm>
+            <a:off x="2971800" y="1563624"/>
+            <a:ext cx="2834640" cy="402336"/>
+          </a:xfrm>
+          <a:prstGeom prst="rect">
+            <a:avLst/>
+          </a:prstGeom>
+          <a:solidFill>
+            <a:srgbClr val="CCFBF1"/>
+          </a:solidFill>
+          <a:ln w="12700">
+            <a:solidFill>
+              <a:srgbClr val="E2E8F0"/>
+            </a:solidFill>
+            <a:prstDash val="solid"/>
+          </a:ln>
+        </p:spPr>
+      </p:sp>
+      <p:sp>
+        <p:nvSpPr>
+          <p:cNvPr id="19" name="Text 17"/>
+          <p:cNvSpPr/>
+          <p:nvPr/>
+        </p:nvSpPr>
+        <p:spPr>
+          <a:xfrm>
+            <a:off x="2971800" y="1563624"/>
+            <a:ext cx="2834640" cy="402336"/>
           </a:xfrm>
           <a:prstGeom prst="rect">
             <a:avLst/>
@@ -33221,13 +33955,13 @@
             <a:r>
               <a:rPr lang="en-US" sz="1300" b="1" dirty="0">
                 <a:solidFill>
-                  <a:srgbClr val="4C1D95"/>
+                  <a:srgbClr val="0F766E"/>
                 </a:solidFill>
                 <a:latin typeface="Trebuchet MS" pitchFamily="34" charset="0"/>
                 <a:ea typeface="Trebuchet MS" pitchFamily="34" charset="-122"/>
                 <a:cs typeface="Trebuchet MS" pitchFamily="34" charset="-120"/>
               </a:rPr>
-              <a:t>after-</a:t>
+              <a:t>dark</a:t>
             </a:r>
             <a:endParaRPr lang="en-US" sz="1300" dirty="0"/>
           </a:p>
@@ -33235,20 +33969,20 @@
       </p:sp>
       <p:sp>
         <p:nvSpPr>
-          <p:cNvPr id="19" name="Shape 17"/>
-          <p:cNvSpPr/>
-          <p:nvPr/>
-        </p:nvSpPr>
-        <p:spPr>
-          <a:xfrm>
-            <a:off x="2971800" y="1563624"/>
+          <p:cNvPr id="20" name="Shape 18"/>
+          <p:cNvSpPr/>
+          <p:nvPr/>
+        </p:nvSpPr>
+        <p:spPr>
+          <a:xfrm>
+            <a:off x="5943600" y="1563624"/>
             <a:ext cx="2834640" cy="402336"/>
           </a:xfrm>
           <a:prstGeom prst="rect">
             <a:avLst/>
           </a:prstGeom>
           <a:solidFill>
-            <a:srgbClr val="CCFBF1"/>
+            <a:srgbClr val="FCE7F3"/>
           </a:solidFill>
           <a:ln w="12700">
             <a:solidFill>
@@ -33260,13 +33994,13 @@
       </p:sp>
       <p:sp>
         <p:nvSpPr>
-          <p:cNvPr id="20" name="Text 18"/>
-          <p:cNvSpPr/>
-          <p:nvPr/>
-        </p:nvSpPr>
-        <p:spPr>
-          <a:xfrm>
-            <a:off x="2971800" y="1563624"/>
+          <p:cNvPr id="21" name="Text 19"/>
+          <p:cNvSpPr/>
+          <p:nvPr/>
+        </p:nvSpPr>
+        <p:spPr>
+          <a:xfrm>
+            <a:off x="5943600" y="1563624"/>
             <a:ext cx="2834640" cy="402336"/>
           </a:xfrm>
           <a:prstGeom prst="rect">
@@ -33285,13 +34019,13 @@
             <a:r>
               <a:rPr lang="en-US" sz="1300" b="1" dirty="0">
                 <a:solidFill>
-                  <a:srgbClr val="0F766E"/>
+                  <a:srgbClr val="9D174D"/>
                 </a:solidFill>
                 <a:latin typeface="Trebuchet MS" pitchFamily="34" charset="0"/>
                 <a:ea typeface="Trebuchet MS" pitchFamily="34" charset="-122"/>
                 <a:cs typeface="Trebuchet MS" pitchFamily="34" charset="-120"/>
               </a:rPr>
-              <a:t>dark</a:t>
+              <a:t>-en</a:t>
             </a:r>
             <a:endParaRPr lang="en-US" sz="1300" dirty="0"/>
           </a:p>
@@ -33299,19 +34033,69 @@
       </p:sp>
       <p:sp>
         <p:nvSpPr>
-          <p:cNvPr id="21" name="Shape 19"/>
-          <p:cNvSpPr/>
-          <p:nvPr/>
-        </p:nvSpPr>
-        <p:spPr>
-          <a:xfrm>
-            <a:off x="5943600" y="1563624"/>
+          <p:cNvPr id="22" name="Shape 20"/>
+          <p:cNvSpPr/>
+          <p:nvPr/>
+        </p:nvSpPr>
+        <p:spPr>
+          <a:xfrm>
+            <a:off x="365760" y="1984248"/>
+            <a:ext cx="2468880" cy="402336"/>
+          </a:xfrm>
+          <a:prstGeom prst="rect">
+            <a:avLst/>
+          </a:prstGeom>
+          <a:solidFill>
+            <a:srgbClr val="F1F5F9"/>
+          </a:solidFill>
+          <a:ln w="12700">
+            <a:solidFill>
+              <a:srgbClr val="E2E8F0"/>
+            </a:solidFill>
+            <a:prstDash val="solid"/>
+          </a:ln>
+        </p:spPr>
+      </p:sp>
+      <p:sp>
+        <p:nvSpPr>
+          <p:cNvPr id="23" name="Shape 21"/>
+          <p:cNvSpPr/>
+          <p:nvPr/>
+        </p:nvSpPr>
+        <p:spPr>
+          <a:xfrm>
+            <a:off x="2971800" y="1984248"/>
             <a:ext cx="2834640" cy="402336"/>
           </a:xfrm>
           <a:prstGeom prst="rect">
             <a:avLst/>
           </a:prstGeom>
           <a:solidFill>
+            <a:srgbClr val="F1F5F9"/>
+          </a:solidFill>
+          <a:ln w="12700">
+            <a:solidFill>
+              <a:srgbClr val="E2E8F0"/>
+            </a:solidFill>
+            <a:prstDash val="solid"/>
+          </a:ln>
+        </p:spPr>
+      </p:sp>
+      <p:sp>
+        <p:nvSpPr>
+          <p:cNvPr id="24" name="Shape 22"/>
+          <p:cNvSpPr/>
+          <p:nvPr/>
+        </p:nvSpPr>
+        <p:spPr>
+          <a:xfrm>
+            <a:off x="5943600" y="1984248"/>
+            <a:ext cx="2834640" cy="402336"/>
+          </a:xfrm>
+          <a:prstGeom prst="rect">
+            <a:avLst/>
+          </a:prstGeom>
+          <a:solidFill>
             <a:srgbClr val="FCE7F3"/>
           </a:solidFill>
           <a:ln w="12700">
@@ -33324,13 +34108,13 @@
       </p:sp>
       <p:sp>
         <p:nvSpPr>
-          <p:cNvPr id="22" name="Text 20"/>
-          <p:cNvSpPr/>
-          <p:nvPr/>
-        </p:nvSpPr>
-        <p:spPr>
-          <a:xfrm>
-            <a:off x="5943600" y="1563624"/>
+          <p:cNvPr id="25" name="Text 23"/>
+          <p:cNvSpPr/>
+          <p:nvPr/>
+        </p:nvSpPr>
+        <p:spPr>
+          <a:xfrm>
+            <a:off x="5943600" y="1984248"/>
             <a:ext cx="2834640" cy="402336"/>
           </a:xfrm>
           <a:prstGeom prst="rect">
@@ -33355,7 +34139,7 @@
                 <a:ea typeface="Trebuchet MS" pitchFamily="34" charset="-122"/>
                 <a:cs typeface="Trebuchet MS" pitchFamily="34" charset="-120"/>
               </a:rPr>
-              <a:t>-ness</a:t>
+              <a:t>-er</a:t>
             </a:r>
             <a:endParaRPr lang="en-US" sz="1300" dirty="0"/>
           </a:p>
@@ -33363,20 +34147,20 @@
       </p:sp>
       <p:sp>
         <p:nvSpPr>
-          <p:cNvPr id="23" name="Shape 21"/>
-          <p:cNvSpPr/>
-          <p:nvPr/>
-        </p:nvSpPr>
-        <p:spPr>
-          <a:xfrm>
-            <a:off x="365760" y="1984248"/>
+          <p:cNvPr id="26" name="Shape 24"/>
+          <p:cNvSpPr/>
+          <p:nvPr/>
+        </p:nvSpPr>
+        <p:spPr>
+          <a:xfrm>
+            <a:off x="365760" y="2404872"/>
             <a:ext cx="2468880" cy="402336"/>
           </a:xfrm>
           <a:prstGeom prst="rect">
             <a:avLst/>
           </a:prstGeom>
           <a:solidFill>
-            <a:srgbClr val="DDD6FE"/>
+            <a:srgbClr val="F8FAFC"/>
           </a:solidFill>
           <a:ln w="12700">
             <a:solidFill>
@@ -33388,14 +34172,64 @@
       </p:sp>
       <p:sp>
         <p:nvSpPr>
-          <p:cNvPr id="24" name="Text 22"/>
-          <p:cNvSpPr/>
-          <p:nvPr/>
-        </p:nvSpPr>
-        <p:spPr>
-          <a:xfrm>
-            <a:off x="365760" y="1984248"/>
-            <a:ext cx="2468880" cy="402336"/>
+          <p:cNvPr id="27" name="Shape 25"/>
+          <p:cNvSpPr/>
+          <p:nvPr/>
+        </p:nvSpPr>
+        <p:spPr>
+          <a:xfrm>
+            <a:off x="2971800" y="2404872"/>
+            <a:ext cx="2834640" cy="402336"/>
+          </a:xfrm>
+          <a:prstGeom prst="rect">
+            <a:avLst/>
+          </a:prstGeom>
+          <a:solidFill>
+            <a:srgbClr val="F8FAFC"/>
+          </a:solidFill>
+          <a:ln w="12700">
+            <a:solidFill>
+              <a:srgbClr val="E2E8F0"/>
+            </a:solidFill>
+            <a:prstDash val="solid"/>
+          </a:ln>
+        </p:spPr>
+      </p:sp>
+      <p:sp>
+        <p:nvSpPr>
+          <p:cNvPr id="28" name="Shape 26"/>
+          <p:cNvSpPr/>
+          <p:nvPr/>
+        </p:nvSpPr>
+        <p:spPr>
+          <a:xfrm>
+            <a:off x="5943600" y="2404872"/>
+            <a:ext cx="2834640" cy="402336"/>
+          </a:xfrm>
+          <a:prstGeom prst="rect">
+            <a:avLst/>
+          </a:prstGeom>
+          <a:solidFill>
+            <a:srgbClr val="FCE7F3"/>
+          </a:solidFill>
+          <a:ln w="12700">
+            <a:solidFill>
+              <a:srgbClr val="E2E8F0"/>
+            </a:solidFill>
+            <a:prstDash val="solid"/>
+          </a:ln>
+        </p:spPr>
+      </p:sp>
+      <p:sp>
+        <p:nvSpPr>
+          <p:cNvPr id="29" name="Text 27"/>
+          <p:cNvSpPr/>
+          <p:nvPr/>
+        </p:nvSpPr>
+        <p:spPr>
+          <a:xfrm>
+            <a:off x="5943600" y="2404872"/>
+            <a:ext cx="2834640" cy="402336"/>
           </a:xfrm>
           <a:prstGeom prst="rect">
             <a:avLst/>
@@ -33413,13 +34247,13 @@
             <a:r>
               <a:rPr lang="en-US" sz="1300" b="1" dirty="0">
                 <a:solidFill>
-                  <a:srgbClr val="4C1D95"/>
+                  <a:srgbClr val="9D174D"/>
                 </a:solidFill>
                 <a:latin typeface="Trebuchet MS" pitchFamily="34" charset="0"/>
                 <a:ea typeface="Trebuchet MS" pitchFamily="34" charset="-122"/>
                 <a:cs typeface="Trebuchet MS" pitchFamily="34" charset="-120"/>
               </a:rPr>
-              <a:t>pitch-</a:t>
+              <a:t>-est</a:t>
             </a:r>
             <a:endParaRPr lang="en-US" sz="1300" dirty="0"/>
           </a:p>
@@ -33427,13 +34261,38 @@
       </p:sp>
       <p:sp>
         <p:nvSpPr>
-          <p:cNvPr id="25" name="Shape 23"/>
-          <p:cNvSpPr/>
-          <p:nvPr/>
-        </p:nvSpPr>
-        <p:spPr>
-          <a:xfrm>
-            <a:off x="2971800" y="1984248"/>
+          <p:cNvPr id="30" name="Shape 28"/>
+          <p:cNvSpPr/>
+          <p:nvPr/>
+        </p:nvSpPr>
+        <p:spPr>
+          <a:xfrm>
+            <a:off x="365760" y="2825496"/>
+            <a:ext cx="2468880" cy="402336"/>
+          </a:xfrm>
+          <a:prstGeom prst="rect">
+            <a:avLst/>
+          </a:prstGeom>
+          <a:solidFill>
+            <a:srgbClr val="F1F5F9"/>
+          </a:solidFill>
+          <a:ln w="12700">
+            <a:solidFill>
+              <a:srgbClr val="E2E8F0"/>
+            </a:solidFill>
+            <a:prstDash val="solid"/>
+          </a:ln>
+        </p:spPr>
+      </p:sp>
+      <p:sp>
+        <p:nvSpPr>
+          <p:cNvPr id="31" name="Shape 29"/>
+          <p:cNvSpPr/>
+          <p:nvPr/>
+        </p:nvSpPr>
+        <p:spPr>
+          <a:xfrm>
+            <a:off x="2971800" y="2825496"/>
             <a:ext cx="2834640" cy="402336"/>
           </a:xfrm>
           <a:prstGeom prst="rect">
@@ -33452,13 +34311,13 @@
       </p:sp>
       <p:sp>
         <p:nvSpPr>
-          <p:cNvPr id="26" name="Shape 24"/>
-          <p:cNvSpPr/>
-          <p:nvPr/>
-        </p:nvSpPr>
-        <p:spPr>
-          <a:xfrm>
-            <a:off x="5943600" y="1984248"/>
+          <p:cNvPr id="32" name="Shape 30"/>
+          <p:cNvSpPr/>
+          <p:nvPr/>
+        </p:nvSpPr>
+        <p:spPr>
+          <a:xfrm>
+            <a:off x="5943600" y="2825496"/>
             <a:ext cx="2834640" cy="402336"/>
           </a:xfrm>
           <a:prstGeom prst="rect">
@@ -33477,13 +34336,13 @@
       </p:sp>
       <p:sp>
         <p:nvSpPr>
-          <p:cNvPr id="27" name="Text 25"/>
-          <p:cNvSpPr/>
-          <p:nvPr/>
-        </p:nvSpPr>
-        <p:spPr>
-          <a:xfrm>
-            <a:off x="5943600" y="1984248"/>
+          <p:cNvPr id="33" name="Text 31"/>
+          <p:cNvSpPr/>
+          <p:nvPr/>
+        </p:nvSpPr>
+        <p:spPr>
+          <a:xfrm>
+            <a:off x="5943600" y="2825496"/>
             <a:ext cx="2834640" cy="402336"/>
           </a:xfrm>
           <a:prstGeom prst="rect">
@@ -33508,7 +34367,7 @@
                 <a:ea typeface="Trebuchet MS" pitchFamily="34" charset="-122"/>
                 <a:cs typeface="Trebuchet MS" pitchFamily="34" charset="-120"/>
               </a:rPr>
-              <a:t>-en</a:t>
+              <a:t>-ly</a:t>
             </a:r>
             <a:endParaRPr lang="en-US" sz="1300" dirty="0"/>
           </a:p>
@@ -33516,20 +34375,20 @@
       </p:sp>
       <p:sp>
         <p:nvSpPr>
-          <p:cNvPr id="28" name="Shape 26"/>
-          <p:cNvSpPr/>
-          <p:nvPr/>
-        </p:nvSpPr>
-        <p:spPr>
-          <a:xfrm>
-            <a:off x="365760" y="2404872"/>
+          <p:cNvPr id="34" name="Shape 32"/>
+          <p:cNvSpPr/>
+          <p:nvPr/>
+        </p:nvSpPr>
+        <p:spPr>
+          <a:xfrm>
+            <a:off x="365760" y="3246120"/>
             <a:ext cx="2468880" cy="402336"/>
           </a:xfrm>
           <a:prstGeom prst="rect">
             <a:avLst/>
           </a:prstGeom>
           <a:solidFill>
-            <a:srgbClr val="DDD6FE"/>
+            <a:srgbClr val="F8FAFC"/>
           </a:solidFill>
           <a:ln w="12700">
             <a:solidFill>
@@ -33541,14 +34400,64 @@
       </p:sp>
       <p:sp>
         <p:nvSpPr>
-          <p:cNvPr id="29" name="Text 27"/>
-          <p:cNvSpPr/>
-          <p:nvPr/>
-        </p:nvSpPr>
-        <p:spPr>
-          <a:xfrm>
-            <a:off x="365760" y="2404872"/>
-            <a:ext cx="2468880" cy="402336"/>
+          <p:cNvPr id="35" name="Shape 33"/>
+          <p:cNvSpPr/>
+          <p:nvPr/>
+        </p:nvSpPr>
+        <p:spPr>
+          <a:xfrm>
+            <a:off x="2971800" y="3246120"/>
+            <a:ext cx="2834640" cy="402336"/>
+          </a:xfrm>
+          <a:prstGeom prst="rect">
+            <a:avLst/>
+          </a:prstGeom>
+          <a:solidFill>
+            <a:srgbClr val="F8FAFC"/>
+          </a:solidFill>
+          <a:ln w="12700">
+            <a:solidFill>
+              <a:srgbClr val="E2E8F0"/>
+            </a:solidFill>
+            <a:prstDash val="solid"/>
+          </a:ln>
+        </p:spPr>
+      </p:sp>
+      <p:sp>
+        <p:nvSpPr>
+          <p:cNvPr id="36" name="Shape 34"/>
+          <p:cNvSpPr/>
+          <p:nvPr/>
+        </p:nvSpPr>
+        <p:spPr>
+          <a:xfrm>
+            <a:off x="5943600" y="3246120"/>
+            <a:ext cx="2834640" cy="402336"/>
+          </a:xfrm>
+          <a:prstGeom prst="rect">
+            <a:avLst/>
+          </a:prstGeom>
+          <a:solidFill>
+            <a:srgbClr val="FCE7F3"/>
+          </a:solidFill>
+          <a:ln w="12700">
+            <a:solidFill>
+              <a:srgbClr val="E2E8F0"/>
+            </a:solidFill>
+            <a:prstDash val="solid"/>
+          </a:ln>
+        </p:spPr>
+      </p:sp>
+      <p:sp>
+        <p:nvSpPr>
+          <p:cNvPr id="37" name="Text 35"/>
+          <p:cNvSpPr/>
+          <p:nvPr/>
+        </p:nvSpPr>
+        <p:spPr>
+          <a:xfrm>
+            <a:off x="5943600" y="3246120"/>
+            <a:ext cx="2834640" cy="402336"/>
           </a:xfrm>
           <a:prstGeom prst="rect">
             <a:avLst/>
@@ -33566,13 +34475,13 @@
             <a:r>
               <a:rPr lang="en-US" sz="1300" b="1" dirty="0">
                 <a:solidFill>
-                  <a:srgbClr val="4C1D95"/>
+                  <a:srgbClr val="9D174D"/>
                 </a:solidFill>
                 <a:latin typeface="Trebuchet MS" pitchFamily="34" charset="0"/>
                 <a:ea typeface="Trebuchet MS" pitchFamily="34" charset="-122"/>
                 <a:cs typeface="Trebuchet MS" pitchFamily="34" charset="-120"/>
               </a:rPr>
-              <a:t>semi-</a:t>
+              <a:t>-ness</a:t>
             </a:r>
             <a:endParaRPr lang="en-US" sz="1300" dirty="0"/>
           </a:p>
@@ -33580,64 +34489,14 @@
       </p:sp>
       <p:sp>
         <p:nvSpPr>
-          <p:cNvPr id="30" name="Shape 28"/>
-          <p:cNvSpPr/>
-          <p:nvPr/>
-        </p:nvSpPr>
-        <p:spPr>
-          <a:xfrm>
-            <a:off x="2971800" y="2404872"/>
-            <a:ext cx="2834640" cy="402336"/>
-          </a:xfrm>
-          <a:prstGeom prst="rect">
-            <a:avLst/>
-          </a:prstGeom>
-          <a:solidFill>
-            <a:srgbClr val="F8FAFC"/>
-          </a:solidFill>
-          <a:ln w="12700">
-            <a:solidFill>
-              <a:srgbClr val="E2E8F0"/>
-            </a:solidFill>
-            <a:prstDash val="solid"/>
-          </a:ln>
-        </p:spPr>
-      </p:sp>
-      <p:sp>
-        <p:nvSpPr>
-          <p:cNvPr id="31" name="Shape 29"/>
-          <p:cNvSpPr/>
-          <p:nvPr/>
-        </p:nvSpPr>
-        <p:spPr>
-          <a:xfrm>
-            <a:off x="5943600" y="2404872"/>
-            <a:ext cx="2834640" cy="402336"/>
-          </a:xfrm>
-          <a:prstGeom prst="rect">
-            <a:avLst/>
-          </a:prstGeom>
-          <a:solidFill>
-            <a:srgbClr val="FCE7F3"/>
-          </a:solidFill>
-          <a:ln w="12700">
-            <a:solidFill>
-              <a:srgbClr val="E2E8F0"/>
-            </a:solidFill>
-            <a:prstDash val="solid"/>
-          </a:ln>
-        </p:spPr>
-      </p:sp>
-      <p:sp>
-        <p:nvSpPr>
-          <p:cNvPr id="32" name="Text 30"/>
-          <p:cNvSpPr/>
-          <p:nvPr/>
-        </p:nvSpPr>
-        <p:spPr>
-          <a:xfrm>
-            <a:off x="5943600" y="2404872"/>
-            <a:ext cx="2834640" cy="402336"/>
+          <p:cNvPr id="38" name="Text 36"/>
+          <p:cNvSpPr/>
+          <p:nvPr/>
+        </p:nvSpPr>
+        <p:spPr>
+          <a:xfrm>
+            <a:off x="365760" y="3611880"/>
+            <a:ext cx="1828800" cy="347472"/>
           </a:xfrm>
           <a:prstGeom prst="rect">
             <a:avLst/>
@@ -33649,59 +34508,61 @@
           <a:bodyPr wrap="square" lIns="0" tIns="0" rIns="0" bIns="0" rtlCol="0" anchor="ctr"/>
           <a:lstStyle/>
           <a:p>
-            <a:pPr algn="ctr" indent="0" marL="0">
-              <a:buNone/>
-            </a:pPr>
-            <a:r>
-              <a:rPr lang="en-US" sz="1300" b="1" dirty="0">
-                <a:solidFill>
-                  <a:srgbClr val="9D174D"/>
+            <a:pPr algn="l" indent="0" marL="0">
+              <a:buNone/>
+            </a:pPr>
+            <a:r>
+              <a:rPr lang="en-US" sz="1200" b="1" dirty="0">
+                <a:solidFill>
+                  <a:srgbClr val="0F172A"/>
                 </a:solidFill>
                 <a:latin typeface="Trebuchet MS" pitchFamily="34" charset="0"/>
                 <a:ea typeface="Trebuchet MS" pitchFamily="34" charset="-122"/>
                 <a:cs typeface="Trebuchet MS" pitchFamily="34" charset="-120"/>
               </a:rPr>
-              <a:t>-ly</a:t>
-            </a:r>
-            <a:endParaRPr lang="en-US" sz="1300" dirty="0"/>
-          </a:p>
-        </p:txBody>
-      </p:sp>
-      <p:sp>
-        <p:nvSpPr>
-          <p:cNvPr id="33" name="Shape 31"/>
-          <p:cNvSpPr/>
-          <p:nvPr/>
-        </p:nvSpPr>
-        <p:spPr>
-          <a:xfrm>
-            <a:off x="365760" y="2825496"/>
-            <a:ext cx="2468880" cy="402336"/>
-          </a:xfrm>
-          <a:prstGeom prst="rect">
-            <a:avLst/>
-          </a:prstGeom>
-          <a:solidFill>
-            <a:srgbClr val="DDD6FE"/>
-          </a:solidFill>
-          <a:ln w="12700">
-            <a:solidFill>
-              <a:srgbClr val="E2E8F0"/>
-            </a:solidFill>
-            <a:prstDash val="solid"/>
-          </a:ln>
-        </p:spPr>
-      </p:sp>
-      <p:sp>
-        <p:nvSpPr>
-          <p:cNvPr id="34" name="Text 32"/>
-          <p:cNvSpPr/>
-          <p:nvPr/>
-        </p:nvSpPr>
-        <p:spPr>
-          <a:xfrm>
-            <a:off x="365760" y="2825496"/>
-            <a:ext cx="2468880" cy="402336"/>
+              <a:t>Sample words:</a:t>
+            </a:r>
+            <a:endParaRPr lang="en-US" sz="1200" dirty="0"/>
+          </a:p>
+        </p:txBody>
+      </p:sp>
+      <p:sp>
+        <p:nvSpPr>
+          <p:cNvPr id="39" name="Shape 37"/>
+          <p:cNvSpPr/>
+          <p:nvPr/>
+        </p:nvSpPr>
+        <p:spPr>
+          <a:xfrm>
+            <a:off x="365760" y="4023360"/>
+            <a:ext cx="2011680" cy="402336"/>
+          </a:xfrm>
+          <a:prstGeom prst="rect">
+            <a:avLst>
+              <a:gd name="adj" fmla="val 13636"/>
+            </a:avLst>
+          </a:prstGeom>
+          <a:solidFill>
+            <a:srgbClr val="EEF2FF"/>
+          </a:solidFill>
+          <a:ln w="12700">
+            <a:solidFill>
+              <a:srgbClr val="6366F1"/>
+            </a:solidFill>
+            <a:prstDash val="solid"/>
+          </a:ln>
+        </p:spPr>
+      </p:sp>
+      <p:sp>
+        <p:nvSpPr>
+          <p:cNvPr id="40" name="Text 38"/>
+          <p:cNvSpPr/>
+          <p:nvPr/>
+        </p:nvSpPr>
+        <p:spPr>
+          <a:xfrm>
+            <a:off x="365760" y="4023360"/>
+            <a:ext cx="2011680" cy="402336"/>
           </a:xfrm>
           <a:prstGeom prst="rect">
             <a:avLst/>
@@ -33717,80 +34578,57 @@
               <a:buNone/>
             </a:pPr>
             <a:r>
-              <a:rPr lang="en-US" sz="1300" b="1" dirty="0">
-                <a:solidFill>
-                  <a:srgbClr val="4C1D95"/>
+              <a:rPr lang="en-US" sz="1200" b="1" dirty="0">
+                <a:solidFill>
+                  <a:srgbClr val="4338CA"/>
                 </a:solidFill>
                 <a:latin typeface="Trebuchet MS" pitchFamily="34" charset="0"/>
                 <a:ea typeface="Trebuchet MS" pitchFamily="34" charset="-122"/>
                 <a:cs typeface="Trebuchet MS" pitchFamily="34" charset="-120"/>
               </a:rPr>
-              <a:t>mid-</a:t>
-            </a:r>
-            <a:endParaRPr lang="en-US" sz="1300" dirty="0"/>
-          </a:p>
-        </p:txBody>
-      </p:sp>
-      <p:sp>
-        <p:nvSpPr>
-          <p:cNvPr id="35" name="Shape 33"/>
-          <p:cNvSpPr/>
-          <p:nvPr/>
-        </p:nvSpPr>
-        <p:spPr>
-          <a:xfrm>
-            <a:off x="2971800" y="2825496"/>
-            <a:ext cx="2834640" cy="402336"/>
-          </a:xfrm>
-          <a:prstGeom prst="rect">
-            <a:avLst/>
-          </a:prstGeom>
-          <a:solidFill>
-            <a:srgbClr val="F1F5F9"/>
-          </a:solidFill>
-          <a:ln w="12700">
-            <a:solidFill>
-              <a:srgbClr val="E2E8F0"/>
-            </a:solidFill>
-            <a:prstDash val="solid"/>
-          </a:ln>
-        </p:spPr>
-      </p:sp>
-      <p:sp>
-        <p:nvSpPr>
-          <p:cNvPr id="36" name="Shape 34"/>
-          <p:cNvSpPr/>
-          <p:nvPr/>
-        </p:nvSpPr>
-        <p:spPr>
-          <a:xfrm>
-            <a:off x="5943600" y="2825496"/>
-            <a:ext cx="2834640" cy="402336"/>
-          </a:xfrm>
-          <a:prstGeom prst="rect">
-            <a:avLst/>
-          </a:prstGeom>
-          <a:solidFill>
-            <a:srgbClr val="FCE7F3"/>
-          </a:solidFill>
-          <a:ln w="12700">
-            <a:solidFill>
-              <a:srgbClr val="E2E8F0"/>
-            </a:solidFill>
-            <a:prstDash val="solid"/>
-          </a:ln>
-        </p:spPr>
-      </p:sp>
-      <p:sp>
-        <p:nvSpPr>
-          <p:cNvPr id="37" name="Text 35"/>
-          <p:cNvSpPr/>
-          <p:nvPr/>
-        </p:nvSpPr>
-        <p:spPr>
-          <a:xfrm>
-            <a:off x="5943600" y="2825496"/>
-            <a:ext cx="2834640" cy="402336"/>
+              <a:t>dark</a:t>
+            </a:r>
+            <a:endParaRPr lang="en-US" sz="1200" dirty="0"/>
+          </a:p>
+        </p:txBody>
+      </p:sp>
+      <p:sp>
+        <p:nvSpPr>
+          <p:cNvPr id="41" name="Shape 39"/>
+          <p:cNvSpPr/>
+          <p:nvPr/>
+        </p:nvSpPr>
+        <p:spPr>
+          <a:xfrm>
+            <a:off x="2542032" y="4023360"/>
+            <a:ext cx="2011680" cy="402336"/>
+          </a:xfrm>
+          <a:prstGeom prst="rect">
+            <a:avLst>
+              <a:gd name="adj" fmla="val 13636"/>
+            </a:avLst>
+          </a:prstGeom>
+          <a:solidFill>
+            <a:srgbClr val="EEF2FF"/>
+          </a:solidFill>
+          <a:ln w="12700">
+            <a:solidFill>
+              <a:srgbClr val="6366F1"/>
+            </a:solidFill>
+            <a:prstDash val="solid"/>
+          </a:ln>
+        </p:spPr>
+      </p:sp>
+      <p:sp>
+        <p:nvSpPr>
+          <p:cNvPr id="42" name="Text 40"/>
+          <p:cNvSpPr/>
+          <p:nvPr/>
+        </p:nvSpPr>
+        <p:spPr>
+          <a:xfrm>
+            <a:off x="2542032" y="4023360"/>
+            <a:ext cx="2011680" cy="402336"/>
           </a:xfrm>
           <a:prstGeom prst="rect">
             <a:avLst/>
@@ -33806,55 +34644,57 @@
               <a:buNone/>
             </a:pPr>
             <a:r>
-              <a:rPr lang="en-US" sz="1300" b="1" dirty="0">
-                <a:solidFill>
-                  <a:srgbClr val="9D174D"/>
+              <a:rPr lang="en-US" sz="1200" b="1" dirty="0">
+                <a:solidFill>
+                  <a:srgbClr val="4338CA"/>
                 </a:solidFill>
                 <a:latin typeface="Trebuchet MS" pitchFamily="34" charset="0"/>
                 <a:ea typeface="Trebuchet MS" pitchFamily="34" charset="-122"/>
                 <a:cs typeface="Trebuchet MS" pitchFamily="34" charset="-120"/>
               </a:rPr>
-              <a:t>-ish</a:t>
-            </a:r>
-            <a:endParaRPr lang="en-US" sz="1300" dirty="0"/>
-          </a:p>
-        </p:txBody>
-      </p:sp>
-      <p:sp>
-        <p:nvSpPr>
-          <p:cNvPr id="38" name="Shape 36"/>
-          <p:cNvSpPr/>
-          <p:nvPr/>
-        </p:nvSpPr>
-        <p:spPr>
-          <a:xfrm>
-            <a:off x="365760" y="3246120"/>
-            <a:ext cx="2468880" cy="402336"/>
-          </a:xfrm>
-          <a:prstGeom prst="rect">
-            <a:avLst/>
-          </a:prstGeom>
-          <a:solidFill>
-            <a:srgbClr val="DDD6FE"/>
-          </a:solidFill>
-          <a:ln w="12700">
-            <a:solidFill>
-              <a:srgbClr val="E2E8F0"/>
-            </a:solidFill>
-            <a:prstDash val="solid"/>
-          </a:ln>
-        </p:spPr>
-      </p:sp>
-      <p:sp>
-        <p:nvSpPr>
-          <p:cNvPr id="39" name="Text 37"/>
-          <p:cNvSpPr/>
-          <p:nvPr/>
-        </p:nvSpPr>
-        <p:spPr>
-          <a:xfrm>
-            <a:off x="365760" y="3246120"/>
-            <a:ext cx="2468880" cy="402336"/>
+              <a:t>darken</a:t>
+            </a:r>
+            <a:endParaRPr lang="en-US" sz="1200" dirty="0"/>
+          </a:p>
+        </p:txBody>
+      </p:sp>
+      <p:sp>
+        <p:nvSpPr>
+          <p:cNvPr id="43" name="Shape 41"/>
+          <p:cNvSpPr/>
+          <p:nvPr/>
+        </p:nvSpPr>
+        <p:spPr>
+          <a:xfrm>
+            <a:off x="4718304" y="4023360"/>
+            <a:ext cx="2011680" cy="402336"/>
+          </a:xfrm>
+          <a:prstGeom prst="rect">
+            <a:avLst>
+              <a:gd name="adj" fmla="val 13636"/>
+            </a:avLst>
+          </a:prstGeom>
+          <a:solidFill>
+            <a:srgbClr val="EEF2FF"/>
+          </a:solidFill>
+          <a:ln w="12700">
+            <a:solidFill>
+              <a:srgbClr val="6366F1"/>
+            </a:solidFill>
+            <a:prstDash val="solid"/>
+          </a:ln>
+        </p:spPr>
+      </p:sp>
+      <p:sp>
+        <p:nvSpPr>
+          <p:cNvPr id="44" name="Text 42"/>
+          <p:cNvSpPr/>
+          <p:nvPr/>
+        </p:nvSpPr>
+        <p:spPr>
+          <a:xfrm>
+            <a:off x="4718304" y="4023360"/>
+            <a:ext cx="2011680" cy="402336"/>
           </a:xfrm>
           <a:prstGeom prst="rect">
             <a:avLst/>
@@ -33870,671 +34710,15 @@
               <a:buNone/>
             </a:pPr>
             <a:r>
-              <a:rPr lang="en-US" sz="1300" b="1" dirty="0">
-                <a:solidFill>
-                  <a:srgbClr val="4C1D95"/>
+              <a:rPr lang="en-US" sz="1200" b="1" dirty="0">
+                <a:solidFill>
+                  <a:srgbClr val="4338CA"/>
                 </a:solidFill>
                 <a:latin typeface="Trebuchet MS" pitchFamily="34" charset="0"/>
                 <a:ea typeface="Trebuchet MS" pitchFamily="34" charset="-122"/>
                 <a:cs typeface="Trebuchet MS" pitchFamily="34" charset="-120"/>
               </a:rPr>
-              <a:t>stark-</a:t>
-            </a:r>
-            <a:endParaRPr lang="en-US" sz="1300" dirty="0"/>
-          </a:p>
-        </p:txBody>
-      </p:sp>
-      <p:sp>
-        <p:nvSpPr>
-          <p:cNvPr id="40" name="Shape 38"/>
-          <p:cNvSpPr/>
-          <p:nvPr/>
-        </p:nvSpPr>
-        <p:spPr>
-          <a:xfrm>
-            <a:off x="2971800" y="3246120"/>
-            <a:ext cx="2834640" cy="402336"/>
-          </a:xfrm>
-          <a:prstGeom prst="rect">
-            <a:avLst/>
-          </a:prstGeom>
-          <a:solidFill>
-            <a:srgbClr val="F8FAFC"/>
-          </a:solidFill>
-          <a:ln w="12700">
-            <a:solidFill>
-              <a:srgbClr val="E2E8F0"/>
-            </a:solidFill>
-            <a:prstDash val="solid"/>
-          </a:ln>
-        </p:spPr>
-      </p:sp>
-      <p:sp>
-        <p:nvSpPr>
-          <p:cNvPr id="41" name="Shape 39"/>
-          <p:cNvSpPr/>
-          <p:nvPr/>
-        </p:nvSpPr>
-        <p:spPr>
-          <a:xfrm>
-            <a:off x="5943600" y="3246120"/>
-            <a:ext cx="2834640" cy="402336"/>
-          </a:xfrm>
-          <a:prstGeom prst="rect">
-            <a:avLst/>
-          </a:prstGeom>
-          <a:solidFill>
-            <a:srgbClr val="FCE7F3"/>
-          </a:solidFill>
-          <a:ln w="12700">
-            <a:solidFill>
-              <a:srgbClr val="E2E8F0"/>
-            </a:solidFill>
-            <a:prstDash val="solid"/>
-          </a:ln>
-        </p:spPr>
-      </p:sp>
-      <p:sp>
-        <p:nvSpPr>
-          <p:cNvPr id="42" name="Text 40"/>
-          <p:cNvSpPr/>
-          <p:nvPr/>
-        </p:nvSpPr>
-        <p:spPr>
-          <a:xfrm>
-            <a:off x="5943600" y="3246120"/>
-            <a:ext cx="2834640" cy="402336"/>
-          </a:xfrm>
-          <a:prstGeom prst="rect">
-            <a:avLst/>
-          </a:prstGeom>
-          <a:noFill/>
-          <a:ln/>
-        </p:spPr>
-        <p:txBody>
-          <a:bodyPr wrap="square" lIns="0" tIns="0" rIns="0" bIns="0" rtlCol="0" anchor="ctr"/>
-          <a:lstStyle/>
-          <a:p>
-            <a:pPr algn="ctr" indent="0" marL="0">
-              <a:buNone/>
-            </a:pPr>
-            <a:r>
-              <a:rPr lang="en-US" sz="1300" b="1" dirty="0">
-                <a:solidFill>
-                  <a:srgbClr val="9D174D"/>
-                </a:solidFill>
-                <a:latin typeface="Trebuchet MS" pitchFamily="34" charset="0"/>
-                <a:ea typeface="Trebuchet MS" pitchFamily="34" charset="-122"/>
-                <a:cs typeface="Trebuchet MS" pitchFamily="34" charset="-120"/>
-              </a:rPr>
-              <a:t>-ened</a:t>
-            </a:r>
-            <a:endParaRPr lang="en-US" sz="1300" dirty="0"/>
-          </a:p>
-        </p:txBody>
-      </p:sp>
-      <p:sp>
-        <p:nvSpPr>
-          <p:cNvPr id="43" name="Text 41"/>
-          <p:cNvSpPr/>
-          <p:nvPr/>
-        </p:nvSpPr>
-        <p:spPr>
-          <a:xfrm>
-            <a:off x="365760" y="3611880"/>
-            <a:ext cx="1828800" cy="347472"/>
-          </a:xfrm>
-          <a:prstGeom prst="rect">
-            <a:avLst/>
-          </a:prstGeom>
-          <a:noFill/>
-          <a:ln/>
-        </p:spPr>
-        <p:txBody>
-          <a:bodyPr wrap="square" lIns="0" tIns="0" rIns="0" bIns="0" rtlCol="0" anchor="ctr"/>
-          <a:lstStyle/>
-          <a:p>
-            <a:pPr algn="l" indent="0" marL="0">
-              <a:buNone/>
-            </a:pPr>
-            <a:r>
-              <a:rPr lang="en-US" sz="1200" b="1" dirty="0">
-                <a:solidFill>
-                  <a:srgbClr val="0F172A"/>
-                </a:solidFill>
-                <a:latin typeface="Trebuchet MS" pitchFamily="34" charset="0"/>
-                <a:ea typeface="Trebuchet MS" pitchFamily="34" charset="-122"/>
-                <a:cs typeface="Trebuchet MS" pitchFamily="34" charset="-120"/>
-              </a:rPr>
-              <a:t>Sample words:</a:t>
-            </a:r>
-            <a:endParaRPr lang="en-US" sz="1200" dirty="0"/>
-          </a:p>
-        </p:txBody>
-      </p:sp>
-      <p:sp>
-        <p:nvSpPr>
-          <p:cNvPr id="44" name="Shape 42"/>
-          <p:cNvSpPr/>
-          <p:nvPr/>
-        </p:nvSpPr>
-        <p:spPr>
-          <a:xfrm>
-            <a:off x="365760" y="4023360"/>
-            <a:ext cx="2011680" cy="402336"/>
-          </a:xfrm>
-          <a:prstGeom prst="rect">
-            <a:avLst>
-              <a:gd name="adj" fmla="val 13636"/>
-            </a:avLst>
-          </a:prstGeom>
-          <a:solidFill>
-            <a:srgbClr val="EEF2FF"/>
-          </a:solidFill>
-          <a:ln w="12700">
-            <a:solidFill>
-              <a:srgbClr val="6366F1"/>
-            </a:solidFill>
-            <a:prstDash val="solid"/>
-          </a:ln>
-        </p:spPr>
-      </p:sp>
-      <p:sp>
-        <p:nvSpPr>
-          <p:cNvPr id="45" name="Text 43"/>
-          <p:cNvSpPr/>
-          <p:nvPr/>
-        </p:nvSpPr>
-        <p:spPr>
-          <a:xfrm>
-            <a:off x="365760" y="4023360"/>
-            <a:ext cx="2011680" cy="402336"/>
-          </a:xfrm>
-          <a:prstGeom prst="rect">
-            <a:avLst/>
-          </a:prstGeom>
-          <a:noFill/>
-          <a:ln/>
-        </p:spPr>
-        <p:txBody>
-          <a:bodyPr wrap="square" lIns="0" tIns="0" rIns="0" bIns="0" rtlCol="0" anchor="ctr"/>
-          <a:lstStyle/>
-          <a:p>
-            <a:pPr algn="ctr" indent="0" marL="0">
-              <a:buNone/>
-            </a:pPr>
-            <a:r>
-              <a:rPr lang="en-US" sz="1200" b="1" dirty="0">
-                <a:solidFill>
-                  <a:srgbClr val="4338CA"/>
-                </a:solidFill>
-                <a:latin typeface="Trebuchet MS" pitchFamily="34" charset="0"/>
-                <a:ea typeface="Trebuchet MS" pitchFamily="34" charset="-122"/>
-                <a:cs typeface="Trebuchet MS" pitchFamily="34" charset="-120"/>
-              </a:rPr>
-              <a:t>darkness</a:t>
-            </a:r>
-            <a:endParaRPr lang="en-US" sz="1200" dirty="0"/>
-          </a:p>
-        </p:txBody>
-      </p:sp>
-      <p:sp>
-        <p:nvSpPr>
-          <p:cNvPr id="46" name="Shape 44"/>
-          <p:cNvSpPr/>
-          <p:nvPr/>
-        </p:nvSpPr>
-        <p:spPr>
-          <a:xfrm>
-            <a:off x="2542032" y="4023360"/>
-            <a:ext cx="2011680" cy="402336"/>
-          </a:xfrm>
-          <a:prstGeom prst="rect">
-            <a:avLst>
-              <a:gd name="adj" fmla="val 13636"/>
-            </a:avLst>
-          </a:prstGeom>
-          <a:solidFill>
-            <a:srgbClr val="EEF2FF"/>
-          </a:solidFill>
-          <a:ln w="12700">
-            <a:solidFill>
-              <a:srgbClr val="6366F1"/>
-            </a:solidFill>
-            <a:prstDash val="solid"/>
-          </a:ln>
-        </p:spPr>
-      </p:sp>
-      <p:sp>
-        <p:nvSpPr>
-          <p:cNvPr id="47" name="Text 45"/>
-          <p:cNvSpPr/>
-          <p:nvPr/>
-        </p:nvSpPr>
-        <p:spPr>
-          <a:xfrm>
-            <a:off x="2542032" y="4023360"/>
-            <a:ext cx="2011680" cy="402336"/>
-          </a:xfrm>
-          <a:prstGeom prst="rect">
-            <a:avLst/>
-          </a:prstGeom>
-          <a:noFill/>
-          <a:ln/>
-        </p:spPr>
-        <p:txBody>
-          <a:bodyPr wrap="square" lIns="0" tIns="0" rIns="0" bIns="0" rtlCol="0" anchor="ctr"/>
-          <a:lstStyle/>
-          <a:p>
-            <a:pPr algn="ctr" indent="0" marL="0">
-              <a:buNone/>
-            </a:pPr>
-            <a:r>
-              <a:rPr lang="en-US" sz="1200" b="1" dirty="0">
-                <a:solidFill>
-                  <a:srgbClr val="4338CA"/>
-                </a:solidFill>
-                <a:latin typeface="Trebuchet MS" pitchFamily="34" charset="0"/>
-                <a:ea typeface="Trebuchet MS" pitchFamily="34" charset="-122"/>
-                <a:cs typeface="Trebuchet MS" pitchFamily="34" charset="-120"/>
-              </a:rPr>
-              <a:t>darken</a:t>
-            </a:r>
-            <a:endParaRPr lang="en-US" sz="1200" dirty="0"/>
-          </a:p>
-        </p:txBody>
-      </p:sp>
-      <p:sp>
-        <p:nvSpPr>
-          <p:cNvPr id="48" name="Shape 46"/>
-          <p:cNvSpPr/>
-          <p:nvPr/>
-        </p:nvSpPr>
-        <p:spPr>
-          <a:xfrm>
-            <a:off x="4718304" y="4023360"/>
-            <a:ext cx="2011680" cy="402336"/>
-          </a:xfrm>
-          <a:prstGeom prst="rect">
-            <a:avLst>
-              <a:gd name="adj" fmla="val 13636"/>
-            </a:avLst>
-          </a:prstGeom>
-          <a:solidFill>
-            <a:srgbClr val="EEF2FF"/>
-          </a:solidFill>
-          <a:ln w="12700">
-            <a:solidFill>
-              <a:srgbClr val="6366F1"/>
-            </a:solidFill>
-            <a:prstDash val="solid"/>
-          </a:ln>
-        </p:spPr>
-      </p:sp>
-      <p:sp>
-        <p:nvSpPr>
-          <p:cNvPr id="49" name="Text 47"/>
-          <p:cNvSpPr/>
-          <p:nvPr/>
-        </p:nvSpPr>
-        <p:spPr>
-          <a:xfrm>
-            <a:off x="4718304" y="4023360"/>
-            <a:ext cx="2011680" cy="402336"/>
-          </a:xfrm>
-          <a:prstGeom prst="rect">
-            <a:avLst/>
-          </a:prstGeom>
-          <a:noFill/>
-          <a:ln/>
-        </p:spPr>
-        <p:txBody>
-          <a:bodyPr wrap="square" lIns="0" tIns="0" rIns="0" bIns="0" rtlCol="0" anchor="ctr"/>
-          <a:lstStyle/>
-          <a:p>
-            <a:pPr algn="ctr" indent="0" marL="0">
-              <a:buNone/>
-            </a:pPr>
-            <a:r>
-              <a:rPr lang="en-US" sz="1200" b="1" dirty="0">
-                <a:solidFill>
-                  <a:srgbClr val="4338CA"/>
-                </a:solidFill>
-                <a:latin typeface="Trebuchet MS" pitchFamily="34" charset="0"/>
-                <a:ea typeface="Trebuchet MS" pitchFamily="34" charset="-122"/>
-                <a:cs typeface="Trebuchet MS" pitchFamily="34" charset="-120"/>
-              </a:rPr>
-              <a:t>darkly</a:t>
-            </a:r>
-            <a:endParaRPr lang="en-US" sz="1200" dirty="0"/>
-          </a:p>
-        </p:txBody>
-      </p:sp>
-      <p:sp>
-        <p:nvSpPr>
-          <p:cNvPr id="50" name="Shape 48"/>
-          <p:cNvSpPr/>
-          <p:nvPr/>
-        </p:nvSpPr>
-        <p:spPr>
-          <a:xfrm>
-            <a:off x="6894576" y="4023360"/>
-            <a:ext cx="2011680" cy="402336"/>
-          </a:xfrm>
-          <a:prstGeom prst="rect">
-            <a:avLst>
-              <a:gd name="adj" fmla="val 13636"/>
-            </a:avLst>
-          </a:prstGeom>
-          <a:solidFill>
-            <a:srgbClr val="EEF2FF"/>
-          </a:solidFill>
-          <a:ln w="12700">
-            <a:solidFill>
-              <a:srgbClr val="6366F1"/>
-            </a:solidFill>
-            <a:prstDash val="solid"/>
-          </a:ln>
-        </p:spPr>
-      </p:sp>
-      <p:sp>
-        <p:nvSpPr>
-          <p:cNvPr id="51" name="Text 49"/>
-          <p:cNvSpPr/>
-          <p:nvPr/>
-        </p:nvSpPr>
-        <p:spPr>
-          <a:xfrm>
-            <a:off x="6894576" y="4023360"/>
-            <a:ext cx="2011680" cy="402336"/>
-          </a:xfrm>
-          <a:prstGeom prst="rect">
-            <a:avLst/>
-          </a:prstGeom>
-          <a:noFill/>
-          <a:ln/>
-        </p:spPr>
-        <p:txBody>
-          <a:bodyPr wrap="square" lIns="0" tIns="0" rIns="0" bIns="0" rtlCol="0" anchor="ctr"/>
-          <a:lstStyle/>
-          <a:p>
-            <a:pPr algn="ctr" indent="0" marL="0">
-              <a:buNone/>
-            </a:pPr>
-            <a:r>
-              <a:rPr lang="en-US" sz="1200" b="1" dirty="0">
-                <a:solidFill>
-                  <a:srgbClr val="4338CA"/>
-                </a:solidFill>
-                <a:latin typeface="Trebuchet MS" pitchFamily="34" charset="0"/>
-                <a:ea typeface="Trebuchet MS" pitchFamily="34" charset="-122"/>
-                <a:cs typeface="Trebuchet MS" pitchFamily="34" charset="-120"/>
-              </a:rPr>
-              <a:t>darkish</a:t>
-            </a:r>
-            <a:endParaRPr lang="en-US" sz="1200" dirty="0"/>
-          </a:p>
-        </p:txBody>
-      </p:sp>
-      <p:sp>
-        <p:nvSpPr>
-          <p:cNvPr id="52" name="Shape 50"/>
-          <p:cNvSpPr/>
-          <p:nvPr/>
-        </p:nvSpPr>
-        <p:spPr>
-          <a:xfrm>
-            <a:off x="365760" y="4498848"/>
-            <a:ext cx="2011680" cy="402336"/>
-          </a:xfrm>
-          <a:prstGeom prst="rect">
-            <a:avLst>
-              <a:gd name="adj" fmla="val 13636"/>
-            </a:avLst>
-          </a:prstGeom>
-          <a:solidFill>
-            <a:srgbClr val="EEF2FF"/>
-          </a:solidFill>
-          <a:ln w="12700">
-            <a:solidFill>
-              <a:srgbClr val="6366F1"/>
-            </a:solidFill>
-            <a:prstDash val="solid"/>
-          </a:ln>
-        </p:spPr>
-      </p:sp>
-      <p:sp>
-        <p:nvSpPr>
-          <p:cNvPr id="53" name="Text 51"/>
-          <p:cNvSpPr/>
-          <p:nvPr/>
-        </p:nvSpPr>
-        <p:spPr>
-          <a:xfrm>
-            <a:off x="365760" y="4498848"/>
-            <a:ext cx="2011680" cy="402336"/>
-          </a:xfrm>
-          <a:prstGeom prst="rect">
-            <a:avLst/>
-          </a:prstGeom>
-          <a:noFill/>
-          <a:ln/>
-        </p:spPr>
-        <p:txBody>
-          <a:bodyPr wrap="square" lIns="0" tIns="0" rIns="0" bIns="0" rtlCol="0" anchor="ctr"/>
-          <a:lstStyle/>
-          <a:p>
-            <a:pPr algn="ctr" indent="0" marL="0">
-              <a:buNone/>
-            </a:pPr>
-            <a:r>
-              <a:rPr lang="en-US" sz="1200" b="1" dirty="0">
-                <a:solidFill>
-                  <a:srgbClr val="4338CA"/>
-                </a:solidFill>
-                <a:latin typeface="Trebuchet MS" pitchFamily="34" charset="0"/>
-                <a:ea typeface="Trebuchet MS" pitchFamily="34" charset="-122"/>
-                <a:cs typeface="Trebuchet MS" pitchFamily="34" charset="-120"/>
-              </a:rPr>
-              <a:t>darkened</a:t>
-            </a:r>
-            <a:endParaRPr lang="en-US" sz="1200" dirty="0"/>
-          </a:p>
-        </p:txBody>
-      </p:sp>
-      <p:sp>
-        <p:nvSpPr>
-          <p:cNvPr id="54" name="Shape 52"/>
-          <p:cNvSpPr/>
-          <p:nvPr/>
-        </p:nvSpPr>
-        <p:spPr>
-          <a:xfrm>
-            <a:off x="2542032" y="4498848"/>
-            <a:ext cx="2011680" cy="402336"/>
-          </a:xfrm>
-          <a:prstGeom prst="rect">
-            <a:avLst>
-              <a:gd name="adj" fmla="val 13636"/>
-            </a:avLst>
-          </a:prstGeom>
-          <a:solidFill>
-            <a:srgbClr val="EEF2FF"/>
-          </a:solidFill>
-          <a:ln w="12700">
-            <a:solidFill>
-              <a:srgbClr val="6366F1"/>
-            </a:solidFill>
-            <a:prstDash val="solid"/>
-          </a:ln>
-        </p:spPr>
-      </p:sp>
-      <p:sp>
-        <p:nvSpPr>
-          <p:cNvPr id="55" name="Text 53"/>
-          <p:cNvSpPr/>
-          <p:nvPr/>
-        </p:nvSpPr>
-        <p:spPr>
-          <a:xfrm>
-            <a:off x="2542032" y="4498848"/>
-            <a:ext cx="2011680" cy="402336"/>
-          </a:xfrm>
-          <a:prstGeom prst="rect">
-            <a:avLst/>
-          </a:prstGeom>
-          <a:noFill/>
-          <a:ln/>
-        </p:spPr>
-        <p:txBody>
-          <a:bodyPr wrap="square" lIns="0" tIns="0" rIns="0" bIns="0" rtlCol="0" anchor="ctr"/>
-          <a:lstStyle/>
-          <a:p>
-            <a:pPr algn="ctr" indent="0" marL="0">
-              <a:buNone/>
-            </a:pPr>
-            <a:r>
-              <a:rPr lang="en-US" sz="1200" b="1" dirty="0">
-                <a:solidFill>
-                  <a:srgbClr val="4338CA"/>
-                </a:solidFill>
-                <a:latin typeface="Trebuchet MS" pitchFamily="34" charset="0"/>
-                <a:ea typeface="Trebuchet MS" pitchFamily="34" charset="-122"/>
-                <a:cs typeface="Trebuchet MS" pitchFamily="34" charset="-120"/>
-              </a:rPr>
-              <a:t>afterdark</a:t>
-            </a:r>
-            <a:endParaRPr lang="en-US" sz="1200" dirty="0"/>
-          </a:p>
-        </p:txBody>
-      </p:sp>
-      <p:sp>
-        <p:nvSpPr>
-          <p:cNvPr id="56" name="Shape 54"/>
-          <p:cNvSpPr/>
-          <p:nvPr/>
-        </p:nvSpPr>
-        <p:spPr>
-          <a:xfrm>
-            <a:off x="4718304" y="4498848"/>
-            <a:ext cx="2011680" cy="402336"/>
-          </a:xfrm>
-          <a:prstGeom prst="rect">
-            <a:avLst>
-              <a:gd name="adj" fmla="val 13636"/>
-            </a:avLst>
-          </a:prstGeom>
-          <a:solidFill>
-            <a:srgbClr val="EEF2FF"/>
-          </a:solidFill>
-          <a:ln w="12700">
-            <a:solidFill>
-              <a:srgbClr val="6366F1"/>
-            </a:solidFill>
-            <a:prstDash val="solid"/>
-          </a:ln>
-        </p:spPr>
-      </p:sp>
-      <p:sp>
-        <p:nvSpPr>
-          <p:cNvPr id="57" name="Text 55"/>
-          <p:cNvSpPr/>
-          <p:nvPr/>
-        </p:nvSpPr>
-        <p:spPr>
-          <a:xfrm>
-            <a:off x="4718304" y="4498848"/>
-            <a:ext cx="2011680" cy="402336"/>
-          </a:xfrm>
-          <a:prstGeom prst="rect">
-            <a:avLst/>
-          </a:prstGeom>
-          <a:noFill/>
-          <a:ln/>
-        </p:spPr>
-        <p:txBody>
-          <a:bodyPr wrap="square" lIns="0" tIns="0" rIns="0" bIns="0" rtlCol="0" anchor="ctr"/>
-          <a:lstStyle/>
-          <a:p>
-            <a:pPr algn="ctr" indent="0" marL="0">
-              <a:buNone/>
-            </a:pPr>
-            <a:r>
-              <a:rPr lang="en-US" sz="1200" b="1" dirty="0">
-                <a:solidFill>
-                  <a:srgbClr val="4338CA"/>
-                </a:solidFill>
-                <a:latin typeface="Trebuchet MS" pitchFamily="34" charset="0"/>
-                <a:ea typeface="Trebuchet MS" pitchFamily="34" charset="-122"/>
-                <a:cs typeface="Trebuchet MS" pitchFamily="34" charset="-120"/>
-              </a:rPr>
-              <a:t>midark</a:t>
-            </a:r>
-            <a:endParaRPr lang="en-US" sz="1200" dirty="0"/>
-          </a:p>
-        </p:txBody>
-      </p:sp>
-      <p:sp>
-        <p:nvSpPr>
-          <p:cNvPr id="58" name="Shape 56"/>
-          <p:cNvSpPr/>
-          <p:nvPr/>
-        </p:nvSpPr>
-        <p:spPr>
-          <a:xfrm>
-            <a:off x="6894576" y="4498848"/>
-            <a:ext cx="2011680" cy="402336"/>
-          </a:xfrm>
-          <a:prstGeom prst="rect">
-            <a:avLst>
-              <a:gd name="adj" fmla="val 13636"/>
-            </a:avLst>
-          </a:prstGeom>
-          <a:solidFill>
-            <a:srgbClr val="EEF2FF"/>
-          </a:solidFill>
-          <a:ln w="12700">
-            <a:solidFill>
-              <a:srgbClr val="6366F1"/>
-            </a:solidFill>
-            <a:prstDash val="solid"/>
-          </a:ln>
-        </p:spPr>
-      </p:sp>
-      <p:sp>
-        <p:nvSpPr>
-          <p:cNvPr id="59" name="Text 57"/>
-          <p:cNvSpPr/>
-          <p:nvPr/>
-        </p:nvSpPr>
-        <p:spPr>
-          <a:xfrm>
-            <a:off x="6894576" y="4498848"/>
-            <a:ext cx="2011680" cy="402336"/>
-          </a:xfrm>
-          <a:prstGeom prst="rect">
-            <a:avLst/>
-          </a:prstGeom>
-          <a:noFill/>
-          <a:ln/>
-        </p:spPr>
-        <p:txBody>
-          <a:bodyPr wrap="square" lIns="0" tIns="0" rIns="0" bIns="0" rtlCol="0" anchor="ctr"/>
-          <a:lstStyle/>
-          <a:p>
-            <a:pPr algn="ctr" indent="0" marL="0">
-              <a:buNone/>
-            </a:pPr>
-            <a:r>
-              <a:rPr lang="en-US" sz="1200" b="1" dirty="0">
-                <a:solidFill>
-                  <a:srgbClr val="4338CA"/>
-                </a:solidFill>
-                <a:latin typeface="Trebuchet MS" pitchFamily="34" charset="0"/>
-                <a:ea typeface="Trebuchet MS" pitchFamily="34" charset="-122"/>
-                <a:cs typeface="Trebuchet MS" pitchFamily="34" charset="-120"/>
-              </a:rPr>
-              <a:t>pitch-dark</a:t>
+              <a:t>darker</a:t>
             </a:r>
             <a:endParaRPr lang="en-US" sz="1200" dirty="0"/>
           </a:p>
@@ -34826,7 +35010,7 @@
                 <a:ea typeface="Calibri" pitchFamily="34" charset="-122"/>
                 <a:cs typeface="Calibri" pitchFamily="34" charset="-120"/>
               </a:rPr>
-              <a:t>Word Labs  •  wordlabs.app  •  Root: 'dark' = absence of light</a:t>
+              <a:t>Word Labs  •  wordlabs.app  •  Root: 'dark' = with little or no light</a:t>
             </a:r>
             <a:endParaRPr lang="en-US" sz="800" dirty="0"/>
           </a:p>
@@ -34990,7 +35174,7 @@
                 <a:ea typeface="Calibri" pitchFamily="34" charset="-122"/>
                 <a:cs typeface="Calibri" pitchFamily="34" charset="-120"/>
               </a:rPr>
-              <a:t>The core part of a word carrying its basic meaning. For example, 'dark' means 'absence of light'.</a:t>
+              <a:t>The core part of a word carrying its basic meaning. For example, 'dark' means 'with little or no light'.</a:t>
             </a:r>
             <a:endParaRPr lang="en-US" sz="1350" dirty="0"/>
           </a:p>
@@ -35610,7 +35794,7 @@
                 <a:ea typeface="Calibri" pitchFamily="34" charset="-122"/>
                 <a:cs typeface="Calibri" pitchFamily="34" charset="-120"/>
               </a:rPr>
-              <a:t>Word Labs  •  wordlabs.app  •  Root: 'dark' = absence of light</a:t>
+              <a:t>Word Labs  •  wordlabs.app  •  Root: 'dark' = with little or no light</a:t>
             </a:r>
             <a:endParaRPr lang="en-US" sz="800" dirty="0"/>
           </a:p>
@@ -35722,7 +35906,7 @@
                 <a:ea typeface="Calibri" pitchFamily="34" charset="-122"/>
                 <a:cs typeface="Calibri" pitchFamily="34" charset="-120"/>
               </a:rPr>
-              <a:t>1.  The word 'darkly' contains the suffix '-ly', which turns dark into an adverb.</a:t>
+              <a:t>1.  'dark' means 'with little or no light'.</a:t>
             </a:r>
             <a:endParaRPr lang="en-US" sz="1300" dirty="0"/>
           </a:p>
@@ -35861,7 +36045,7 @@
                 <a:ea typeface="Calibri" pitchFamily="34" charset="-122"/>
                 <a:cs typeface="Calibri" pitchFamily="34" charset="-120"/>
               </a:rPr>
-              <a:t>2.  The root 'dark' means full of colour and brightness.</a:t>
+              <a:t>2.  'darken' means 'to make something louder'.</a:t>
             </a:r>
             <a:endParaRPr lang="en-US" sz="1300" dirty="0"/>
           </a:p>
@@ -36000,7 +36184,7 @@
                 <a:ea typeface="Calibri" pitchFamily="34" charset="-122"/>
                 <a:cs typeface="Calibri" pitchFamily="34" charset="-120"/>
               </a:rPr>
-              <a:t>3.  The word 'darkness' is made from the root 'dark' and the suffix '-ness'.</a:t>
+              <a:t>3.  'dark' means 'very fast moving'.</a:t>
             </a:r>
             <a:endParaRPr lang="en-US" sz="1300" dirty="0"/>
           </a:p>
@@ -36023,11 +36207,11 @@
             </a:avLst>
           </a:prstGeom>
           <a:solidFill>
-            <a:srgbClr val="DCFCE7"/>
-          </a:solidFill>
-          <a:ln w="12700">
-            <a:solidFill>
-              <a:srgbClr val="16A34A"/>
+            <a:srgbClr val="FEE2E2"/>
+          </a:solidFill>
+          <a:ln w="12700">
+            <a:solidFill>
+              <a:srgbClr val="DC2626"/>
             </a:solidFill>
             <a:prstDash val="solid"/>
           </a:ln>
@@ -36060,13 +36244,13 @@
             <a:r>
               <a:rPr lang="en-US" sz="1100" b="1" dirty="0">
                 <a:solidFill>
-                  <a:srgbClr val="16A34A"/>
+                  <a:srgbClr val="DC2626"/>
                 </a:solidFill>
                 <a:latin typeface="Trebuchet MS" pitchFamily="34" charset="0"/>
                 <a:ea typeface="Trebuchet MS" pitchFamily="34" charset="-122"/>
                 <a:cs typeface="Trebuchet MS" pitchFamily="34" charset="-120"/>
               </a:rPr>
-              <a:t>TRUE</a:t>
+              <a:t>FALSE</a:t>
             </a:r>
             <a:endParaRPr lang="en-US" sz="1100" dirty="0"/>
           </a:p>
@@ -36139,7 +36323,7 @@
                 <a:ea typeface="Calibri" pitchFamily="34" charset="-122"/>
                 <a:cs typeface="Calibri" pitchFamily="34" charset="-120"/>
               </a:rPr>
-              <a:t>4.  Adding '-en' to 'dark' makes the verb 'darken', meaning to make darker.</a:t>
+              <a:t>4.  'dark' means 'having little or no light'.</a:t>
             </a:r>
             <a:endParaRPr lang="en-US" sz="1300" dirty="0"/>
           </a:p>
@@ -36278,7 +36462,7 @@
                 <a:ea typeface="Calibri" pitchFamily="34" charset="-122"/>
                 <a:cs typeface="Calibri" pitchFamily="34" charset="-120"/>
               </a:rPr>
-              <a:t>5.  The root 'dark' comes from the French language.</a:t>
+              <a:t>5.  'darken' means 'to make or become darker'.</a:t>
             </a:r>
             <a:endParaRPr lang="en-US" sz="1300" dirty="0"/>
           </a:p>
@@ -36301,11 +36485,11 @@
             </a:avLst>
           </a:prstGeom>
           <a:solidFill>
-            <a:srgbClr val="FEE2E2"/>
-          </a:solidFill>
-          <a:ln w="12700">
-            <a:solidFill>
-              <a:srgbClr val="DC2626"/>
+            <a:srgbClr val="DCFCE7"/>
+          </a:solidFill>
+          <a:ln w="12700">
+            <a:solidFill>
+              <a:srgbClr val="16A34A"/>
             </a:solidFill>
             <a:prstDash val="solid"/>
           </a:ln>
@@ -36338,13 +36522,13 @@
             <a:r>
               <a:rPr lang="en-US" sz="1100" b="1" dirty="0">
                 <a:solidFill>
-                  <a:srgbClr val="DC2626"/>
+                  <a:srgbClr val="16A34A"/>
                 </a:solidFill>
                 <a:latin typeface="Trebuchet MS" pitchFamily="34" charset="0"/>
                 <a:ea typeface="Trebuchet MS" pitchFamily="34" charset="-122"/>
                 <a:cs typeface="Trebuchet MS" pitchFamily="34" charset="-120"/>
               </a:rPr>
-              <a:t>FALSE</a:t>
+              <a:t>TRUE</a:t>
             </a:r>
             <a:endParaRPr lang="en-US" sz="1100" dirty="0"/>
           </a:p>
@@ -36636,7 +36820,7 @@
                 <a:ea typeface="Calibri" pitchFamily="34" charset="-122"/>
                 <a:cs typeface="Calibri" pitchFamily="34" charset="-120"/>
               </a:rPr>
-              <a:t>Word Labs  •  wordlabs.app  •  Root: 'dark' = absence of light</a:t>
+              <a:t>Word Labs  •  wordlabs.app  •  Root: 'dark' = with little or no light</a:t>
             </a:r>
             <a:endParaRPr lang="en-US" sz="800" dirty="0"/>
           </a:p>
@@ -36773,7 +36957,7 @@
                 <a:ea typeface="Trebuchet MS" pitchFamily="34" charset="-122"/>
                 <a:cs typeface="Trebuchet MS" pitchFamily="34" charset="-120"/>
               </a:rPr>
-              <a:t>absence of light</a:t>
+              <a:t>with little or no light</a:t>
             </a:r>
             <a:endParaRPr lang="en-US" sz="2000" dirty="0"/>
           </a:p>
@@ -36812,7 +36996,7 @@
                 <a:ea typeface="Calibri" pitchFamily="34" charset="-122"/>
                 <a:cs typeface="Calibri" pitchFamily="34" charset="-120"/>
               </a:rPr>
-              <a:t>Origin: Old English: deorc</a:t>
+              <a:t>Origin: Anglo-Saxon (Old English) root</a:t>
             </a:r>
             <a:endParaRPr lang="en-US" sz="1100" dirty="0"/>
           </a:p>
@@ -36917,7 +37101,7 @@
                 <a:ea typeface="Trebuchet MS" pitchFamily="34" charset="-122"/>
                 <a:cs typeface="Trebuchet MS" pitchFamily="34" charset="-120"/>
               </a:rPr>
-              <a:t>darkness</a:t>
+              <a:t>dark</a:t>
             </a:r>
             <a:endParaRPr lang="en-US" sz="1300" dirty="0"/>
           </a:p>
@@ -37049,271 +37233,7 @@
                 <a:ea typeface="Trebuchet MS" pitchFamily="34" charset="-122"/>
                 <a:cs typeface="Trebuchet MS" pitchFamily="34" charset="-120"/>
               </a:rPr>
-              <a:t>darkly</a:t>
-            </a:r>
-            <a:endParaRPr lang="en-US" sz="1300" dirty="0"/>
-          </a:p>
-        </p:txBody>
-      </p:sp>
-      <p:sp>
-        <p:nvSpPr>
-          <p:cNvPr id="22" name="Shape 20"/>
-          <p:cNvSpPr/>
-          <p:nvPr/>
-        </p:nvSpPr>
-        <p:spPr>
-          <a:xfrm>
-            <a:off x="6812280" y="2743200"/>
-            <a:ext cx="2011680" cy="502920"/>
-          </a:xfrm>
-          <a:prstGeom prst="rect">
-            <a:avLst>
-              <a:gd name="adj" fmla="val 14545"/>
-            </a:avLst>
-          </a:prstGeom>
-          <a:solidFill>
-            <a:srgbClr val="EEF2FF"/>
-          </a:solidFill>
-          <a:ln w="12700">
-            <a:solidFill>
-              <a:srgbClr val="6366F1"/>
-            </a:solidFill>
-            <a:prstDash val="solid"/>
-          </a:ln>
-        </p:spPr>
-      </p:sp>
-      <p:sp>
-        <p:nvSpPr>
-          <p:cNvPr id="23" name="Text 21"/>
-          <p:cNvSpPr/>
-          <p:nvPr/>
-        </p:nvSpPr>
-        <p:spPr>
-          <a:xfrm>
-            <a:off x="6812280" y="2743200"/>
-            <a:ext cx="2011680" cy="502920"/>
-          </a:xfrm>
-          <a:prstGeom prst="rect">
-            <a:avLst/>
-          </a:prstGeom>
-          <a:noFill/>
-          <a:ln/>
-        </p:spPr>
-        <p:txBody>
-          <a:bodyPr wrap="square" lIns="0" tIns="0" rIns="0" bIns="0" rtlCol="0" anchor="ctr"/>
-          <a:lstStyle/>
-          <a:p>
-            <a:pPr algn="ctr" indent="0" marL="0">
-              <a:buNone/>
-            </a:pPr>
-            <a:r>
-              <a:rPr lang="en-US" sz="1300" b="1" dirty="0">
-                <a:solidFill>
-                  <a:srgbClr val="4338CA"/>
-                </a:solidFill>
-                <a:latin typeface="Trebuchet MS" pitchFamily="34" charset="0"/>
-                <a:ea typeface="Trebuchet MS" pitchFamily="34" charset="-122"/>
-                <a:cs typeface="Trebuchet MS" pitchFamily="34" charset="-120"/>
-              </a:rPr>
-              <a:t>darkish</a:t>
-            </a:r>
-            <a:endParaRPr lang="en-US" sz="1300" dirty="0"/>
-          </a:p>
-        </p:txBody>
-      </p:sp>
-      <p:sp>
-        <p:nvSpPr>
-          <p:cNvPr id="24" name="Shape 22"/>
-          <p:cNvSpPr/>
-          <p:nvPr/>
-        </p:nvSpPr>
-        <p:spPr>
-          <a:xfrm>
-            <a:off x="365760" y="3401568"/>
-            <a:ext cx="2011680" cy="502920"/>
-          </a:xfrm>
-          <a:prstGeom prst="rect">
-            <a:avLst>
-              <a:gd name="adj" fmla="val 14545"/>
-            </a:avLst>
-          </a:prstGeom>
-          <a:solidFill>
-            <a:srgbClr val="EEF2FF"/>
-          </a:solidFill>
-          <a:ln w="12700">
-            <a:solidFill>
-              <a:srgbClr val="6366F1"/>
-            </a:solidFill>
-            <a:prstDash val="solid"/>
-          </a:ln>
-        </p:spPr>
-      </p:sp>
-      <p:sp>
-        <p:nvSpPr>
-          <p:cNvPr id="25" name="Text 23"/>
-          <p:cNvSpPr/>
-          <p:nvPr/>
-        </p:nvSpPr>
-        <p:spPr>
-          <a:xfrm>
-            <a:off x="365760" y="3401568"/>
-            <a:ext cx="2011680" cy="502920"/>
-          </a:xfrm>
-          <a:prstGeom prst="rect">
-            <a:avLst/>
-          </a:prstGeom>
-          <a:noFill/>
-          <a:ln/>
-        </p:spPr>
-        <p:txBody>
-          <a:bodyPr wrap="square" lIns="0" tIns="0" rIns="0" bIns="0" rtlCol="0" anchor="ctr"/>
-          <a:lstStyle/>
-          <a:p>
-            <a:pPr algn="ctr" indent="0" marL="0">
-              <a:buNone/>
-            </a:pPr>
-            <a:r>
-              <a:rPr lang="en-US" sz="1300" b="1" dirty="0">
-                <a:solidFill>
-                  <a:srgbClr val="4338CA"/>
-                </a:solidFill>
-                <a:latin typeface="Trebuchet MS" pitchFamily="34" charset="0"/>
-                <a:ea typeface="Trebuchet MS" pitchFamily="34" charset="-122"/>
-                <a:cs typeface="Trebuchet MS" pitchFamily="34" charset="-120"/>
-              </a:rPr>
-              <a:t>darkened</a:t>
-            </a:r>
-            <a:endParaRPr lang="en-US" sz="1300" dirty="0"/>
-          </a:p>
-        </p:txBody>
-      </p:sp>
-      <p:sp>
-        <p:nvSpPr>
-          <p:cNvPr id="26" name="Shape 24"/>
-          <p:cNvSpPr/>
-          <p:nvPr/>
-        </p:nvSpPr>
-        <p:spPr>
-          <a:xfrm>
-            <a:off x="2514600" y="3401568"/>
-            <a:ext cx="2011680" cy="502920"/>
-          </a:xfrm>
-          <a:prstGeom prst="rect">
-            <a:avLst>
-              <a:gd name="adj" fmla="val 14545"/>
-            </a:avLst>
-          </a:prstGeom>
-          <a:solidFill>
-            <a:srgbClr val="EEF2FF"/>
-          </a:solidFill>
-          <a:ln w="12700">
-            <a:solidFill>
-              <a:srgbClr val="6366F1"/>
-            </a:solidFill>
-            <a:prstDash val="solid"/>
-          </a:ln>
-        </p:spPr>
-      </p:sp>
-      <p:sp>
-        <p:nvSpPr>
-          <p:cNvPr id="27" name="Text 25"/>
-          <p:cNvSpPr/>
-          <p:nvPr/>
-        </p:nvSpPr>
-        <p:spPr>
-          <a:xfrm>
-            <a:off x="2514600" y="3401568"/>
-            <a:ext cx="2011680" cy="502920"/>
-          </a:xfrm>
-          <a:prstGeom prst="rect">
-            <a:avLst/>
-          </a:prstGeom>
-          <a:noFill/>
-          <a:ln/>
-        </p:spPr>
-        <p:txBody>
-          <a:bodyPr wrap="square" lIns="0" tIns="0" rIns="0" bIns="0" rtlCol="0" anchor="ctr"/>
-          <a:lstStyle/>
-          <a:p>
-            <a:pPr algn="ctr" indent="0" marL="0">
-              <a:buNone/>
-            </a:pPr>
-            <a:r>
-              <a:rPr lang="en-US" sz="1300" b="1" dirty="0">
-                <a:solidFill>
-                  <a:srgbClr val="4338CA"/>
-                </a:solidFill>
-                <a:latin typeface="Trebuchet MS" pitchFamily="34" charset="0"/>
-                <a:ea typeface="Trebuchet MS" pitchFamily="34" charset="-122"/>
-                <a:cs typeface="Trebuchet MS" pitchFamily="34" charset="-120"/>
-              </a:rPr>
-              <a:t>afterdark</a:t>
-            </a:r>
-            <a:endParaRPr lang="en-US" sz="1300" dirty="0"/>
-          </a:p>
-        </p:txBody>
-      </p:sp>
-      <p:sp>
-        <p:nvSpPr>
-          <p:cNvPr id="28" name="Shape 26"/>
-          <p:cNvSpPr/>
-          <p:nvPr/>
-        </p:nvSpPr>
-        <p:spPr>
-          <a:xfrm>
-            <a:off x="4663440" y="3401568"/>
-            <a:ext cx="2011680" cy="502920"/>
-          </a:xfrm>
-          <a:prstGeom prst="rect">
-            <a:avLst>
-              <a:gd name="adj" fmla="val 14545"/>
-            </a:avLst>
-          </a:prstGeom>
-          <a:solidFill>
-            <a:srgbClr val="EEF2FF"/>
-          </a:solidFill>
-          <a:ln w="12700">
-            <a:solidFill>
-              <a:srgbClr val="6366F1"/>
-            </a:solidFill>
-            <a:prstDash val="solid"/>
-          </a:ln>
-        </p:spPr>
-      </p:sp>
-      <p:sp>
-        <p:nvSpPr>
-          <p:cNvPr id="29" name="Text 27"/>
-          <p:cNvSpPr/>
-          <p:nvPr/>
-        </p:nvSpPr>
-        <p:spPr>
-          <a:xfrm>
-            <a:off x="4663440" y="3401568"/>
-            <a:ext cx="2011680" cy="502920"/>
-          </a:xfrm>
-          <a:prstGeom prst="rect">
-            <a:avLst/>
-          </a:prstGeom>
-          <a:noFill/>
-          <a:ln/>
-        </p:spPr>
-        <p:txBody>
-          <a:bodyPr wrap="square" lIns="0" tIns="0" rIns="0" bIns="0" rtlCol="0" anchor="ctr"/>
-          <a:lstStyle/>
-          <a:p>
-            <a:pPr algn="ctr" indent="0" marL="0">
-              <a:buNone/>
-            </a:pPr>
-            <a:r>
-              <a:rPr lang="en-US" sz="1300" b="1" dirty="0">
-                <a:solidFill>
-                  <a:srgbClr val="4338CA"/>
-                </a:solidFill>
-                <a:latin typeface="Trebuchet MS" pitchFamily="34" charset="0"/>
-                <a:ea typeface="Trebuchet MS" pitchFamily="34" charset="-122"/>
-                <a:cs typeface="Trebuchet MS" pitchFamily="34" charset="-120"/>
-              </a:rPr>
-              <a:t>midark</a:t>
+              <a:t>darker</a:t>
             </a:r>
             <a:endParaRPr lang="en-US" sz="1300" dirty="0"/>
           </a:p>
@@ -37605,7 +37525,7 @@
                 <a:ea typeface="Calibri" pitchFamily="34" charset="-122"/>
                 <a:cs typeface="Calibri" pitchFamily="34" charset="-120"/>
               </a:rPr>
-              <a:t>Word Labs  •  wordlabs.app  •  Root: 'dark' = absence of light</a:t>
+              <a:t>Word Labs  •  wordlabs.app  •  Root: 'dark' = with little or no light</a:t>
             </a:r>
             <a:endParaRPr lang="en-US" sz="800" dirty="0"/>
           </a:p>
@@ -37863,7 +37783,7 @@
             <a:avLst/>
           </a:prstGeom>
           <a:solidFill>
-            <a:srgbClr val="DDD6FE"/>
+            <a:srgbClr val="F8FAFC"/>
           </a:solidFill>
           <a:ln w="12700">
             <a:solidFill>
@@ -37875,14 +37795,39 @@
       </p:sp>
       <p:sp>
         <p:nvSpPr>
-          <p:cNvPr id="18" name="Text 16"/>
-          <p:cNvSpPr/>
-          <p:nvPr/>
-        </p:nvSpPr>
-        <p:spPr>
-          <a:xfrm>
-            <a:off x="640080" y="1755648"/>
-            <a:ext cx="1463040" cy="420624"/>
+          <p:cNvPr id="18" name="Shape 16"/>
+          <p:cNvSpPr/>
+          <p:nvPr/>
+        </p:nvSpPr>
+        <p:spPr>
+          <a:xfrm>
+            <a:off x="3291840" y="1755648"/>
+            <a:ext cx="1645920" cy="420624"/>
+          </a:xfrm>
+          <a:prstGeom prst="rect">
+            <a:avLst/>
+          </a:prstGeom>
+          <a:solidFill>
+            <a:srgbClr val="CCFBF1"/>
+          </a:solidFill>
+          <a:ln w="12700">
+            <a:solidFill>
+              <a:srgbClr val="E5E7EB"/>
+            </a:solidFill>
+            <a:prstDash val="solid"/>
+          </a:ln>
+        </p:spPr>
+      </p:sp>
+      <p:sp>
+        <p:nvSpPr>
+          <p:cNvPr id="19" name="Text 17"/>
+          <p:cNvSpPr/>
+          <p:nvPr/>
+        </p:nvSpPr>
+        <p:spPr>
+          <a:xfrm>
+            <a:off x="3291840" y="1755648"/>
+            <a:ext cx="1645920" cy="420624"/>
           </a:xfrm>
           <a:prstGeom prst="rect">
             <a:avLst/>
@@ -37900,13 +37845,13 @@
             <a:r>
               <a:rPr lang="en-US" sz="1300" b="1" dirty="0">
                 <a:solidFill>
-                  <a:srgbClr val="4C1D95"/>
+                  <a:srgbClr val="0F766E"/>
                 </a:solidFill>
                 <a:latin typeface="Trebuchet MS" pitchFamily="34" charset="0"/>
                 <a:ea typeface="Trebuchet MS" pitchFamily="34" charset="-122"/>
                 <a:cs typeface="Trebuchet MS" pitchFamily="34" charset="-120"/>
               </a:rPr>
-              <a:t>after-</a:t>
+              <a:t>dark</a:t>
             </a:r>
             <a:endParaRPr lang="en-US" sz="1300" dirty="0"/>
           </a:p>
@@ -37914,20 +37859,20 @@
       </p:sp>
       <p:sp>
         <p:nvSpPr>
-          <p:cNvPr id="19" name="Shape 17"/>
-          <p:cNvSpPr/>
-          <p:nvPr/>
-        </p:nvSpPr>
-        <p:spPr>
-          <a:xfrm>
-            <a:off x="3291840" y="1755648"/>
-            <a:ext cx="1645920" cy="420624"/>
-          </a:xfrm>
-          <a:prstGeom prst="rect">
-            <a:avLst/>
-          </a:prstGeom>
-          <a:solidFill>
-            <a:srgbClr val="CCFBF1"/>
+          <p:cNvPr id="20" name="Shape 18"/>
+          <p:cNvSpPr/>
+          <p:nvPr/>
+        </p:nvSpPr>
+        <p:spPr>
+          <a:xfrm>
+            <a:off x="5943600" y="1755648"/>
+            <a:ext cx="1463040" cy="420624"/>
+          </a:xfrm>
+          <a:prstGeom prst="rect">
+            <a:avLst/>
+          </a:prstGeom>
+          <a:solidFill>
+            <a:srgbClr val="FCE7F3"/>
           </a:solidFill>
           <a:ln w="12700">
             <a:solidFill>
@@ -37939,14 +37884,14 @@
       </p:sp>
       <p:sp>
         <p:nvSpPr>
-          <p:cNvPr id="20" name="Text 18"/>
-          <p:cNvSpPr/>
-          <p:nvPr/>
-        </p:nvSpPr>
-        <p:spPr>
-          <a:xfrm>
-            <a:off x="3291840" y="1755648"/>
-            <a:ext cx="1645920" cy="420624"/>
+          <p:cNvPr id="21" name="Text 19"/>
+          <p:cNvSpPr/>
+          <p:nvPr/>
+        </p:nvSpPr>
+        <p:spPr>
+          <a:xfrm>
+            <a:off x="5943600" y="1755648"/>
+            <a:ext cx="1463040" cy="420624"/>
           </a:xfrm>
           <a:prstGeom prst="rect">
             <a:avLst/>
@@ -37964,13 +37909,13 @@
             <a:r>
               <a:rPr lang="en-US" sz="1300" b="1" dirty="0">
                 <a:solidFill>
-                  <a:srgbClr val="0F766E"/>
+                  <a:srgbClr val="9D174D"/>
                 </a:solidFill>
                 <a:latin typeface="Trebuchet MS" pitchFamily="34" charset="0"/>
                 <a:ea typeface="Trebuchet MS" pitchFamily="34" charset="-122"/>
                 <a:cs typeface="Trebuchet MS" pitchFamily="34" charset="-120"/>
               </a:rPr>
-              <a:t>dark</a:t>
+              <a:t>-en</a:t>
             </a:r>
             <a:endParaRPr lang="en-US" sz="1300" dirty="0"/>
           </a:p>
@@ -37978,19 +37923,69 @@
       </p:sp>
       <p:sp>
         <p:nvSpPr>
-          <p:cNvPr id="21" name="Shape 19"/>
-          <p:cNvSpPr/>
-          <p:nvPr/>
-        </p:nvSpPr>
-        <p:spPr>
-          <a:xfrm>
-            <a:off x="5943600" y="1755648"/>
+          <p:cNvPr id="22" name="Shape 20"/>
+          <p:cNvSpPr/>
+          <p:nvPr/>
+        </p:nvSpPr>
+        <p:spPr>
+          <a:xfrm>
+            <a:off x="640080" y="2212848"/>
             <a:ext cx="1463040" cy="420624"/>
           </a:xfrm>
           <a:prstGeom prst="rect">
             <a:avLst/>
           </a:prstGeom>
           <a:solidFill>
+            <a:srgbClr val="F1F5F9"/>
+          </a:solidFill>
+          <a:ln w="12700">
+            <a:solidFill>
+              <a:srgbClr val="E5E7EB"/>
+            </a:solidFill>
+            <a:prstDash val="solid"/>
+          </a:ln>
+        </p:spPr>
+      </p:sp>
+      <p:sp>
+        <p:nvSpPr>
+          <p:cNvPr id="23" name="Shape 21"/>
+          <p:cNvSpPr/>
+          <p:nvPr/>
+        </p:nvSpPr>
+        <p:spPr>
+          <a:xfrm>
+            <a:off x="3291840" y="2212848"/>
+            <a:ext cx="1645920" cy="420624"/>
+          </a:xfrm>
+          <a:prstGeom prst="rect">
+            <a:avLst/>
+          </a:prstGeom>
+          <a:solidFill>
+            <a:srgbClr val="F1F5F9"/>
+          </a:solidFill>
+          <a:ln w="12700">
+            <a:solidFill>
+              <a:srgbClr val="E5E7EB"/>
+            </a:solidFill>
+            <a:prstDash val="solid"/>
+          </a:ln>
+        </p:spPr>
+      </p:sp>
+      <p:sp>
+        <p:nvSpPr>
+          <p:cNvPr id="24" name="Shape 22"/>
+          <p:cNvSpPr/>
+          <p:nvPr/>
+        </p:nvSpPr>
+        <p:spPr>
+          <a:xfrm>
+            <a:off x="5943600" y="2212848"/>
+            <a:ext cx="1463040" cy="420624"/>
+          </a:xfrm>
+          <a:prstGeom prst="rect">
+            <a:avLst/>
+          </a:prstGeom>
+          <a:solidFill>
             <a:srgbClr val="FCE7F3"/>
           </a:solidFill>
           <a:ln w="12700">
@@ -38003,13 +37998,13 @@
       </p:sp>
       <p:sp>
         <p:nvSpPr>
-          <p:cNvPr id="22" name="Text 20"/>
-          <p:cNvSpPr/>
-          <p:nvPr/>
-        </p:nvSpPr>
-        <p:spPr>
-          <a:xfrm>
-            <a:off x="5943600" y="1755648"/>
+          <p:cNvPr id="25" name="Text 23"/>
+          <p:cNvSpPr/>
+          <p:nvPr/>
+        </p:nvSpPr>
+        <p:spPr>
+          <a:xfrm>
+            <a:off x="5943600" y="2212848"/>
             <a:ext cx="1463040" cy="420624"/>
           </a:xfrm>
           <a:prstGeom prst="rect">
@@ -38034,7 +38029,7 @@
                 <a:ea typeface="Trebuchet MS" pitchFamily="34" charset="-122"/>
                 <a:cs typeface="Trebuchet MS" pitchFamily="34" charset="-120"/>
               </a:rPr>
-              <a:t>-ness</a:t>
+              <a:t>-er</a:t>
             </a:r>
             <a:endParaRPr lang="en-US" sz="1300" dirty="0"/>
           </a:p>
@@ -38042,20 +38037,20 @@
       </p:sp>
       <p:sp>
         <p:nvSpPr>
-          <p:cNvPr id="23" name="Shape 21"/>
-          <p:cNvSpPr/>
-          <p:nvPr/>
-        </p:nvSpPr>
-        <p:spPr>
-          <a:xfrm>
-            <a:off x="640080" y="2212848"/>
+          <p:cNvPr id="26" name="Shape 24"/>
+          <p:cNvSpPr/>
+          <p:nvPr/>
+        </p:nvSpPr>
+        <p:spPr>
+          <a:xfrm>
+            <a:off x="640080" y="2670048"/>
             <a:ext cx="1463040" cy="420624"/>
           </a:xfrm>
           <a:prstGeom prst="rect">
             <a:avLst/>
           </a:prstGeom>
           <a:solidFill>
-            <a:srgbClr val="DDD6FE"/>
+            <a:srgbClr val="F8FAFC"/>
           </a:solidFill>
           <a:ln w="12700">
             <a:solidFill>
@@ -38067,18 +38062,68 @@
       </p:sp>
       <p:sp>
         <p:nvSpPr>
-          <p:cNvPr id="24" name="Text 22"/>
-          <p:cNvSpPr/>
-          <p:nvPr/>
-        </p:nvSpPr>
-        <p:spPr>
-          <a:xfrm>
-            <a:off x="640080" y="2212848"/>
+          <p:cNvPr id="27" name="Shape 25"/>
+          <p:cNvSpPr/>
+          <p:nvPr/>
+        </p:nvSpPr>
+        <p:spPr>
+          <a:xfrm>
+            <a:off x="3291840" y="2670048"/>
+            <a:ext cx="1645920" cy="420624"/>
+          </a:xfrm>
+          <a:prstGeom prst="rect">
+            <a:avLst/>
+          </a:prstGeom>
+          <a:solidFill>
+            <a:srgbClr val="F8FAFC"/>
+          </a:solidFill>
+          <a:ln w="12700">
+            <a:solidFill>
+              <a:srgbClr val="E5E7EB"/>
+            </a:solidFill>
+            <a:prstDash val="solid"/>
+          </a:ln>
+        </p:spPr>
+      </p:sp>
+      <p:sp>
+        <p:nvSpPr>
+          <p:cNvPr id="28" name="Shape 26"/>
+          <p:cNvSpPr/>
+          <p:nvPr/>
+        </p:nvSpPr>
+        <p:spPr>
+          <a:xfrm>
+            <a:off x="5943600" y="2670048"/>
             <a:ext cx="1463040" cy="420624"/>
           </a:xfrm>
           <a:prstGeom prst="rect">
             <a:avLst/>
           </a:prstGeom>
+          <a:solidFill>
+            <a:srgbClr val="FCE7F3"/>
+          </a:solidFill>
+          <a:ln w="12700">
+            <a:solidFill>
+              <a:srgbClr val="E5E7EB"/>
+            </a:solidFill>
+            <a:prstDash val="solid"/>
+          </a:ln>
+        </p:spPr>
+      </p:sp>
+      <p:sp>
+        <p:nvSpPr>
+          <p:cNvPr id="29" name="Text 27"/>
+          <p:cNvSpPr/>
+          <p:nvPr/>
+        </p:nvSpPr>
+        <p:spPr>
+          <a:xfrm>
+            <a:off x="5943600" y="2670048"/>
+            <a:ext cx="1463040" cy="420624"/>
+          </a:xfrm>
+          <a:prstGeom prst="rect">
+            <a:avLst/>
+          </a:prstGeom>
           <a:noFill/>
           <a:ln/>
         </p:spPr>
@@ -38092,13 +38137,13 @@
             <a:r>
               <a:rPr lang="en-US" sz="1300" b="1" dirty="0">
                 <a:solidFill>
-                  <a:srgbClr val="4C1D95"/>
+                  <a:srgbClr val="9D174D"/>
                 </a:solidFill>
                 <a:latin typeface="Trebuchet MS" pitchFamily="34" charset="0"/>
                 <a:ea typeface="Trebuchet MS" pitchFamily="34" charset="-122"/>
                 <a:cs typeface="Trebuchet MS" pitchFamily="34" charset="-120"/>
               </a:rPr>
-              <a:t>pitch-</a:t>
+              <a:t>-est</a:t>
             </a:r>
             <a:endParaRPr lang="en-US" sz="1300" dirty="0"/>
           </a:p>
@@ -38106,13 +38151,38 @@
       </p:sp>
       <p:sp>
         <p:nvSpPr>
-          <p:cNvPr id="25" name="Shape 23"/>
-          <p:cNvSpPr/>
-          <p:nvPr/>
-        </p:nvSpPr>
-        <p:spPr>
-          <a:xfrm>
-            <a:off x="3291840" y="2212848"/>
+          <p:cNvPr id="30" name="Shape 28"/>
+          <p:cNvSpPr/>
+          <p:nvPr/>
+        </p:nvSpPr>
+        <p:spPr>
+          <a:xfrm>
+            <a:off x="640080" y="3127248"/>
+            <a:ext cx="1463040" cy="420624"/>
+          </a:xfrm>
+          <a:prstGeom prst="rect">
+            <a:avLst/>
+          </a:prstGeom>
+          <a:solidFill>
+            <a:srgbClr val="F1F5F9"/>
+          </a:solidFill>
+          <a:ln w="12700">
+            <a:solidFill>
+              <a:srgbClr val="E5E7EB"/>
+            </a:solidFill>
+            <a:prstDash val="solid"/>
+          </a:ln>
+        </p:spPr>
+      </p:sp>
+      <p:sp>
+        <p:nvSpPr>
+          <p:cNvPr id="31" name="Shape 29"/>
+          <p:cNvSpPr/>
+          <p:nvPr/>
+        </p:nvSpPr>
+        <p:spPr>
+          <a:xfrm>
+            <a:off x="3291840" y="3127248"/>
             <a:ext cx="1645920" cy="420624"/>
           </a:xfrm>
           <a:prstGeom prst="rect">
@@ -38131,13 +38201,13 @@
       </p:sp>
       <p:sp>
         <p:nvSpPr>
-          <p:cNvPr id="26" name="Shape 24"/>
-          <p:cNvSpPr/>
-          <p:nvPr/>
-        </p:nvSpPr>
-        <p:spPr>
-          <a:xfrm>
-            <a:off x="5943600" y="2212848"/>
+          <p:cNvPr id="32" name="Shape 30"/>
+          <p:cNvSpPr/>
+          <p:nvPr/>
+        </p:nvSpPr>
+        <p:spPr>
+          <a:xfrm>
+            <a:off x="5943600" y="3127248"/>
             <a:ext cx="1463040" cy="420624"/>
           </a:xfrm>
           <a:prstGeom prst="rect">
@@ -38156,13 +38226,13 @@
       </p:sp>
       <p:sp>
         <p:nvSpPr>
-          <p:cNvPr id="27" name="Text 25"/>
-          <p:cNvSpPr/>
-          <p:nvPr/>
-        </p:nvSpPr>
-        <p:spPr>
-          <a:xfrm>
-            <a:off x="5943600" y="2212848"/>
+          <p:cNvPr id="33" name="Text 31"/>
+          <p:cNvSpPr/>
+          <p:nvPr/>
+        </p:nvSpPr>
+        <p:spPr>
+          <a:xfrm>
+            <a:off x="5943600" y="3127248"/>
             <a:ext cx="1463040" cy="420624"/>
           </a:xfrm>
           <a:prstGeom prst="rect">
@@ -38187,7 +38257,7 @@
                 <a:ea typeface="Trebuchet MS" pitchFamily="34" charset="-122"/>
                 <a:cs typeface="Trebuchet MS" pitchFamily="34" charset="-120"/>
               </a:rPr>
-              <a:t>-en</a:t>
+              <a:t>-ly</a:t>
             </a:r>
             <a:endParaRPr lang="en-US" sz="1300" dirty="0"/>
           </a:p>
@@ -38195,20 +38265,20 @@
       </p:sp>
       <p:sp>
         <p:nvSpPr>
-          <p:cNvPr id="28" name="Shape 26"/>
-          <p:cNvSpPr/>
-          <p:nvPr/>
-        </p:nvSpPr>
-        <p:spPr>
-          <a:xfrm>
-            <a:off x="640080" y="2670048"/>
+          <p:cNvPr id="34" name="Shape 32"/>
+          <p:cNvSpPr/>
+          <p:nvPr/>
+        </p:nvSpPr>
+        <p:spPr>
+          <a:xfrm>
+            <a:off x="640080" y="3584448"/>
             <a:ext cx="1463040" cy="420624"/>
           </a:xfrm>
           <a:prstGeom prst="rect">
             <a:avLst/>
           </a:prstGeom>
           <a:solidFill>
-            <a:srgbClr val="DDD6FE"/>
+            <a:srgbClr val="F8FAFC"/>
           </a:solidFill>
           <a:ln w="12700">
             <a:solidFill>
@@ -38220,18 +38290,68 @@
       </p:sp>
       <p:sp>
         <p:nvSpPr>
-          <p:cNvPr id="29" name="Text 27"/>
-          <p:cNvSpPr/>
-          <p:nvPr/>
-        </p:nvSpPr>
-        <p:spPr>
-          <a:xfrm>
-            <a:off x="640080" y="2670048"/>
+          <p:cNvPr id="35" name="Shape 33"/>
+          <p:cNvSpPr/>
+          <p:nvPr/>
+        </p:nvSpPr>
+        <p:spPr>
+          <a:xfrm>
+            <a:off x="3291840" y="3584448"/>
+            <a:ext cx="1645920" cy="420624"/>
+          </a:xfrm>
+          <a:prstGeom prst="rect">
+            <a:avLst/>
+          </a:prstGeom>
+          <a:solidFill>
+            <a:srgbClr val="F8FAFC"/>
+          </a:solidFill>
+          <a:ln w="12700">
+            <a:solidFill>
+              <a:srgbClr val="E5E7EB"/>
+            </a:solidFill>
+            <a:prstDash val="solid"/>
+          </a:ln>
+        </p:spPr>
+      </p:sp>
+      <p:sp>
+        <p:nvSpPr>
+          <p:cNvPr id="36" name="Shape 34"/>
+          <p:cNvSpPr/>
+          <p:nvPr/>
+        </p:nvSpPr>
+        <p:spPr>
+          <a:xfrm>
+            <a:off x="5943600" y="3584448"/>
             <a:ext cx="1463040" cy="420624"/>
           </a:xfrm>
           <a:prstGeom prst="rect">
             <a:avLst/>
           </a:prstGeom>
+          <a:solidFill>
+            <a:srgbClr val="FCE7F3"/>
+          </a:solidFill>
+          <a:ln w="12700">
+            <a:solidFill>
+              <a:srgbClr val="E5E7EB"/>
+            </a:solidFill>
+            <a:prstDash val="solid"/>
+          </a:ln>
+        </p:spPr>
+      </p:sp>
+      <p:sp>
+        <p:nvSpPr>
+          <p:cNvPr id="37" name="Text 35"/>
+          <p:cNvSpPr/>
+          <p:nvPr/>
+        </p:nvSpPr>
+        <p:spPr>
+          <a:xfrm>
+            <a:off x="5943600" y="3584448"/>
+            <a:ext cx="1463040" cy="420624"/>
+          </a:xfrm>
+          <a:prstGeom prst="rect">
+            <a:avLst/>
+          </a:prstGeom>
           <a:noFill/>
           <a:ln/>
         </p:spPr>
@@ -38245,13 +38365,13 @@
             <a:r>
               <a:rPr lang="en-US" sz="1300" b="1" dirty="0">
                 <a:solidFill>
-                  <a:srgbClr val="4C1D95"/>
+                  <a:srgbClr val="9D174D"/>
                 </a:solidFill>
                 <a:latin typeface="Trebuchet MS" pitchFamily="34" charset="0"/>
                 <a:ea typeface="Trebuchet MS" pitchFamily="34" charset="-122"/>
                 <a:cs typeface="Trebuchet MS" pitchFamily="34" charset="-120"/>
               </a:rPr>
-              <a:t>semi-</a:t>
+              <a:t>-ness</a:t>
             </a:r>
             <a:endParaRPr lang="en-US" sz="1300" dirty="0"/>
           </a:p>
@@ -38259,402 +38379,7 @@
       </p:sp>
       <p:sp>
         <p:nvSpPr>
-          <p:cNvPr id="30" name="Shape 28"/>
-          <p:cNvSpPr/>
-          <p:nvPr/>
-        </p:nvSpPr>
-        <p:spPr>
-          <a:xfrm>
-            <a:off x="3291840" y="2670048"/>
-            <a:ext cx="1645920" cy="420624"/>
-          </a:xfrm>
-          <a:prstGeom prst="rect">
-            <a:avLst/>
-          </a:prstGeom>
-          <a:solidFill>
-            <a:srgbClr val="F8FAFC"/>
-          </a:solidFill>
-          <a:ln w="12700">
-            <a:solidFill>
-              <a:srgbClr val="E5E7EB"/>
-            </a:solidFill>
-            <a:prstDash val="solid"/>
-          </a:ln>
-        </p:spPr>
-      </p:sp>
-      <p:sp>
-        <p:nvSpPr>
-          <p:cNvPr id="31" name="Shape 29"/>
-          <p:cNvSpPr/>
-          <p:nvPr/>
-        </p:nvSpPr>
-        <p:spPr>
-          <a:xfrm>
-            <a:off x="5943600" y="2670048"/>
-            <a:ext cx="1463040" cy="420624"/>
-          </a:xfrm>
-          <a:prstGeom prst="rect">
-            <a:avLst/>
-          </a:prstGeom>
-          <a:solidFill>
-            <a:srgbClr val="FCE7F3"/>
-          </a:solidFill>
-          <a:ln w="12700">
-            <a:solidFill>
-              <a:srgbClr val="E5E7EB"/>
-            </a:solidFill>
-            <a:prstDash val="solid"/>
-          </a:ln>
-        </p:spPr>
-      </p:sp>
-      <p:sp>
-        <p:nvSpPr>
-          <p:cNvPr id="32" name="Text 30"/>
-          <p:cNvSpPr/>
-          <p:nvPr/>
-        </p:nvSpPr>
-        <p:spPr>
-          <a:xfrm>
-            <a:off x="5943600" y="2670048"/>
-            <a:ext cx="1463040" cy="420624"/>
-          </a:xfrm>
-          <a:prstGeom prst="rect">
-            <a:avLst/>
-          </a:prstGeom>
-          <a:noFill/>
-          <a:ln/>
-        </p:spPr>
-        <p:txBody>
-          <a:bodyPr wrap="square" lIns="0" tIns="0" rIns="0" bIns="0" rtlCol="0" anchor="ctr"/>
-          <a:lstStyle/>
-          <a:p>
-            <a:pPr algn="ctr" indent="0" marL="0">
-              <a:buNone/>
-            </a:pPr>
-            <a:r>
-              <a:rPr lang="en-US" sz="1300" b="1" dirty="0">
-                <a:solidFill>
-                  <a:srgbClr val="9D174D"/>
-                </a:solidFill>
-                <a:latin typeface="Trebuchet MS" pitchFamily="34" charset="0"/>
-                <a:ea typeface="Trebuchet MS" pitchFamily="34" charset="-122"/>
-                <a:cs typeface="Trebuchet MS" pitchFamily="34" charset="-120"/>
-              </a:rPr>
-              <a:t>-ly</a:t>
-            </a:r>
-            <a:endParaRPr lang="en-US" sz="1300" dirty="0"/>
-          </a:p>
-        </p:txBody>
-      </p:sp>
-      <p:sp>
-        <p:nvSpPr>
-          <p:cNvPr id="33" name="Shape 31"/>
-          <p:cNvSpPr/>
-          <p:nvPr/>
-        </p:nvSpPr>
-        <p:spPr>
-          <a:xfrm>
-            <a:off x="640080" y="3127248"/>
-            <a:ext cx="1463040" cy="420624"/>
-          </a:xfrm>
-          <a:prstGeom prst="rect">
-            <a:avLst/>
-          </a:prstGeom>
-          <a:solidFill>
-            <a:srgbClr val="DDD6FE"/>
-          </a:solidFill>
-          <a:ln w="12700">
-            <a:solidFill>
-              <a:srgbClr val="E5E7EB"/>
-            </a:solidFill>
-            <a:prstDash val="solid"/>
-          </a:ln>
-        </p:spPr>
-      </p:sp>
-      <p:sp>
-        <p:nvSpPr>
-          <p:cNvPr id="34" name="Text 32"/>
-          <p:cNvSpPr/>
-          <p:nvPr/>
-        </p:nvSpPr>
-        <p:spPr>
-          <a:xfrm>
-            <a:off x="640080" y="3127248"/>
-            <a:ext cx="1463040" cy="420624"/>
-          </a:xfrm>
-          <a:prstGeom prst="rect">
-            <a:avLst/>
-          </a:prstGeom>
-          <a:noFill/>
-          <a:ln/>
-        </p:spPr>
-        <p:txBody>
-          <a:bodyPr wrap="square" lIns="0" tIns="0" rIns="0" bIns="0" rtlCol="0" anchor="ctr"/>
-          <a:lstStyle/>
-          <a:p>
-            <a:pPr algn="ctr" indent="0" marL="0">
-              <a:buNone/>
-            </a:pPr>
-            <a:r>
-              <a:rPr lang="en-US" sz="1300" b="1" dirty="0">
-                <a:solidFill>
-                  <a:srgbClr val="4C1D95"/>
-                </a:solidFill>
-                <a:latin typeface="Trebuchet MS" pitchFamily="34" charset="0"/>
-                <a:ea typeface="Trebuchet MS" pitchFamily="34" charset="-122"/>
-                <a:cs typeface="Trebuchet MS" pitchFamily="34" charset="-120"/>
-              </a:rPr>
-              <a:t>mid-</a:t>
-            </a:r>
-            <a:endParaRPr lang="en-US" sz="1300" dirty="0"/>
-          </a:p>
-        </p:txBody>
-      </p:sp>
-      <p:sp>
-        <p:nvSpPr>
-          <p:cNvPr id="35" name="Shape 33"/>
-          <p:cNvSpPr/>
-          <p:nvPr/>
-        </p:nvSpPr>
-        <p:spPr>
-          <a:xfrm>
-            <a:off x="3291840" y="3127248"/>
-            <a:ext cx="1645920" cy="420624"/>
-          </a:xfrm>
-          <a:prstGeom prst="rect">
-            <a:avLst/>
-          </a:prstGeom>
-          <a:solidFill>
-            <a:srgbClr val="F1F5F9"/>
-          </a:solidFill>
-          <a:ln w="12700">
-            <a:solidFill>
-              <a:srgbClr val="E5E7EB"/>
-            </a:solidFill>
-            <a:prstDash val="solid"/>
-          </a:ln>
-        </p:spPr>
-      </p:sp>
-      <p:sp>
-        <p:nvSpPr>
-          <p:cNvPr id="36" name="Shape 34"/>
-          <p:cNvSpPr/>
-          <p:nvPr/>
-        </p:nvSpPr>
-        <p:spPr>
-          <a:xfrm>
-            <a:off x="5943600" y="3127248"/>
-            <a:ext cx="1463040" cy="420624"/>
-          </a:xfrm>
-          <a:prstGeom prst="rect">
-            <a:avLst/>
-          </a:prstGeom>
-          <a:solidFill>
-            <a:srgbClr val="FCE7F3"/>
-          </a:solidFill>
-          <a:ln w="12700">
-            <a:solidFill>
-              <a:srgbClr val="E5E7EB"/>
-            </a:solidFill>
-            <a:prstDash val="solid"/>
-          </a:ln>
-        </p:spPr>
-      </p:sp>
-      <p:sp>
-        <p:nvSpPr>
-          <p:cNvPr id="37" name="Text 35"/>
-          <p:cNvSpPr/>
-          <p:nvPr/>
-        </p:nvSpPr>
-        <p:spPr>
-          <a:xfrm>
-            <a:off x="5943600" y="3127248"/>
-            <a:ext cx="1463040" cy="420624"/>
-          </a:xfrm>
-          <a:prstGeom prst="rect">
-            <a:avLst/>
-          </a:prstGeom>
-          <a:noFill/>
-          <a:ln/>
-        </p:spPr>
-        <p:txBody>
-          <a:bodyPr wrap="square" lIns="0" tIns="0" rIns="0" bIns="0" rtlCol="0" anchor="ctr"/>
-          <a:lstStyle/>
-          <a:p>
-            <a:pPr algn="ctr" indent="0" marL="0">
-              <a:buNone/>
-            </a:pPr>
-            <a:r>
-              <a:rPr lang="en-US" sz="1300" b="1" dirty="0">
-                <a:solidFill>
-                  <a:srgbClr val="9D174D"/>
-                </a:solidFill>
-                <a:latin typeface="Trebuchet MS" pitchFamily="34" charset="0"/>
-                <a:ea typeface="Trebuchet MS" pitchFamily="34" charset="-122"/>
-                <a:cs typeface="Trebuchet MS" pitchFamily="34" charset="-120"/>
-              </a:rPr>
-              <a:t>-ish</a:t>
-            </a:r>
-            <a:endParaRPr lang="en-US" sz="1300" dirty="0"/>
-          </a:p>
-        </p:txBody>
-      </p:sp>
-      <p:sp>
-        <p:nvSpPr>
-          <p:cNvPr id="38" name="Shape 36"/>
-          <p:cNvSpPr/>
-          <p:nvPr/>
-        </p:nvSpPr>
-        <p:spPr>
-          <a:xfrm>
-            <a:off x="640080" y="3584448"/>
-            <a:ext cx="1463040" cy="420624"/>
-          </a:xfrm>
-          <a:prstGeom prst="rect">
-            <a:avLst/>
-          </a:prstGeom>
-          <a:solidFill>
-            <a:srgbClr val="DDD6FE"/>
-          </a:solidFill>
-          <a:ln w="12700">
-            <a:solidFill>
-              <a:srgbClr val="E5E7EB"/>
-            </a:solidFill>
-            <a:prstDash val="solid"/>
-          </a:ln>
-        </p:spPr>
-      </p:sp>
-      <p:sp>
-        <p:nvSpPr>
-          <p:cNvPr id="39" name="Text 37"/>
-          <p:cNvSpPr/>
-          <p:nvPr/>
-        </p:nvSpPr>
-        <p:spPr>
-          <a:xfrm>
-            <a:off x="640080" y="3584448"/>
-            <a:ext cx="1463040" cy="420624"/>
-          </a:xfrm>
-          <a:prstGeom prst="rect">
-            <a:avLst/>
-          </a:prstGeom>
-          <a:noFill/>
-          <a:ln/>
-        </p:spPr>
-        <p:txBody>
-          <a:bodyPr wrap="square" lIns="0" tIns="0" rIns="0" bIns="0" rtlCol="0" anchor="ctr"/>
-          <a:lstStyle/>
-          <a:p>
-            <a:pPr algn="ctr" indent="0" marL="0">
-              <a:buNone/>
-            </a:pPr>
-            <a:r>
-              <a:rPr lang="en-US" sz="1300" b="1" dirty="0">
-                <a:solidFill>
-                  <a:srgbClr val="4C1D95"/>
-                </a:solidFill>
-                <a:latin typeface="Trebuchet MS" pitchFamily="34" charset="0"/>
-                <a:ea typeface="Trebuchet MS" pitchFamily="34" charset="-122"/>
-                <a:cs typeface="Trebuchet MS" pitchFamily="34" charset="-120"/>
-              </a:rPr>
-              <a:t>stark-</a:t>
-            </a:r>
-            <a:endParaRPr lang="en-US" sz="1300" dirty="0"/>
-          </a:p>
-        </p:txBody>
-      </p:sp>
-      <p:sp>
-        <p:nvSpPr>
-          <p:cNvPr id="40" name="Shape 38"/>
-          <p:cNvSpPr/>
-          <p:nvPr/>
-        </p:nvSpPr>
-        <p:spPr>
-          <a:xfrm>
-            <a:off x="3291840" y="3584448"/>
-            <a:ext cx="1645920" cy="420624"/>
-          </a:xfrm>
-          <a:prstGeom prst="rect">
-            <a:avLst/>
-          </a:prstGeom>
-          <a:solidFill>
-            <a:srgbClr val="F8FAFC"/>
-          </a:solidFill>
-          <a:ln w="12700">
-            <a:solidFill>
-              <a:srgbClr val="E5E7EB"/>
-            </a:solidFill>
-            <a:prstDash val="solid"/>
-          </a:ln>
-        </p:spPr>
-      </p:sp>
-      <p:sp>
-        <p:nvSpPr>
-          <p:cNvPr id="41" name="Shape 39"/>
-          <p:cNvSpPr/>
-          <p:nvPr/>
-        </p:nvSpPr>
-        <p:spPr>
-          <a:xfrm>
-            <a:off x="5943600" y="3584448"/>
-            <a:ext cx="1463040" cy="420624"/>
-          </a:xfrm>
-          <a:prstGeom prst="rect">
-            <a:avLst/>
-          </a:prstGeom>
-          <a:solidFill>
-            <a:srgbClr val="FCE7F3"/>
-          </a:solidFill>
-          <a:ln w="12700">
-            <a:solidFill>
-              <a:srgbClr val="E5E7EB"/>
-            </a:solidFill>
-            <a:prstDash val="solid"/>
-          </a:ln>
-        </p:spPr>
-      </p:sp>
-      <p:sp>
-        <p:nvSpPr>
-          <p:cNvPr id="42" name="Text 40"/>
-          <p:cNvSpPr/>
-          <p:nvPr/>
-        </p:nvSpPr>
-        <p:spPr>
-          <a:xfrm>
-            <a:off x="5943600" y="3584448"/>
-            <a:ext cx="1463040" cy="420624"/>
-          </a:xfrm>
-          <a:prstGeom prst="rect">
-            <a:avLst/>
-          </a:prstGeom>
-          <a:noFill/>
-          <a:ln/>
-        </p:spPr>
-        <p:txBody>
-          <a:bodyPr wrap="square" lIns="0" tIns="0" rIns="0" bIns="0" rtlCol="0" anchor="ctr"/>
-          <a:lstStyle/>
-          <a:p>
-            <a:pPr algn="ctr" indent="0" marL="0">
-              <a:buNone/>
-            </a:pPr>
-            <a:r>
-              <a:rPr lang="en-US" sz="1300" b="1" dirty="0">
-                <a:solidFill>
-                  <a:srgbClr val="9D174D"/>
-                </a:solidFill>
-                <a:latin typeface="Trebuchet MS" pitchFamily="34" charset="0"/>
-                <a:ea typeface="Trebuchet MS" pitchFamily="34" charset="-122"/>
-                <a:cs typeface="Trebuchet MS" pitchFamily="34" charset="-120"/>
-              </a:rPr>
-              <a:t>-ened</a:t>
-            </a:r>
-            <a:endParaRPr lang="en-US" sz="1300" dirty="0"/>
-          </a:p>
-        </p:txBody>
-      </p:sp>
-      <p:sp>
-        <p:nvSpPr>
-          <p:cNvPr id="43" name="Text 41"/>
+          <p:cNvPr id="38" name="Text 36"/>
           <p:cNvSpPr/>
           <p:nvPr/>
         </p:nvSpPr>
@@ -38693,7 +38418,7 @@
       </p:sp>
       <p:sp>
         <p:nvSpPr>
-          <p:cNvPr id="44" name="Shape 42"/>
+          <p:cNvPr id="39" name="Shape 37"/>
           <p:cNvSpPr/>
           <p:nvPr/>
         </p:nvSpPr>
@@ -38708,11 +38433,11 @@
             </a:avLst>
           </a:prstGeom>
           <a:solidFill>
-            <a:srgbClr val="DDD6FE"/>
+            <a:srgbClr val="CCFBF1"/>
           </a:solidFill>
           <a:ln w="19050">
             <a:solidFill>
-              <a:srgbClr val="7C3AED"/>
+              <a:srgbClr val="0D9488"/>
             </a:solidFill>
             <a:prstDash val="solid"/>
           </a:ln>
@@ -38727,7 +38452,7 @@
       </p:sp>
       <p:sp>
         <p:nvSpPr>
-          <p:cNvPr id="45" name="Text 43"/>
+          <p:cNvPr id="40" name="Text 38"/>
           <p:cNvSpPr/>
           <p:nvPr/>
         </p:nvSpPr>
@@ -38752,13 +38477,13 @@
             <a:r>
               <a:rPr lang="en-US" sz="1300" b="1" dirty="0">
                 <a:solidFill>
-                  <a:srgbClr val="4C1D95"/>
+                  <a:srgbClr val="0F766E"/>
                 </a:solidFill>
                 <a:latin typeface="Trebuchet MS" pitchFamily="34" charset="0"/>
                 <a:ea typeface="Trebuchet MS" pitchFamily="34" charset="-122"/>
                 <a:cs typeface="Trebuchet MS" pitchFamily="34" charset="-120"/>
               </a:rPr>
-              <a:t>after-</a:t>
+              <a:t>'dark'</a:t>
             </a:r>
             <a:endParaRPr lang="en-US" sz="1300" dirty="0"/>
           </a:p>
@@ -38766,7 +38491,7 @@
       </p:sp>
       <p:sp>
         <p:nvSpPr>
-          <p:cNvPr id="46" name="Text 44"/>
+          <p:cNvPr id="41" name="Text 39"/>
           <p:cNvSpPr/>
           <p:nvPr/>
         </p:nvSpPr>
@@ -38805,14 +38530,14 @@
       </p:sp>
       <p:sp>
         <p:nvSpPr>
-          <p:cNvPr id="47" name="Shape 45"/>
+          <p:cNvPr id="42" name="Shape 40"/>
           <p:cNvSpPr/>
           <p:nvPr/>
         </p:nvSpPr>
         <p:spPr>
           <a:xfrm>
             <a:off x="3127248" y="4178808"/>
-            <a:ext cx="1243584" cy="420624"/>
+            <a:ext cx="822960" cy="420624"/>
           </a:xfrm>
           <a:prstGeom prst="rect">
             <a:avLst>
@@ -38820,11 +38545,11 @@
             </a:avLst>
           </a:prstGeom>
           <a:solidFill>
-            <a:srgbClr val="CCFBF1"/>
+            <a:srgbClr val="FCE7F3"/>
           </a:solidFill>
           <a:ln w="19050">
             <a:solidFill>
-              <a:srgbClr val="0D9488"/>
+              <a:srgbClr val="DB2777"/>
             </a:solidFill>
             <a:prstDash val="solid"/>
           </a:ln>
@@ -38839,14 +38564,14 @@
       </p:sp>
       <p:sp>
         <p:nvSpPr>
-          <p:cNvPr id="48" name="Text 46"/>
+          <p:cNvPr id="43" name="Text 41"/>
           <p:cNvSpPr/>
           <p:nvPr/>
         </p:nvSpPr>
         <p:spPr>
           <a:xfrm>
             <a:off x="3127248" y="4178808"/>
-            <a:ext cx="1243584" cy="420624"/>
+            <a:ext cx="822960" cy="420624"/>
           </a:xfrm>
           <a:prstGeom prst="rect">
             <a:avLst/>
@@ -38864,13 +38589,13 @@
             <a:r>
               <a:rPr lang="en-US" sz="1300" b="1" dirty="0">
                 <a:solidFill>
-                  <a:srgbClr val="0F766E"/>
+                  <a:srgbClr val="9D174D"/>
                 </a:solidFill>
                 <a:latin typeface="Trebuchet MS" pitchFamily="34" charset="0"/>
                 <a:ea typeface="Trebuchet MS" pitchFamily="34" charset="-122"/>
                 <a:cs typeface="Trebuchet MS" pitchFamily="34" charset="-120"/>
               </a:rPr>
-              <a:t>'dark'</a:t>
+              <a:t>-en</a:t>
             </a:r>
             <a:endParaRPr lang="en-US" sz="1300" dirty="0"/>
           </a:p>
@@ -38878,14 +38603,14 @@
       </p:sp>
       <p:sp>
         <p:nvSpPr>
-          <p:cNvPr id="49" name="Text 47"/>
-          <p:cNvSpPr/>
-          <p:nvPr/>
-        </p:nvSpPr>
-        <p:spPr>
-          <a:xfrm>
-            <a:off x="4398264" y="4178808"/>
-            <a:ext cx="320040" cy="420624"/>
+          <p:cNvPr id="44" name="Text 42"/>
+          <p:cNvSpPr/>
+          <p:nvPr/>
+        </p:nvSpPr>
+        <p:spPr>
+          <a:xfrm>
+            <a:off x="4023360" y="4178808"/>
+            <a:ext cx="365760" cy="420624"/>
           </a:xfrm>
           <a:prstGeom prst="rect">
             <a:avLst/>
@@ -38901,30 +38626,30 @@
               <a:buNone/>
             </a:pPr>
             <a:r>
-              <a:rPr lang="en-US" sz="1400" dirty="0">
-                <a:solidFill>
-                  <a:srgbClr val="475569"/>
+              <a:rPr lang="en-US" sz="1800" b="1" dirty="0">
+                <a:solidFill>
+                  <a:srgbClr val="0D9488"/>
                 </a:solidFill>
                 <a:latin typeface="Trebuchet MS" pitchFamily="34" charset="0"/>
                 <a:ea typeface="Trebuchet MS" pitchFamily="34" charset="-122"/>
                 <a:cs typeface="Trebuchet MS" pitchFamily="34" charset="-120"/>
               </a:rPr>
-              <a:t>+</a:t>
-            </a:r>
-            <a:endParaRPr lang="en-US" sz="1400" dirty="0"/>
-          </a:p>
-        </p:txBody>
-      </p:sp>
-      <p:sp>
-        <p:nvSpPr>
-          <p:cNvPr id="50" name="Shape 48"/>
-          <p:cNvSpPr/>
-          <p:nvPr/>
-        </p:nvSpPr>
-        <p:spPr>
-          <a:xfrm>
-            <a:off x="4745736" y="4178808"/>
-            <a:ext cx="1097280" cy="420624"/>
+              <a:t>=</a:t>
+            </a:r>
+            <a:endParaRPr lang="en-US" sz="1800" dirty="0"/>
+          </a:p>
+        </p:txBody>
+      </p:sp>
+      <p:sp>
+        <p:nvSpPr>
+          <p:cNvPr id="45" name="Shape 43"/>
+          <p:cNvSpPr/>
+          <p:nvPr/>
+        </p:nvSpPr>
+        <p:spPr>
+          <a:xfrm>
+            <a:off x="4434840" y="4178808"/>
+            <a:ext cx="2194560" cy="420624"/>
           </a:xfrm>
           <a:prstGeom prst="rect">
             <a:avLst>
@@ -38932,33 +38657,26 @@
             </a:avLst>
           </a:prstGeom>
           <a:solidFill>
-            <a:srgbClr val="FCE7F3"/>
-          </a:solidFill>
-          <a:ln w="19050">
-            <a:solidFill>
-              <a:srgbClr val="DB2777"/>
-            </a:solidFill>
-            <a:prstDash val="solid"/>
-          </a:ln>
-          <a:effectLst>
-            <a:outerShdw sx="100000" sy="100000" kx="0" ky="0" algn="bl" rotWithShape="0" blurRad="101600" dist="38100" dir="8100000">
-              <a:srgbClr val="000000">
-                <a:alpha val="12000"/>
-              </a:srgbClr>
-            </a:outerShdw>
-          </a:effectLst>
-        </p:spPr>
-      </p:sp>
-      <p:sp>
-        <p:nvSpPr>
-          <p:cNvPr id="51" name="Text 49"/>
-          <p:cNvSpPr/>
-          <p:nvPr/>
-        </p:nvSpPr>
-        <p:spPr>
-          <a:xfrm>
-            <a:off x="4745736" y="4178808"/>
-            <a:ext cx="1097280" cy="420624"/>
+            <a:srgbClr val="0D9488"/>
+          </a:solidFill>
+          <a:ln w="12700">
+            <a:solidFill>
+              <a:srgbClr val="0D9488"/>
+            </a:solidFill>
+            <a:prstDash val="solid"/>
+          </a:ln>
+        </p:spPr>
+      </p:sp>
+      <p:sp>
+        <p:nvSpPr>
+          <p:cNvPr id="46" name="Text 44"/>
+          <p:cNvSpPr/>
+          <p:nvPr/>
+        </p:nvSpPr>
+        <p:spPr>
+          <a:xfrm>
+            <a:off x="4434840" y="4178808"/>
+            <a:ext cx="2194560" cy="420624"/>
           </a:xfrm>
           <a:prstGeom prst="rect">
             <a:avLst/>
@@ -38974,120 +38692,15 @@
               <a:buNone/>
             </a:pPr>
             <a:r>
-              <a:rPr lang="en-US" sz="1300" b="1" dirty="0">
-                <a:solidFill>
-                  <a:srgbClr val="9D174D"/>
+              <a:rPr lang="en-US" sz="1400" b="1" dirty="0">
+                <a:solidFill>
+                  <a:srgbClr val="FFFFFF"/>
                 </a:solidFill>
                 <a:latin typeface="Trebuchet MS" pitchFamily="34" charset="0"/>
                 <a:ea typeface="Trebuchet MS" pitchFamily="34" charset="-122"/>
                 <a:cs typeface="Trebuchet MS" pitchFamily="34" charset="-120"/>
               </a:rPr>
-              <a:t>-ness</a:t>
-            </a:r>
-            <a:endParaRPr lang="en-US" sz="1300" dirty="0"/>
-          </a:p>
-        </p:txBody>
-      </p:sp>
-      <p:sp>
-        <p:nvSpPr>
-          <p:cNvPr id="52" name="Text 50"/>
-          <p:cNvSpPr/>
-          <p:nvPr/>
-        </p:nvSpPr>
-        <p:spPr>
-          <a:xfrm>
-            <a:off x="5916168" y="4178808"/>
-            <a:ext cx="365760" cy="420624"/>
-          </a:xfrm>
-          <a:prstGeom prst="rect">
-            <a:avLst/>
-          </a:prstGeom>
-          <a:noFill/>
-          <a:ln/>
-        </p:spPr>
-        <p:txBody>
-          <a:bodyPr wrap="square" lIns="0" tIns="0" rIns="0" bIns="0" rtlCol="0" anchor="ctr"/>
-          <a:lstStyle/>
-          <a:p>
-            <a:pPr algn="ctr" indent="0" marL="0">
-              <a:buNone/>
-            </a:pPr>
-            <a:r>
-              <a:rPr lang="en-US" sz="1800" b="1" dirty="0">
-                <a:solidFill>
-                  <a:srgbClr val="0D9488"/>
-                </a:solidFill>
-                <a:latin typeface="Trebuchet MS" pitchFamily="34" charset="0"/>
-                <a:ea typeface="Trebuchet MS" pitchFamily="34" charset="-122"/>
-                <a:cs typeface="Trebuchet MS" pitchFamily="34" charset="-120"/>
-              </a:rPr>
-              <a:t>=</a:t>
-            </a:r>
-            <a:endParaRPr lang="en-US" sz="1800" dirty="0"/>
-          </a:p>
-        </p:txBody>
-      </p:sp>
-      <p:sp>
-        <p:nvSpPr>
-          <p:cNvPr id="53" name="Shape 51"/>
-          <p:cNvSpPr/>
-          <p:nvPr/>
-        </p:nvSpPr>
-        <p:spPr>
-          <a:xfrm>
-            <a:off x="6327648" y="4178808"/>
-            <a:ext cx="2194560" cy="420624"/>
-          </a:xfrm>
-          <a:prstGeom prst="rect">
-            <a:avLst>
-              <a:gd name="adj" fmla="val 17391"/>
-            </a:avLst>
-          </a:prstGeom>
-          <a:solidFill>
-            <a:srgbClr val="0D9488"/>
-          </a:solidFill>
-          <a:ln w="12700">
-            <a:solidFill>
-              <a:srgbClr val="0D9488"/>
-            </a:solidFill>
-            <a:prstDash val="solid"/>
-          </a:ln>
-        </p:spPr>
-      </p:sp>
-      <p:sp>
-        <p:nvSpPr>
-          <p:cNvPr id="54" name="Text 52"/>
-          <p:cNvSpPr/>
-          <p:nvPr/>
-        </p:nvSpPr>
-        <p:spPr>
-          <a:xfrm>
-            <a:off x="6327648" y="4178808"/>
-            <a:ext cx="2194560" cy="420624"/>
-          </a:xfrm>
-          <a:prstGeom prst="rect">
-            <a:avLst/>
-          </a:prstGeom>
-          <a:noFill/>
-          <a:ln/>
-        </p:spPr>
-        <p:txBody>
-          <a:bodyPr wrap="square" lIns="0" tIns="0" rIns="0" bIns="0" rtlCol="0" anchor="ctr"/>
-          <a:lstStyle/>
-          <a:p>
-            <a:pPr algn="ctr" indent="0" marL="0">
-              <a:buNone/>
-            </a:pPr>
-            <a:r>
-              <a:rPr lang="en-US" sz="1400" b="1" dirty="0">
-                <a:solidFill>
-                  <a:srgbClr val="FFFFFF"/>
-                </a:solidFill>
-                <a:latin typeface="Trebuchet MS" pitchFamily="34" charset="0"/>
-                <a:ea typeface="Trebuchet MS" pitchFamily="34" charset="-122"/>
-                <a:cs typeface="Trebuchet MS" pitchFamily="34" charset="-120"/>
-              </a:rPr>
-              <a:t>darkness</a:t>
+              <a:t>dark</a:t>
             </a:r>
             <a:endParaRPr lang="en-US" sz="1400" dirty="0"/>
           </a:p>
@@ -39379,7 +38992,7 @@
                 <a:ea typeface="Calibri" pitchFamily="34" charset="-122"/>
                 <a:cs typeface="Calibri" pitchFamily="34" charset="-120"/>
               </a:rPr>
-              <a:t>Word Labs  •  wordlabs.app  •  Root: 'dark' = absence of light</a:t>
+              <a:t>Word Labs  •  wordlabs.app  •  Root: 'dark' = with little or no light</a:t>
             </a:r>
             <a:endParaRPr lang="en-US" sz="800" dirty="0"/>
           </a:p>
@@ -39491,7 +39104,7 @@
                 <a:ea typeface="Trebuchet MS" pitchFamily="34" charset="-122"/>
                 <a:cs typeface="Trebuchet MS" pitchFamily="34" charset="-120"/>
               </a:rPr>
-              <a:t>darkness</a:t>
+              <a:t>dark</a:t>
             </a:r>
             <a:endParaRPr lang="en-US" sz="1200" dirty="0"/>
           </a:p>
@@ -39557,7 +39170,7 @@
                 <a:ea typeface="Calibri" pitchFamily="34" charset="-122"/>
                 <a:cs typeface="Calibri" pitchFamily="34" charset="-120"/>
               </a:rPr>
-              <a:t>Made darker, or with the light taken away.</a:t>
+              <a:t>more dark than something else</a:t>
             </a:r>
             <a:endParaRPr lang="en-US" sz="1200" dirty="0"/>
           </a:p>
@@ -39696,7 +39309,7 @@
                 <a:ea typeface="Calibri" pitchFamily="34" charset="-122"/>
                 <a:cs typeface="Calibri" pitchFamily="34" charset="-120"/>
               </a:rPr>
-              <a:t>The middle of a dark period, such as the darkest point of night.</a:t>
+              <a:t>to make or become darker</a:t>
             </a:r>
             <a:endParaRPr lang="en-US" sz="1200" dirty="0"/>
           </a:p>
@@ -39769,7 +39382,7 @@
                 <a:ea typeface="Trebuchet MS" pitchFamily="34" charset="-122"/>
                 <a:cs typeface="Trebuchet MS" pitchFamily="34" charset="-120"/>
               </a:rPr>
-              <a:t>darkly</a:t>
+              <a:t>darker</a:t>
             </a:r>
             <a:endParaRPr lang="en-US" sz="1200" dirty="0"/>
           </a:p>
@@ -39835,563 +39448,7 @@
                 <a:ea typeface="Calibri" pitchFamily="34" charset="-122"/>
                 <a:cs typeface="Calibri" pitchFamily="34" charset="-120"/>
               </a:rPr>
-              <a:t>The state of having no light in a place.</a:t>
-            </a:r>
-            <a:endParaRPr lang="en-US" sz="1200" dirty="0"/>
-          </a:p>
-        </p:txBody>
-      </p:sp>
-      <p:sp>
-        <p:nvSpPr>
-          <p:cNvPr id="23" name="Shape 21"/>
-          <p:cNvSpPr/>
-          <p:nvPr/>
-        </p:nvSpPr>
-        <p:spPr>
-          <a:xfrm>
-            <a:off x="365760" y="2779776"/>
-            <a:ext cx="2011680" cy="457200"/>
-          </a:xfrm>
-          <a:prstGeom prst="rect">
-            <a:avLst>
-              <a:gd name="adj" fmla="val 12000"/>
-            </a:avLst>
-          </a:prstGeom>
-          <a:solidFill>
-            <a:srgbClr val="EEF2FF"/>
-          </a:solidFill>
-          <a:ln w="12700">
-            <a:solidFill>
-              <a:srgbClr val="6366F1"/>
-            </a:solidFill>
-            <a:prstDash val="solid"/>
-          </a:ln>
-          <a:effectLst>
-            <a:outerShdw sx="100000" sy="100000" kx="0" ky="0" algn="bl" rotWithShape="0" blurRad="101600" dist="38100" dir="8100000">
-              <a:srgbClr val="000000">
-                <a:alpha val="12000"/>
-              </a:srgbClr>
-            </a:outerShdw>
-          </a:effectLst>
-        </p:spPr>
-      </p:sp>
-      <p:sp>
-        <p:nvSpPr>
-          <p:cNvPr id="24" name="Text 22"/>
-          <p:cNvSpPr/>
-          <p:nvPr/>
-        </p:nvSpPr>
-        <p:spPr>
-          <a:xfrm>
-            <a:off x="365760" y="2779776"/>
-            <a:ext cx="2011680" cy="457200"/>
-          </a:xfrm>
-          <a:prstGeom prst="rect">
-            <a:avLst/>
-          </a:prstGeom>
-          <a:noFill/>
-          <a:ln/>
-        </p:spPr>
-        <p:txBody>
-          <a:bodyPr wrap="square" lIns="0" tIns="0" rIns="0" bIns="0" rtlCol="0" anchor="ctr"/>
-          <a:lstStyle/>
-          <a:p>
-            <a:pPr algn="ctr" indent="0" marL="0">
-              <a:buNone/>
-            </a:pPr>
-            <a:r>
-              <a:rPr lang="en-US" sz="1200" b="1" dirty="0">
-                <a:solidFill>
-                  <a:srgbClr val="4338CA"/>
-                </a:solidFill>
-                <a:latin typeface="Trebuchet MS" pitchFamily="34" charset="0"/>
-                <a:ea typeface="Trebuchet MS" pitchFamily="34" charset="-122"/>
-                <a:cs typeface="Trebuchet MS" pitchFamily="34" charset="-120"/>
-              </a:rPr>
-              <a:t>darkish</a:t>
-            </a:r>
-            <a:endParaRPr lang="en-US" sz="1200" dirty="0"/>
-          </a:p>
-        </p:txBody>
-      </p:sp>
-      <p:sp>
-        <p:nvSpPr>
-          <p:cNvPr id="25" name="Shape 23"/>
-          <p:cNvSpPr/>
-          <p:nvPr/>
-        </p:nvSpPr>
-        <p:spPr>
-          <a:xfrm>
-            <a:off x="2514600" y="2779776"/>
-            <a:ext cx="6263640" cy="457200"/>
-          </a:xfrm>
-          <a:prstGeom prst="rect">
-            <a:avLst>
-              <a:gd name="adj" fmla="val 12000"/>
-            </a:avLst>
-          </a:prstGeom>
-          <a:solidFill>
-            <a:srgbClr val="F8FAFC"/>
-          </a:solidFill>
-          <a:ln w="12700">
-            <a:solidFill>
-              <a:srgbClr val="E2E8F0"/>
-            </a:solidFill>
-            <a:prstDash val="solid"/>
-          </a:ln>
-        </p:spPr>
-      </p:sp>
-      <p:sp>
-        <p:nvSpPr>
-          <p:cNvPr id="26" name="Text 24"/>
-          <p:cNvSpPr/>
-          <p:nvPr/>
-        </p:nvSpPr>
-        <p:spPr>
-          <a:xfrm>
-            <a:off x="2651760" y="2779776"/>
-            <a:ext cx="6035040" cy="457200"/>
-          </a:xfrm>
-          <a:prstGeom prst="rect">
-            <a:avLst/>
-          </a:prstGeom>
-          <a:noFill/>
-          <a:ln/>
-        </p:spPr>
-        <p:txBody>
-          <a:bodyPr wrap="square" rtlCol="0" anchor="ctr"/>
-          <a:lstStyle/>
-          <a:p>
-            <a:pPr algn="l" indent="0" marL="0">
-              <a:buNone/>
-            </a:pPr>
-            <a:r>
-              <a:rPr lang="en-US" sz="1200" dirty="0">
-                <a:solidFill>
-                  <a:srgbClr val="0F172A"/>
-                </a:solidFill>
-                <a:latin typeface="Calibri" pitchFamily="34" charset="0"/>
-                <a:ea typeface="Calibri" pitchFamily="34" charset="-122"/>
-                <a:cs typeface="Calibri" pitchFamily="34" charset="-120"/>
-              </a:rPr>
-              <a:t>The time after the sun has set and it is night.</a:t>
-            </a:r>
-            <a:endParaRPr lang="en-US" sz="1200" dirty="0"/>
-          </a:p>
-        </p:txBody>
-      </p:sp>
-      <p:sp>
-        <p:nvSpPr>
-          <p:cNvPr id="27" name="Shape 25"/>
-          <p:cNvSpPr/>
-          <p:nvPr/>
-        </p:nvSpPr>
-        <p:spPr>
-          <a:xfrm>
-            <a:off x="365760" y="3310128"/>
-            <a:ext cx="2011680" cy="457200"/>
-          </a:xfrm>
-          <a:prstGeom prst="rect">
-            <a:avLst>
-              <a:gd name="adj" fmla="val 12000"/>
-            </a:avLst>
-          </a:prstGeom>
-          <a:solidFill>
-            <a:srgbClr val="EEF2FF"/>
-          </a:solidFill>
-          <a:ln w="12700">
-            <a:solidFill>
-              <a:srgbClr val="6366F1"/>
-            </a:solidFill>
-            <a:prstDash val="solid"/>
-          </a:ln>
-          <a:effectLst>
-            <a:outerShdw sx="100000" sy="100000" kx="0" ky="0" algn="bl" rotWithShape="0" blurRad="101600" dist="38100" dir="8100000">
-              <a:srgbClr val="000000">
-                <a:alpha val="12000"/>
-              </a:srgbClr>
-            </a:outerShdw>
-          </a:effectLst>
-        </p:spPr>
-      </p:sp>
-      <p:sp>
-        <p:nvSpPr>
-          <p:cNvPr id="28" name="Text 26"/>
-          <p:cNvSpPr/>
-          <p:nvPr/>
-        </p:nvSpPr>
-        <p:spPr>
-          <a:xfrm>
-            <a:off x="365760" y="3310128"/>
-            <a:ext cx="2011680" cy="457200"/>
-          </a:xfrm>
-          <a:prstGeom prst="rect">
-            <a:avLst/>
-          </a:prstGeom>
-          <a:noFill/>
-          <a:ln/>
-        </p:spPr>
-        <p:txBody>
-          <a:bodyPr wrap="square" lIns="0" tIns="0" rIns="0" bIns="0" rtlCol="0" anchor="ctr"/>
-          <a:lstStyle/>
-          <a:p>
-            <a:pPr algn="ctr" indent="0" marL="0">
-              <a:buNone/>
-            </a:pPr>
-            <a:r>
-              <a:rPr lang="en-US" sz="1200" b="1" dirty="0">
-                <a:solidFill>
-                  <a:srgbClr val="4338CA"/>
-                </a:solidFill>
-                <a:latin typeface="Trebuchet MS" pitchFamily="34" charset="0"/>
-                <a:ea typeface="Trebuchet MS" pitchFamily="34" charset="-122"/>
-                <a:cs typeface="Trebuchet MS" pitchFamily="34" charset="-120"/>
-              </a:rPr>
-              <a:t>darkened</a:t>
-            </a:r>
-            <a:endParaRPr lang="en-US" sz="1200" dirty="0"/>
-          </a:p>
-        </p:txBody>
-      </p:sp>
-      <p:sp>
-        <p:nvSpPr>
-          <p:cNvPr id="29" name="Shape 27"/>
-          <p:cNvSpPr/>
-          <p:nvPr/>
-        </p:nvSpPr>
-        <p:spPr>
-          <a:xfrm>
-            <a:off x="2514600" y="3310128"/>
-            <a:ext cx="6263640" cy="457200"/>
-          </a:xfrm>
-          <a:prstGeom prst="rect">
-            <a:avLst>
-              <a:gd name="adj" fmla="val 12000"/>
-            </a:avLst>
-          </a:prstGeom>
-          <a:solidFill>
-            <a:srgbClr val="F8FAFC"/>
-          </a:solidFill>
-          <a:ln w="12700">
-            <a:solidFill>
-              <a:srgbClr val="E2E8F0"/>
-            </a:solidFill>
-            <a:prstDash val="solid"/>
-          </a:ln>
-        </p:spPr>
-      </p:sp>
-      <p:sp>
-        <p:nvSpPr>
-          <p:cNvPr id="30" name="Text 28"/>
-          <p:cNvSpPr/>
-          <p:nvPr/>
-        </p:nvSpPr>
-        <p:spPr>
-          <a:xfrm>
-            <a:off x="2651760" y="3310128"/>
-            <a:ext cx="6035040" cy="457200"/>
-          </a:xfrm>
-          <a:prstGeom prst="rect">
-            <a:avLst/>
-          </a:prstGeom>
-          <a:noFill/>
-          <a:ln/>
-        </p:spPr>
-        <p:txBody>
-          <a:bodyPr wrap="square" rtlCol="0" anchor="ctr"/>
-          <a:lstStyle/>
-          <a:p>
-            <a:pPr algn="l" indent="0" marL="0">
-              <a:buNone/>
-            </a:pPr>
-            <a:r>
-              <a:rPr lang="en-US" sz="1200" dirty="0">
-                <a:solidFill>
-                  <a:srgbClr val="0F172A"/>
-                </a:solidFill>
-                <a:latin typeface="Calibri" pitchFamily="34" charset="0"/>
-                <a:ea typeface="Calibri" pitchFamily="34" charset="-122"/>
-                <a:cs typeface="Calibri" pitchFamily="34" charset="-120"/>
-              </a:rPr>
-              <a:t>In a dark or mysterious way.</a:t>
-            </a:r>
-            <a:endParaRPr lang="en-US" sz="1200" dirty="0"/>
-          </a:p>
-        </p:txBody>
-      </p:sp>
-      <p:sp>
-        <p:nvSpPr>
-          <p:cNvPr id="31" name="Shape 29"/>
-          <p:cNvSpPr/>
-          <p:nvPr/>
-        </p:nvSpPr>
-        <p:spPr>
-          <a:xfrm>
-            <a:off x="365760" y="3840480"/>
-            <a:ext cx="2011680" cy="457200"/>
-          </a:xfrm>
-          <a:prstGeom prst="rect">
-            <a:avLst>
-              <a:gd name="adj" fmla="val 12000"/>
-            </a:avLst>
-          </a:prstGeom>
-          <a:solidFill>
-            <a:srgbClr val="EEF2FF"/>
-          </a:solidFill>
-          <a:ln w="12700">
-            <a:solidFill>
-              <a:srgbClr val="6366F1"/>
-            </a:solidFill>
-            <a:prstDash val="solid"/>
-          </a:ln>
-          <a:effectLst>
-            <a:outerShdw sx="100000" sy="100000" kx="0" ky="0" algn="bl" rotWithShape="0" blurRad="101600" dist="38100" dir="8100000">
-              <a:srgbClr val="000000">
-                <a:alpha val="12000"/>
-              </a:srgbClr>
-            </a:outerShdw>
-          </a:effectLst>
-        </p:spPr>
-      </p:sp>
-      <p:sp>
-        <p:nvSpPr>
-          <p:cNvPr id="32" name="Text 30"/>
-          <p:cNvSpPr/>
-          <p:nvPr/>
-        </p:nvSpPr>
-        <p:spPr>
-          <a:xfrm>
-            <a:off x="365760" y="3840480"/>
-            <a:ext cx="2011680" cy="457200"/>
-          </a:xfrm>
-          <a:prstGeom prst="rect">
-            <a:avLst/>
-          </a:prstGeom>
-          <a:noFill/>
-          <a:ln/>
-        </p:spPr>
-        <p:txBody>
-          <a:bodyPr wrap="square" lIns="0" tIns="0" rIns="0" bIns="0" rtlCol="0" anchor="ctr"/>
-          <a:lstStyle/>
-          <a:p>
-            <a:pPr algn="ctr" indent="0" marL="0">
-              <a:buNone/>
-            </a:pPr>
-            <a:r>
-              <a:rPr lang="en-US" sz="1200" b="1" dirty="0">
-                <a:solidFill>
-                  <a:srgbClr val="4338CA"/>
-                </a:solidFill>
-                <a:latin typeface="Trebuchet MS" pitchFamily="34" charset="0"/>
-                <a:ea typeface="Trebuchet MS" pitchFamily="34" charset="-122"/>
-                <a:cs typeface="Trebuchet MS" pitchFamily="34" charset="-120"/>
-              </a:rPr>
-              <a:t>afterdark</a:t>
-            </a:r>
-            <a:endParaRPr lang="en-US" sz="1200" dirty="0"/>
-          </a:p>
-        </p:txBody>
-      </p:sp>
-      <p:sp>
-        <p:nvSpPr>
-          <p:cNvPr id="33" name="Shape 31"/>
-          <p:cNvSpPr/>
-          <p:nvPr/>
-        </p:nvSpPr>
-        <p:spPr>
-          <a:xfrm>
-            <a:off x="2514600" y="3840480"/>
-            <a:ext cx="6263640" cy="457200"/>
-          </a:xfrm>
-          <a:prstGeom prst="rect">
-            <a:avLst>
-              <a:gd name="adj" fmla="val 12000"/>
-            </a:avLst>
-          </a:prstGeom>
-          <a:solidFill>
-            <a:srgbClr val="F8FAFC"/>
-          </a:solidFill>
-          <a:ln w="12700">
-            <a:solidFill>
-              <a:srgbClr val="E2E8F0"/>
-            </a:solidFill>
-            <a:prstDash val="solid"/>
-          </a:ln>
-        </p:spPr>
-      </p:sp>
-      <p:sp>
-        <p:nvSpPr>
-          <p:cNvPr id="34" name="Text 32"/>
-          <p:cNvSpPr/>
-          <p:nvPr/>
-        </p:nvSpPr>
-        <p:spPr>
-          <a:xfrm>
-            <a:off x="2651760" y="3840480"/>
-            <a:ext cx="6035040" cy="457200"/>
-          </a:xfrm>
-          <a:prstGeom prst="rect">
-            <a:avLst/>
-          </a:prstGeom>
-          <a:noFill/>
-          <a:ln/>
-        </p:spPr>
-        <p:txBody>
-          <a:bodyPr wrap="square" rtlCol="0" anchor="ctr"/>
-          <a:lstStyle/>
-          <a:p>
-            <a:pPr algn="l" indent="0" marL="0">
-              <a:buNone/>
-            </a:pPr>
-            <a:r>
-              <a:rPr lang="en-US" sz="1200" dirty="0">
-                <a:solidFill>
-                  <a:srgbClr val="0F172A"/>
-                </a:solidFill>
-                <a:latin typeface="Calibri" pitchFamily="34" charset="0"/>
-                <a:ea typeface="Calibri" pitchFamily="34" charset="-122"/>
-                <a:cs typeface="Calibri" pitchFamily="34" charset="-120"/>
-              </a:rPr>
-              <a:t>Slightly dark in colour or shade.</a:t>
-            </a:r>
-            <a:endParaRPr lang="en-US" sz="1200" dirty="0"/>
-          </a:p>
-        </p:txBody>
-      </p:sp>
-      <p:sp>
-        <p:nvSpPr>
-          <p:cNvPr id="35" name="Shape 33"/>
-          <p:cNvSpPr/>
-          <p:nvPr/>
-        </p:nvSpPr>
-        <p:spPr>
-          <a:xfrm>
-            <a:off x="365760" y="4370832"/>
-            <a:ext cx="2011680" cy="457200"/>
-          </a:xfrm>
-          <a:prstGeom prst="rect">
-            <a:avLst>
-              <a:gd name="adj" fmla="val 12000"/>
-            </a:avLst>
-          </a:prstGeom>
-          <a:solidFill>
-            <a:srgbClr val="EEF2FF"/>
-          </a:solidFill>
-          <a:ln w="12700">
-            <a:solidFill>
-              <a:srgbClr val="6366F1"/>
-            </a:solidFill>
-            <a:prstDash val="solid"/>
-          </a:ln>
-          <a:effectLst>
-            <a:outerShdw sx="100000" sy="100000" kx="0" ky="0" algn="bl" rotWithShape="0" blurRad="101600" dist="38100" dir="8100000">
-              <a:srgbClr val="000000">
-                <a:alpha val="12000"/>
-              </a:srgbClr>
-            </a:outerShdw>
-          </a:effectLst>
-        </p:spPr>
-      </p:sp>
-      <p:sp>
-        <p:nvSpPr>
-          <p:cNvPr id="36" name="Text 34"/>
-          <p:cNvSpPr/>
-          <p:nvPr/>
-        </p:nvSpPr>
-        <p:spPr>
-          <a:xfrm>
-            <a:off x="365760" y="4370832"/>
-            <a:ext cx="2011680" cy="457200"/>
-          </a:xfrm>
-          <a:prstGeom prst="rect">
-            <a:avLst/>
-          </a:prstGeom>
-          <a:noFill/>
-          <a:ln/>
-        </p:spPr>
-        <p:txBody>
-          <a:bodyPr wrap="square" lIns="0" tIns="0" rIns="0" bIns="0" rtlCol="0" anchor="ctr"/>
-          <a:lstStyle/>
-          <a:p>
-            <a:pPr algn="ctr" indent="0" marL="0">
-              <a:buNone/>
-            </a:pPr>
-            <a:r>
-              <a:rPr lang="en-US" sz="1200" b="1" dirty="0">
-                <a:solidFill>
-                  <a:srgbClr val="4338CA"/>
-                </a:solidFill>
-                <a:latin typeface="Trebuchet MS" pitchFamily="34" charset="0"/>
-                <a:ea typeface="Trebuchet MS" pitchFamily="34" charset="-122"/>
-                <a:cs typeface="Trebuchet MS" pitchFamily="34" charset="-120"/>
-              </a:rPr>
-              <a:t>midark</a:t>
-            </a:r>
-            <a:endParaRPr lang="en-US" sz="1200" dirty="0"/>
-          </a:p>
-        </p:txBody>
-      </p:sp>
-      <p:sp>
-        <p:nvSpPr>
-          <p:cNvPr id="37" name="Shape 35"/>
-          <p:cNvSpPr/>
-          <p:nvPr/>
-        </p:nvSpPr>
-        <p:spPr>
-          <a:xfrm>
-            <a:off x="2514600" y="4370832"/>
-            <a:ext cx="6263640" cy="457200"/>
-          </a:xfrm>
-          <a:prstGeom prst="rect">
-            <a:avLst>
-              <a:gd name="adj" fmla="val 12000"/>
-            </a:avLst>
-          </a:prstGeom>
-          <a:solidFill>
-            <a:srgbClr val="F8FAFC"/>
-          </a:solidFill>
-          <a:ln w="12700">
-            <a:solidFill>
-              <a:srgbClr val="E2E8F0"/>
-            </a:solidFill>
-            <a:prstDash val="solid"/>
-          </a:ln>
-        </p:spPr>
-      </p:sp>
-      <p:sp>
-        <p:nvSpPr>
-          <p:cNvPr id="38" name="Text 36"/>
-          <p:cNvSpPr/>
-          <p:nvPr/>
-        </p:nvSpPr>
-        <p:spPr>
-          <a:xfrm>
-            <a:off x="2651760" y="4370832"/>
-            <a:ext cx="6035040" cy="457200"/>
-          </a:xfrm>
-          <a:prstGeom prst="rect">
-            <a:avLst/>
-          </a:prstGeom>
-          <a:noFill/>
-          <a:ln/>
-        </p:spPr>
-        <p:txBody>
-          <a:bodyPr wrap="square" rtlCol="0" anchor="ctr"/>
-          <a:lstStyle/>
-          <a:p>
-            <a:pPr algn="l" indent="0" marL="0">
-              <a:buNone/>
-            </a:pPr>
-            <a:r>
-              <a:rPr lang="en-US" sz="1200" dirty="0">
-                <a:solidFill>
-                  <a:srgbClr val="0F172A"/>
-                </a:solidFill>
-                <a:latin typeface="Calibri" pitchFamily="34" charset="0"/>
-                <a:ea typeface="Calibri" pitchFamily="34" charset="-122"/>
-                <a:cs typeface="Calibri" pitchFamily="34" charset="-120"/>
-              </a:rPr>
-              <a:t>To make something become darker or less bright.</a:t>
+              <a:t>having little or no light</a:t>
             </a:r>
             <a:endParaRPr lang="en-US" sz="1200" dirty="0"/>
           </a:p>
@@ -40683,7 +39740,7 @@
                 <a:ea typeface="Calibri" pitchFamily="34" charset="-122"/>
                 <a:cs typeface="Calibri" pitchFamily="34" charset="-120"/>
               </a:rPr>
-              <a:t>Word Labs  •  wordlabs.app  •  Root: 'dark' = absence of light</a:t>
+              <a:t>Word Labs  •  wordlabs.app  •  Root: 'dark' = with little or no light</a:t>
             </a:r>
             <a:endParaRPr lang="en-US" sz="800" dirty="0"/>
           </a:p>
@@ -40886,7 +39943,7 @@
                 <a:ea typeface="Calibri" pitchFamily="34" charset="-122"/>
                 <a:cs typeface="Calibri" pitchFamily="34" charset="-120"/>
               </a:rPr>
-              <a:t>The darkness in the cave made it hard for the explorers to find their way.</a:t>
+              <a:t>It was so dark in the cave that we could barely see our hands.</a:t>
             </a:r>
             <a:endParaRPr lang="en-US" sz="1500" dirty="0"/>
           </a:p>
@@ -41050,7 +40107,7 @@
                 <a:ea typeface="Calibri" pitchFamily="34" charset="-122"/>
                 <a:cs typeface="Calibri" pitchFamily="34" charset="-120"/>
               </a:rPr>
-              <a:t>As the storm clouds gathered, the sky began to darken very quickly.</a:t>
+              <a:t>Storm clouds began to darken the sky before the rain started.</a:t>
             </a:r>
             <a:endParaRPr lang="en-US" sz="1500" dirty="0"/>
           </a:p>
@@ -41214,7 +40271,7 @@
                 <a:ea typeface="Calibri" pitchFamily="34" charset="-122"/>
                 <a:cs typeface="Calibri" pitchFamily="34" charset="-120"/>
               </a:rPr>
-              <a:t>She spoke darkly about the mysterious figure she had seen near the old house.</a:t>
+              <a:t>The forest looked much darker once we walked in among the tall trees.</a:t>
             </a:r>
             <a:endParaRPr lang="en-US" sz="1500" dirty="0"/>
           </a:p>
